--- a/RFID读取评估_2026-10-21/09_报告/RFID读取能力评估_2026-10-22.pptx
+++ b/RFID读取评估_2026-10-21/09_报告/RFID读取能力评估_2026-10-22.pptx
@@ -8005,7 +8005,7 @@
                 <a:ea typeface="微软雅黑"/>
                 <a:cs typeface="Arial"/>
               </a:rPr>
-              <a:t>R2：可挑选的 RFID 模组类型（手册参数对比）</a:t>
+              <a:t>R2：模组选型 —— 目标是「一次过板读全 6 台」</a:t>
             </a:r>
           </a:p>
         </p:txBody>
@@ -8046,7 +8046,7 @@
                 <a:ea typeface="微软雅黑"/>
                 <a:cs typeface="Arial"/>
               </a:rPr>
-              <a:t>先定形态再定型号；下表参数均来自厂家 datasheet / 产品页，未做实测</a:t>
+              <a:t>过板时箱子只经过读取区几百毫秒；判据不是“能不能读到”，而是这个窗口内 6/6 的命中概率</a:t>
             </a:r>
           </a:p>
         </p:txBody>
@@ -8203,9 +8203,94 @@
           </a:fontRef>
         </p:style>
       </p:cxnSp>
+      <p:sp>
+        <p:nvSpPr>
+          <p:cNvPr id="8" name="Rectangle 7"/>
+          <p:cNvSpPr/>
+          <p:nvPr/>
+        </p:nvSpPr>
+        <p:spPr>
+          <a:xfrm>
+            <a:off x="566928" y="1298448"/>
+            <a:ext cx="11057839" cy="548640"/>
+          </a:xfrm>
+          <a:prstGeom prst="rect">
+            <a:avLst/>
+          </a:prstGeom>
+          <a:solidFill>
+            <a:srgbClr val="E6EDF9"/>
+          </a:solidFill>
+          <a:ln>
+            <a:noFill/>
+          </a:ln>
+          <a:effectLst/>
+        </p:spPr>
+        <p:style>
+          <a:lnRef idx="1">
+            <a:schemeClr val="accent1"/>
+          </a:lnRef>
+          <a:fillRef idx="3">
+            <a:schemeClr val="accent1"/>
+          </a:fillRef>
+          <a:effectRef idx="2">
+            <a:schemeClr val="accent1"/>
+          </a:effectRef>
+          <a:fontRef idx="minor">
+            <a:schemeClr val="lt1"/>
+          </a:fontRef>
+        </p:style>
+        <p:txBody>
+          <a:bodyPr rtlCol="0" anchor="ctr" wrap="square"/>
+          <a:lstStyle/>
+          <a:p>
+            <a:pPr algn="ctr"/>
+          </a:p>
+        </p:txBody>
+      </p:sp>
+      <p:sp>
+        <p:nvSpPr>
+          <p:cNvPr id="9" name="TextBox 8"/>
+          <p:cNvSpPr txBox="1"/>
+          <p:nvPr/>
+        </p:nvSpPr>
+        <p:spPr>
+          <a:xfrm>
+            <a:off x="731520" y="1371600"/>
+            <a:ext cx="10728655" cy="420624"/>
+          </a:xfrm>
+          <a:prstGeom prst="rect">
+            <a:avLst/>
+          </a:prstGeom>
+          <a:noFill/>
+        </p:spPr>
+        <p:txBody>
+          <a:bodyPr wrap="square" anchor="t" lIns="0" rIns="0" tIns="0" bIns="0">
+            <a:spAutoFit/>
+          </a:bodyPr>
+          <a:lstStyle/>
+          <a:p>
+            <a:pPr>
+              <a:lnSpc>
+                <a:spcPct val="120000"/>
+              </a:lnSpc>
+            </a:pPr>
+            <a:r>
+              <a:rPr sz="1100" b="1">
+                <a:solidFill>
+                  <a:srgbClr val="3E5DA8"/>
+                </a:solidFill>
+                <a:latin typeface="Arial"/>
+                <a:ea typeface="微软雅黑"/>
+                <a:cs typeface="Arial"/>
+              </a:rPr>
+              <a:t>一次过板 = 单次盘存窗口内 6 个整机标签全部读到（6/6），不靠重复过板补读 —— 这是选型的唯一硬指标。</a:t>
+            </a:r>
+          </a:p>
+        </p:txBody>
+      </p:sp>
       <p:pic>
         <p:nvPicPr>
-          <p:cNvPr id="8" name="Picture 7" descr="fig10_hw_modules.png"/>
+          <p:cNvPr id="10" name="Picture 9" descr="fig10_hw_modules.png"/>
           <p:cNvPicPr>
             <a:picLocks noChangeAspect="1"/>
           </p:cNvPicPr>
@@ -8219,8 +8304,8 @@
         </p:blipFill>
         <p:spPr>
           <a:xfrm>
-            <a:off x="566928" y="1298448"/>
-            <a:ext cx="6053328" cy="2133616"/>
+            <a:off x="566928" y="1956816"/>
+            <a:ext cx="5760720" cy="2030480"/>
           </a:xfrm>
           <a:prstGeom prst="rect">
             <a:avLst/>
@@ -8229,14 +8314,14 @@
       </p:pic>
       <p:sp>
         <p:nvSpPr>
-          <p:cNvPr id="9" name="TextBox 8"/>
+          <p:cNvPr id="11" name="TextBox 10"/>
           <p:cNvSpPr txBox="1"/>
           <p:nvPr/>
         </p:nvSpPr>
         <p:spPr>
           <a:xfrm>
-            <a:off x="566928" y="3584448"/>
-            <a:ext cx="6035040" cy="237744"/>
+            <a:off x="566928" y="4114800"/>
+            <a:ext cx="5760720" cy="237744"/>
           </a:xfrm>
           <a:prstGeom prst="rect">
             <a:avLst/>
@@ -8255,41 +8340,42 @@
               </a:lnSpc>
             </a:pPr>
             <a:r>
-              <a:rPr sz="1000" b="1">
+              <a:rPr sz="950" b="0">
                 <a:solidFill>
-                  <a:srgbClr val="1A1A1A"/>
+                  <a:srgbClr val="8C8C8C"/>
                 </a:solidFill>
                 <a:latin typeface="Arial"/>
                 <a:ea typeface="微软雅黑"/>
                 <a:cs typeface="Arial"/>
               </a:rPr>
-              <a:t>四种形态（本项目＝工业读头 / 分体式）</a:t>
+              <a:t>手册参数（逐条摘自厂家 datasheet / 产品页，未做实测）</a:t>
             </a:r>
           </a:p>
         </p:txBody>
       </p:sp>
       <p:graphicFrame>
         <p:nvGraphicFramePr>
-          <p:cNvPr id="10" name="Table 9"/>
+          <p:cNvPr id="12" name="Table 11"/>
           <p:cNvGraphicFramePr>
             <a:graphicFrameLocks noGrp="1"/>
           </p:cNvGraphicFramePr>
           <p:nvPr/>
         </p:nvGraphicFramePr>
         <p:xfrm>
-          <a:off x="566928" y="3858768"/>
-          <a:ext cx="6053326" cy="1737360"/>
+          <a:off x="6492240" y="1956816"/>
+          <a:ext cx="5129783" cy="2450592"/>
         </p:xfrm>
         <a:graphic>
           <a:graphicData uri="http://schemas.openxmlformats.org/drawingml/2006/table">
             <a:tbl>
               <a:tblPr/>
               <a:tblGrid>
-                <a:gridCol w="1421614"/>
-                <a:gridCol w="1696766"/>
-                <a:gridCol w="2934946"/>
+                <a:gridCol w="1979916"/>
+                <a:gridCol w="1349943"/>
+                <a:gridCol w="944960"/>
+                <a:gridCol w="854964"/>
               </a:tblGrid>
-              <a:tr h="347472">
+              <a:tr h="306324">
                 <a:tc>
                   <a:txBody>
                     <a:bodyPr/>
@@ -8301,7 +8387,7 @@
                         </a:lnSpc>
                       </a:pPr>
                       <a:r>
-                        <a:rPr sz="850" b="1">
+                        <a:rPr sz="819" b="1">
                           <a:solidFill>
                             <a:srgbClr val="1A1A1A"/>
                           </a:solidFill>
@@ -8309,7 +8395,7 @@
                           <a:ea typeface="微软雅黑"/>
                           <a:cs typeface="Arial"/>
                         </a:rPr>
-                        <a:t>形态</a:t>
+                        <a:t>型号（形态）</a:t>
                       </a:r>
                     </a:p>
                   </a:txBody>
@@ -8354,7 +8440,7 @@
                         </a:lnSpc>
                       </a:pPr>
                       <a:r>
-                        <a:rPr sz="850" b="1">
+                        <a:rPr sz="819" b="1">
                           <a:solidFill>
                             <a:srgbClr val="1A1A1A"/>
                           </a:solidFill>
@@ -8362,7 +8448,7 @@
                           <a:ea typeface="微软雅黑"/>
                           <a:cs typeface="Arial"/>
                         </a:rPr>
-                        <a:t>接口</a:t>
+                        <a:t>口数 / 功率</a:t>
                       </a:r>
                     </a:p>
                   </a:txBody>
@@ -8401,13 +8487,13 @@
                     <a:bodyPr/>
                     <a:lstStyle/>
                     <a:p>
-                      <a:pPr algn="l">
+                      <a:pPr algn="ctr">
                         <a:lnSpc>
                           <a:spcPct val="100000"/>
                         </a:lnSpc>
                       </a:pPr>
                       <a:r>
-                        <a:rPr sz="850" b="1">
+                        <a:rPr sz="819" b="1">
                           <a:solidFill>
                             <a:srgbClr val="1A1A1A"/>
                           </a:solidFill>
@@ -8415,7 +8501,60 @@
                           <a:ea typeface="微软雅黑"/>
                           <a:cs typeface="Arial"/>
                         </a:rPr>
-                        <a:t>适用</a:t>
+                        <a:t>读取率</a:t>
+                      </a:r>
+                    </a:p>
+                  </a:txBody>
+                  <a:tcPr marL="50292" marR="50292" marT="13716" marB="13716" anchor="ctr">
+                    <a:lnL w="9525" cap="flat" cmpd="sng" algn="ctr">
+                      <a:solidFill>
+                        <a:srgbClr val="D9D9D9"/>
+                      </a:solidFill>
+                      <a:prstDash val="solid"/>
+                    </a:lnL>
+                    <a:lnR w="9525" cap="flat" cmpd="sng" algn="ctr">
+                      <a:solidFill>
+                        <a:srgbClr val="D9D9D9"/>
+                      </a:solidFill>
+                      <a:prstDash val="solid"/>
+                    </a:lnR>
+                    <a:lnT w="9525" cap="flat" cmpd="sng" algn="ctr">
+                      <a:solidFill>
+                        <a:srgbClr val="D9D9D9"/>
+                      </a:solidFill>
+                      <a:prstDash val="solid"/>
+                    </a:lnT>
+                    <a:lnB w="9525" cap="flat" cmpd="sng" algn="ctr">
+                      <a:solidFill>
+                        <a:srgbClr val="D9D9D9"/>
+                      </a:solidFill>
+                      <a:prstDash val="solid"/>
+                    </a:lnB>
+                    <a:solidFill>
+                      <a:srgbClr val="F2F2F2"/>
+                    </a:solidFill>
+                  </a:tcPr>
+                </a:tc>
+                <a:tc>
+                  <a:txBody>
+                    <a:bodyPr/>
+                    <a:lstStyle/>
+                    <a:p>
+                      <a:pPr algn="ctr">
+                        <a:lnSpc>
+                          <a:spcPct val="100000"/>
+                        </a:lnSpc>
+                      </a:pPr>
+                      <a:r>
+                        <a:rPr sz="819" b="1">
+                          <a:solidFill>
+                            <a:srgbClr val="1A1A1A"/>
+                          </a:solidFill>
+                          <a:latin typeface="Arial"/>
+                          <a:ea typeface="微软雅黑"/>
+                          <a:cs typeface="Arial"/>
+                        </a:rPr>
+                        <a:t>过板 6/6</a:t>
                       </a:r>
                     </a:p>
                   </a:txBody>
@@ -8450,7 +8589,7 @@
                   </a:tcPr>
                 </a:tc>
               </a:tr>
-              <a:tr h="347472">
+              <a:tr h="306324">
                 <a:tc>
                   <a:txBody>
                     <a:bodyPr/>
@@ -8462,7 +8601,7 @@
                         </a:lnSpc>
                       </a:pPr>
                       <a:r>
-                        <a:rPr sz="900" b="1">
+                        <a:rPr sz="860" b="1">
                           <a:solidFill>
                             <a:srgbClr val="1A1A1A"/>
                           </a:solidFill>
@@ -8470,7 +8609,7 @@
                           <a:ea typeface="微软雅黑"/>
                           <a:cs typeface="Arial"/>
                         </a:rPr>
-                        <a:t>嵌入式模组</a:t>
+                        <a:t>Impinj R700（工业读头）</a:t>
                       </a:r>
                     </a:p>
                   </a:txBody>
@@ -8515,7 +8654,7 @@
                         </a:lnSpc>
                       </a:pPr>
                       <a:r>
-                        <a:rPr sz="900" b="0">
+                        <a:rPr sz="860" b="0">
                           <a:solidFill>
                             <a:srgbClr val="1A1A1A"/>
                           </a:solidFill>
@@ -8523,7 +8662,168 @@
                           <a:ea typeface="微软雅黑"/>
                           <a:cs typeface="Arial"/>
                         </a:rPr>
-                        <a:t>UART / SPI / USB</a:t>
+                        <a:t>4 口 · 33 dBm</a:t>
+                      </a:r>
+                    </a:p>
+                  </a:txBody>
+                  <a:tcPr marL="50292" marR="50292" marT="13716" marB="13716" anchor="ctr">
+                    <a:lnL w="9525" cap="flat" cmpd="sng" algn="ctr">
+                      <a:solidFill>
+                        <a:srgbClr val="D9D9D9"/>
+                      </a:solidFill>
+                      <a:prstDash val="solid"/>
+                    </a:lnL>
+                    <a:lnR w="9525" cap="flat" cmpd="sng" algn="ctr">
+                      <a:solidFill>
+                        <a:srgbClr val="D9D9D9"/>
+                      </a:solidFill>
+                      <a:prstDash val="solid"/>
+                    </a:lnR>
+                    <a:lnT w="9525" cap="flat" cmpd="sng" algn="ctr">
+                      <a:solidFill>
+                        <a:srgbClr val="D9D9D9"/>
+                      </a:solidFill>
+                      <a:prstDash val="solid"/>
+                    </a:lnT>
+                    <a:lnB w="9525" cap="flat" cmpd="sng" algn="ctr">
+                      <a:solidFill>
+                        <a:srgbClr val="D9D9D9"/>
+                      </a:solidFill>
+                      <a:prstDash val="solid"/>
+                    </a:lnB>
+                    <a:solidFill>
+                      <a:srgbClr val="FFFFFF"/>
+                    </a:solidFill>
+                  </a:tcPr>
+                </a:tc>
+                <a:tc>
+                  <a:txBody>
+                    <a:bodyPr/>
+                    <a:lstStyle/>
+                    <a:p>
+                      <a:pPr algn="ctr">
+                        <a:lnSpc>
+                          <a:spcPct val="100000"/>
+                        </a:lnSpc>
+                      </a:pPr>
+                      <a:r>
+                        <a:rPr sz="860" b="0">
+                          <a:solidFill>
+                            <a:srgbClr val="1A1A1A"/>
+                          </a:solidFill>
+                          <a:latin typeface="Arial"/>
+                          <a:ea typeface="微软雅黑"/>
+                          <a:cs typeface="Arial"/>
+                        </a:rPr>
+                        <a:t>1100 tags/s</a:t>
+                      </a:r>
+                    </a:p>
+                  </a:txBody>
+                  <a:tcPr marL="50292" marR="50292" marT="13716" marB="13716" anchor="ctr">
+                    <a:lnL w="9525" cap="flat" cmpd="sng" algn="ctr">
+                      <a:solidFill>
+                        <a:srgbClr val="D9D9D9"/>
+                      </a:solidFill>
+                      <a:prstDash val="solid"/>
+                    </a:lnL>
+                    <a:lnR w="9525" cap="flat" cmpd="sng" algn="ctr">
+                      <a:solidFill>
+                        <a:srgbClr val="D9D9D9"/>
+                      </a:solidFill>
+                      <a:prstDash val="solid"/>
+                    </a:lnR>
+                    <a:lnT w="9525" cap="flat" cmpd="sng" algn="ctr">
+                      <a:solidFill>
+                        <a:srgbClr val="D9D9D9"/>
+                      </a:solidFill>
+                      <a:prstDash val="solid"/>
+                    </a:lnT>
+                    <a:lnB w="9525" cap="flat" cmpd="sng" algn="ctr">
+                      <a:solidFill>
+                        <a:srgbClr val="D9D9D9"/>
+                      </a:solidFill>
+                      <a:prstDash val="solid"/>
+                    </a:lnB>
+                    <a:solidFill>
+                      <a:srgbClr val="FFFFFF"/>
+                    </a:solidFill>
+                  </a:tcPr>
+                </a:tc>
+                <a:tc>
+                  <a:txBody>
+                    <a:bodyPr/>
+                    <a:lstStyle/>
+                    <a:p>
+                      <a:pPr algn="ctr">
+                        <a:lnSpc>
+                          <a:spcPct val="100000"/>
+                        </a:lnSpc>
+                      </a:pPr>
+                      <a:r>
+                        <a:rPr sz="860" b="0">
+                          <a:solidFill>
+                            <a:srgbClr val="1A1A1A"/>
+                          </a:solidFill>
+                          <a:latin typeface="Arial"/>
+                          <a:ea typeface="微软雅黑"/>
+                          <a:cs typeface="Arial"/>
+                        </a:rPr>
+                        <a:t>✅ 首选</a:t>
+                      </a:r>
+                    </a:p>
+                  </a:txBody>
+                  <a:tcPr marL="50292" marR="50292" marT="13716" marB="13716" anchor="ctr">
+                    <a:lnL w="9525" cap="flat" cmpd="sng" algn="ctr">
+                      <a:solidFill>
+                        <a:srgbClr val="D9D9D9"/>
+                      </a:solidFill>
+                      <a:prstDash val="solid"/>
+                    </a:lnL>
+                    <a:lnR w="9525" cap="flat" cmpd="sng" algn="ctr">
+                      <a:solidFill>
+                        <a:srgbClr val="D9D9D9"/>
+                      </a:solidFill>
+                      <a:prstDash val="solid"/>
+                    </a:lnR>
+                    <a:lnT w="9525" cap="flat" cmpd="sng" algn="ctr">
+                      <a:solidFill>
+                        <a:srgbClr val="D9D9D9"/>
+                      </a:solidFill>
+                      <a:prstDash val="solid"/>
+                    </a:lnT>
+                    <a:lnB w="9525" cap="flat" cmpd="sng" algn="ctr">
+                      <a:solidFill>
+                        <a:srgbClr val="D9D9D9"/>
+                      </a:solidFill>
+                      <a:prstDash val="solid"/>
+                    </a:lnB>
+                    <a:solidFill>
+                      <a:srgbClr val="FFFFFF"/>
+                    </a:solidFill>
+                  </a:tcPr>
+                </a:tc>
+              </a:tr>
+              <a:tr h="306324">
+                <a:tc>
+                  <a:txBody>
+                    <a:bodyPr/>
+                    <a:lstStyle/>
+                    <a:p>
+                      <a:pPr algn="l">
+                        <a:lnSpc>
+                          <a:spcPct val="100000"/>
+                        </a:lnSpc>
+                      </a:pPr>
+                      <a:r>
+                        <a:rPr sz="860" b="1">
+                          <a:solidFill>
+                            <a:srgbClr val="1A1A1A"/>
+                          </a:solidFill>
+                          <a:latin typeface="Arial"/>
+                          <a:ea typeface="微软雅黑"/>
+                          <a:cs typeface="Arial"/>
+                        </a:rPr>
+                        <a:t>Impinj R420（工业读头）</a:t>
                       </a:r>
                     </a:p>
                   </a:txBody>
@@ -8568,7 +8868,7 @@
                         </a:lnSpc>
                       </a:pPr>
                       <a:r>
-                        <a:rPr sz="900" b="0">
+                        <a:rPr sz="860" b="0">
                           <a:solidFill>
                             <a:srgbClr val="1A1A1A"/>
                           </a:solidFill>
@@ -8576,7 +8876,113 @@
                           <a:ea typeface="微软雅黑"/>
                           <a:cs typeface="Arial"/>
                         </a:rPr>
-                        <a:t>自研设备集成，需硬件能力</a:t>
+                        <a:t>4 口 · 32.5 dBm</a:t>
+                      </a:r>
+                    </a:p>
+                  </a:txBody>
+                  <a:tcPr marL="50292" marR="50292" marT="13716" marB="13716" anchor="ctr">
+                    <a:lnL w="9525" cap="flat" cmpd="sng" algn="ctr">
+                      <a:solidFill>
+                        <a:srgbClr val="D9D9D9"/>
+                      </a:solidFill>
+                      <a:prstDash val="solid"/>
+                    </a:lnL>
+                    <a:lnR w="9525" cap="flat" cmpd="sng" algn="ctr">
+                      <a:solidFill>
+                        <a:srgbClr val="D9D9D9"/>
+                      </a:solidFill>
+                      <a:prstDash val="solid"/>
+                    </a:lnR>
+                    <a:lnT w="9525" cap="flat" cmpd="sng" algn="ctr">
+                      <a:solidFill>
+                        <a:srgbClr val="D9D9D9"/>
+                      </a:solidFill>
+                      <a:prstDash val="solid"/>
+                    </a:lnT>
+                    <a:lnB w="9525" cap="flat" cmpd="sng" algn="ctr">
+                      <a:solidFill>
+                        <a:srgbClr val="D9D9D9"/>
+                      </a:solidFill>
+                      <a:prstDash val="solid"/>
+                    </a:lnB>
+                    <a:solidFill>
+                      <a:srgbClr val="FFFFFF"/>
+                    </a:solidFill>
+                  </a:tcPr>
+                </a:tc>
+                <a:tc>
+                  <a:txBody>
+                    <a:bodyPr/>
+                    <a:lstStyle/>
+                    <a:p>
+                      <a:pPr algn="ctr">
+                        <a:lnSpc>
+                          <a:spcPct val="100000"/>
+                        </a:lnSpc>
+                      </a:pPr>
+                      <a:r>
+                        <a:rPr sz="860" b="0">
+                          <a:solidFill>
+                            <a:srgbClr val="1A1A1A"/>
+                          </a:solidFill>
+                          <a:latin typeface="Arial"/>
+                          <a:ea typeface="微软雅黑"/>
+                          <a:cs typeface="Arial"/>
+                        </a:rPr>
+                        <a:t>1100 tags/s</a:t>
+                      </a:r>
+                    </a:p>
+                  </a:txBody>
+                  <a:tcPr marL="50292" marR="50292" marT="13716" marB="13716" anchor="ctr">
+                    <a:lnL w="9525" cap="flat" cmpd="sng" algn="ctr">
+                      <a:solidFill>
+                        <a:srgbClr val="D9D9D9"/>
+                      </a:solidFill>
+                      <a:prstDash val="solid"/>
+                    </a:lnL>
+                    <a:lnR w="9525" cap="flat" cmpd="sng" algn="ctr">
+                      <a:solidFill>
+                        <a:srgbClr val="D9D9D9"/>
+                      </a:solidFill>
+                      <a:prstDash val="solid"/>
+                    </a:lnR>
+                    <a:lnT w="9525" cap="flat" cmpd="sng" algn="ctr">
+                      <a:solidFill>
+                        <a:srgbClr val="D9D9D9"/>
+                      </a:solidFill>
+                      <a:prstDash val="solid"/>
+                    </a:lnT>
+                    <a:lnB w="9525" cap="flat" cmpd="sng" algn="ctr">
+                      <a:solidFill>
+                        <a:srgbClr val="D9D9D9"/>
+                      </a:solidFill>
+                      <a:prstDash val="solid"/>
+                    </a:lnB>
+                    <a:solidFill>
+                      <a:srgbClr val="FFFFFF"/>
+                    </a:solidFill>
+                  </a:tcPr>
+                </a:tc>
+                <a:tc>
+                  <a:txBody>
+                    <a:bodyPr/>
+                    <a:lstStyle/>
+                    <a:p>
+                      <a:pPr algn="ctr">
+                        <a:lnSpc>
+                          <a:spcPct val="100000"/>
+                        </a:lnSpc>
+                      </a:pPr>
+                      <a:r>
+                        <a:rPr sz="860" b="0">
+                          <a:solidFill>
+                            <a:srgbClr val="1A1A1A"/>
+                          </a:solidFill>
+                          <a:latin typeface="Arial"/>
+                          <a:ea typeface="微软雅黑"/>
+                          <a:cs typeface="Arial"/>
+                        </a:rPr>
+                        <a:t>✅ 满足</a:t>
                       </a:r>
                     </a:p>
                   </a:txBody>
@@ -8611,7 +9017,7 @@
                   </a:tcPr>
                 </a:tc>
               </a:tr>
-              <a:tr h="347472">
+              <a:tr h="306324">
                 <a:tc>
                   <a:txBody>
                     <a:bodyPr/>
@@ -8623,7 +9029,7 @@
                         </a:lnSpc>
                       </a:pPr>
                       <a:r>
-                        <a:rPr sz="900" b="1">
+                        <a:rPr sz="860" b="1">
                           <a:solidFill>
                             <a:srgbClr val="1A1A1A"/>
                           </a:solidFill>
@@ -8631,7 +9037,7 @@
                           <a:ea typeface="微软雅黑"/>
                           <a:cs typeface="Arial"/>
                         </a:rPr>
-                        <a:t>工业读头（分体）</a:t>
+                        <a:t>RodinBell M-703 / E710</a:t>
                       </a:r>
                     </a:p>
                   </a:txBody>
@@ -8676,7 +9082,7 @@
                         </a:lnSpc>
                       </a:pPr>
                       <a:r>
-                        <a:rPr sz="900" b="0">
+                        <a:rPr sz="860" b="0">
                           <a:solidFill>
                             <a:srgbClr val="1A1A1A"/>
                           </a:solidFill>
@@ -8684,7 +9090,168 @@
                           <a:ea typeface="微软雅黑"/>
                           <a:cs typeface="Arial"/>
                         </a:rPr>
-                        <a:t>以太网 / RS485 / GPIO</a:t>
+                        <a:t>8 口 · 33 dBm</a:t>
+                      </a:r>
+                    </a:p>
+                  </a:txBody>
+                  <a:tcPr marL="50292" marR="50292" marT="13716" marB="13716" anchor="ctr">
+                    <a:lnL w="9525" cap="flat" cmpd="sng" algn="ctr">
+                      <a:solidFill>
+                        <a:srgbClr val="D9D9D9"/>
+                      </a:solidFill>
+                      <a:prstDash val="solid"/>
+                    </a:lnL>
+                    <a:lnR w="9525" cap="flat" cmpd="sng" algn="ctr">
+                      <a:solidFill>
+                        <a:srgbClr val="D9D9D9"/>
+                      </a:solidFill>
+                      <a:prstDash val="solid"/>
+                    </a:lnR>
+                    <a:lnT w="9525" cap="flat" cmpd="sng" algn="ctr">
+                      <a:solidFill>
+                        <a:srgbClr val="D9D9D9"/>
+                      </a:solidFill>
+                      <a:prstDash val="solid"/>
+                    </a:lnT>
+                    <a:lnB w="9525" cap="flat" cmpd="sng" algn="ctr">
+                      <a:solidFill>
+                        <a:srgbClr val="D9D9D9"/>
+                      </a:solidFill>
+                      <a:prstDash val="solid"/>
+                    </a:lnB>
+                    <a:solidFill>
+                      <a:srgbClr val="FFFFFF"/>
+                    </a:solidFill>
+                  </a:tcPr>
+                </a:tc>
+                <a:tc>
+                  <a:txBody>
+                    <a:bodyPr/>
+                    <a:lstStyle/>
+                    <a:p>
+                      <a:pPr algn="ctr">
+                        <a:lnSpc>
+                          <a:spcPct val="100000"/>
+                        </a:lnSpc>
+                      </a:pPr>
+                      <a:r>
+                        <a:rPr sz="860" b="0">
+                          <a:solidFill>
+                            <a:srgbClr val="1A1A1A"/>
+                          </a:solidFill>
+                          <a:latin typeface="Arial"/>
+                          <a:ea typeface="微软雅黑"/>
+                          <a:cs typeface="Arial"/>
+                        </a:rPr>
+                        <a:t>900 tags/s</a:t>
+                      </a:r>
+                    </a:p>
+                  </a:txBody>
+                  <a:tcPr marL="50292" marR="50292" marT="13716" marB="13716" anchor="ctr">
+                    <a:lnL w="9525" cap="flat" cmpd="sng" algn="ctr">
+                      <a:solidFill>
+                        <a:srgbClr val="D9D9D9"/>
+                      </a:solidFill>
+                      <a:prstDash val="solid"/>
+                    </a:lnL>
+                    <a:lnR w="9525" cap="flat" cmpd="sng" algn="ctr">
+                      <a:solidFill>
+                        <a:srgbClr val="D9D9D9"/>
+                      </a:solidFill>
+                      <a:prstDash val="solid"/>
+                    </a:lnR>
+                    <a:lnT w="9525" cap="flat" cmpd="sng" algn="ctr">
+                      <a:solidFill>
+                        <a:srgbClr val="D9D9D9"/>
+                      </a:solidFill>
+                      <a:prstDash val="solid"/>
+                    </a:lnT>
+                    <a:lnB w="9525" cap="flat" cmpd="sng" algn="ctr">
+                      <a:solidFill>
+                        <a:srgbClr val="D9D9D9"/>
+                      </a:solidFill>
+                      <a:prstDash val="solid"/>
+                    </a:lnB>
+                    <a:solidFill>
+                      <a:srgbClr val="FFFFFF"/>
+                    </a:solidFill>
+                  </a:tcPr>
+                </a:tc>
+                <a:tc>
+                  <a:txBody>
+                    <a:bodyPr/>
+                    <a:lstStyle/>
+                    <a:p>
+                      <a:pPr algn="ctr">
+                        <a:lnSpc>
+                          <a:spcPct val="100000"/>
+                        </a:lnSpc>
+                      </a:pPr>
+                      <a:r>
+                        <a:rPr sz="860" b="0">
+                          <a:solidFill>
+                            <a:srgbClr val="1A1A1A"/>
+                          </a:solidFill>
+                          <a:latin typeface="Arial"/>
+                          <a:ea typeface="微软雅黑"/>
+                          <a:cs typeface="Arial"/>
+                        </a:rPr>
+                        <a:t>✅ 覆盖好</a:t>
+                      </a:r>
+                    </a:p>
+                  </a:txBody>
+                  <a:tcPr marL="50292" marR="50292" marT="13716" marB="13716" anchor="ctr">
+                    <a:lnL w="9525" cap="flat" cmpd="sng" algn="ctr">
+                      <a:solidFill>
+                        <a:srgbClr val="D9D9D9"/>
+                      </a:solidFill>
+                      <a:prstDash val="solid"/>
+                    </a:lnL>
+                    <a:lnR w="9525" cap="flat" cmpd="sng" algn="ctr">
+                      <a:solidFill>
+                        <a:srgbClr val="D9D9D9"/>
+                      </a:solidFill>
+                      <a:prstDash val="solid"/>
+                    </a:lnR>
+                    <a:lnT w="9525" cap="flat" cmpd="sng" algn="ctr">
+                      <a:solidFill>
+                        <a:srgbClr val="D9D9D9"/>
+                      </a:solidFill>
+                      <a:prstDash val="solid"/>
+                    </a:lnT>
+                    <a:lnB w="9525" cap="flat" cmpd="sng" algn="ctr">
+                      <a:solidFill>
+                        <a:srgbClr val="D9D9D9"/>
+                      </a:solidFill>
+                      <a:prstDash val="solid"/>
+                    </a:lnB>
+                    <a:solidFill>
+                      <a:srgbClr val="FFFFFF"/>
+                    </a:solidFill>
+                  </a:tcPr>
+                </a:tc>
+              </a:tr>
+              <a:tr h="306324">
+                <a:tc>
+                  <a:txBody>
+                    <a:bodyPr/>
+                    <a:lstStyle/>
+                    <a:p>
+                      <a:pPr algn="l">
+                        <a:lnSpc>
+                          <a:spcPct val="100000"/>
+                        </a:lnSpc>
+                      </a:pPr>
+                      <a:r>
+                        <a:rPr sz="860" b="1">
+                          <a:solidFill>
+                            <a:srgbClr val="1A1A1A"/>
+                          </a:solidFill>
+                          <a:latin typeface="Arial"/>
+                          <a:ea typeface="微软雅黑"/>
+                          <a:cs typeface="Arial"/>
+                        </a:rPr>
+                        <a:t>Zebra FX9600（一体机）</a:t>
                       </a:r>
                     </a:p>
                   </a:txBody>
@@ -8729,7 +9296,7 @@
                         </a:lnSpc>
                       </a:pPr>
                       <a:r>
-                        <a:rPr sz="900" b="0">
+                        <a:rPr sz="860" b="0">
                           <a:solidFill>
                             <a:srgbClr val="1A1A1A"/>
                           </a:solidFill>
@@ -8737,7 +9304,113 @@
                           <a:ea typeface="微软雅黑"/>
                           <a:cs typeface="Arial"/>
                         </a:rPr>
-                        <a:t>产线固定安装（本项目）</a:t>
+                        <a:t>4/8 口 · 33 dBm</a:t>
+                      </a:r>
+                    </a:p>
+                  </a:txBody>
+                  <a:tcPr marL="50292" marR="50292" marT="13716" marB="13716" anchor="ctr">
+                    <a:lnL w="9525" cap="flat" cmpd="sng" algn="ctr">
+                      <a:solidFill>
+                        <a:srgbClr val="D9D9D9"/>
+                      </a:solidFill>
+                      <a:prstDash val="solid"/>
+                    </a:lnL>
+                    <a:lnR w="9525" cap="flat" cmpd="sng" algn="ctr">
+                      <a:solidFill>
+                        <a:srgbClr val="D9D9D9"/>
+                      </a:solidFill>
+                      <a:prstDash val="solid"/>
+                    </a:lnR>
+                    <a:lnT w="9525" cap="flat" cmpd="sng" algn="ctr">
+                      <a:solidFill>
+                        <a:srgbClr val="D9D9D9"/>
+                      </a:solidFill>
+                      <a:prstDash val="solid"/>
+                    </a:lnT>
+                    <a:lnB w="9525" cap="flat" cmpd="sng" algn="ctr">
+                      <a:solidFill>
+                        <a:srgbClr val="D9D9D9"/>
+                      </a:solidFill>
+                      <a:prstDash val="solid"/>
+                    </a:lnB>
+                    <a:solidFill>
+                      <a:srgbClr val="FFFFFF"/>
+                    </a:solidFill>
+                  </a:tcPr>
+                </a:tc>
+                <a:tc>
+                  <a:txBody>
+                    <a:bodyPr/>
+                    <a:lstStyle/>
+                    <a:p>
+                      <a:pPr algn="ctr">
+                        <a:lnSpc>
+                          <a:spcPct val="100000"/>
+                        </a:lnSpc>
+                      </a:pPr>
+                      <a:r>
+                        <a:rPr sz="860" b="0">
+                          <a:solidFill>
+                            <a:srgbClr val="1A1A1A"/>
+                          </a:solidFill>
+                          <a:latin typeface="Arial"/>
+                          <a:ea typeface="微软雅黑"/>
+                          <a:cs typeface="Arial"/>
+                        </a:rPr>
+                        <a:t>—（−86 dBm）</a:t>
+                      </a:r>
+                    </a:p>
+                  </a:txBody>
+                  <a:tcPr marL="50292" marR="50292" marT="13716" marB="13716" anchor="ctr">
+                    <a:lnL w="9525" cap="flat" cmpd="sng" algn="ctr">
+                      <a:solidFill>
+                        <a:srgbClr val="D9D9D9"/>
+                      </a:solidFill>
+                      <a:prstDash val="solid"/>
+                    </a:lnL>
+                    <a:lnR w="9525" cap="flat" cmpd="sng" algn="ctr">
+                      <a:solidFill>
+                        <a:srgbClr val="D9D9D9"/>
+                      </a:solidFill>
+                      <a:prstDash val="solid"/>
+                    </a:lnR>
+                    <a:lnT w="9525" cap="flat" cmpd="sng" algn="ctr">
+                      <a:solidFill>
+                        <a:srgbClr val="D9D9D9"/>
+                      </a:solidFill>
+                      <a:prstDash val="solid"/>
+                    </a:lnT>
+                    <a:lnB w="9525" cap="flat" cmpd="sng" algn="ctr">
+                      <a:solidFill>
+                        <a:srgbClr val="D9D9D9"/>
+                      </a:solidFill>
+                      <a:prstDash val="solid"/>
+                    </a:lnB>
+                    <a:solidFill>
+                      <a:srgbClr val="FFFFFF"/>
+                    </a:solidFill>
+                  </a:tcPr>
+                </a:tc>
+                <a:tc>
+                  <a:txBody>
+                    <a:bodyPr/>
+                    <a:lstStyle/>
+                    <a:p>
+                      <a:pPr algn="ctr">
+                        <a:lnSpc>
+                          <a:spcPct val="100000"/>
+                        </a:lnSpc>
+                      </a:pPr>
+                      <a:r>
+                        <a:rPr sz="860" b="0">
+                          <a:solidFill>
+                            <a:srgbClr val="1A1A1A"/>
+                          </a:solidFill>
+                          <a:latin typeface="Arial"/>
+                          <a:ea typeface="微软雅黑"/>
+                          <a:cs typeface="Arial"/>
+                        </a:rPr>
+                        <a:t>✅ 满足</a:t>
                       </a:r>
                     </a:p>
                   </a:txBody>
@@ -8772,7 +9445,7 @@
                   </a:tcPr>
                 </a:tc>
               </a:tr>
-              <a:tr h="347472">
+              <a:tr h="306324">
                 <a:tc>
                   <a:txBody>
                     <a:bodyPr/>
@@ -8784,7 +9457,7 @@
                         </a:lnSpc>
                       </a:pPr>
                       <a:r>
-                        <a:rPr sz="900" b="1">
+                        <a:rPr sz="860" b="1">
                           <a:solidFill>
                             <a:srgbClr val="1A1A1A"/>
                           </a:solidFill>
@@ -8792,7 +9465,7 @@
                           <a:ea typeface="微软雅黑"/>
                           <a:cs typeface="Arial"/>
                         </a:rPr>
-                        <a:t>一体机</a:t>
+                        <a:t>Kathrein RRU 4560（工业）</a:t>
                       </a:r>
                     </a:p>
                   </a:txBody>
@@ -8837,7 +9510,7 @@
                         </a:lnSpc>
                       </a:pPr>
                       <a:r>
-                        <a:rPr sz="900" b="0">
+                        <a:rPr sz="860" b="0">
                           <a:solidFill>
                             <a:srgbClr val="1A1A1A"/>
                           </a:solidFill>
@@ -8845,7 +9518,168 @@
                           <a:ea typeface="微软雅黑"/>
                           <a:cs typeface="Arial"/>
                         </a:rPr>
-                        <a:t>以太网 / 串口</a:t>
+                        <a:t>4 口 · 33 dBm</a:t>
+                      </a:r>
+                    </a:p>
+                  </a:txBody>
+                  <a:tcPr marL="50292" marR="50292" marT="13716" marB="13716" anchor="ctr">
+                    <a:lnL w="9525" cap="flat" cmpd="sng" algn="ctr">
+                      <a:solidFill>
+                        <a:srgbClr val="D9D9D9"/>
+                      </a:solidFill>
+                      <a:prstDash val="solid"/>
+                    </a:lnL>
+                    <a:lnR w="9525" cap="flat" cmpd="sng" algn="ctr">
+                      <a:solidFill>
+                        <a:srgbClr val="D9D9D9"/>
+                      </a:solidFill>
+                      <a:prstDash val="solid"/>
+                    </a:lnR>
+                    <a:lnT w="9525" cap="flat" cmpd="sng" algn="ctr">
+                      <a:solidFill>
+                        <a:srgbClr val="D9D9D9"/>
+                      </a:solidFill>
+                      <a:prstDash val="solid"/>
+                    </a:lnT>
+                    <a:lnB w="9525" cap="flat" cmpd="sng" algn="ctr">
+                      <a:solidFill>
+                        <a:srgbClr val="D9D9D9"/>
+                      </a:solidFill>
+                      <a:prstDash val="solid"/>
+                    </a:lnB>
+                    <a:solidFill>
+                      <a:srgbClr val="FFFFFF"/>
+                    </a:solidFill>
+                  </a:tcPr>
+                </a:tc>
+                <a:tc>
+                  <a:txBody>
+                    <a:bodyPr/>
+                    <a:lstStyle/>
+                    <a:p>
+                      <a:pPr algn="ctr">
+                        <a:lnSpc>
+                          <a:spcPct val="100000"/>
+                        </a:lnSpc>
+                      </a:pPr>
+                      <a:r>
+                        <a:rPr sz="860" b="0">
+                          <a:solidFill>
+                            <a:srgbClr val="1A1A1A"/>
+                          </a:solidFill>
+                          <a:latin typeface="Arial"/>
+                          <a:ea typeface="微软雅黑"/>
+                          <a:cs typeface="Arial"/>
+                        </a:rPr>
+                        <a:t>—（工业级）</a:t>
+                      </a:r>
+                    </a:p>
+                  </a:txBody>
+                  <a:tcPr marL="50292" marR="50292" marT="13716" marB="13716" anchor="ctr">
+                    <a:lnL w="9525" cap="flat" cmpd="sng" algn="ctr">
+                      <a:solidFill>
+                        <a:srgbClr val="D9D9D9"/>
+                      </a:solidFill>
+                      <a:prstDash val="solid"/>
+                    </a:lnL>
+                    <a:lnR w="9525" cap="flat" cmpd="sng" algn="ctr">
+                      <a:solidFill>
+                        <a:srgbClr val="D9D9D9"/>
+                      </a:solidFill>
+                      <a:prstDash val="solid"/>
+                    </a:lnR>
+                    <a:lnT w="9525" cap="flat" cmpd="sng" algn="ctr">
+                      <a:solidFill>
+                        <a:srgbClr val="D9D9D9"/>
+                      </a:solidFill>
+                      <a:prstDash val="solid"/>
+                    </a:lnT>
+                    <a:lnB w="9525" cap="flat" cmpd="sng" algn="ctr">
+                      <a:solidFill>
+                        <a:srgbClr val="D9D9D9"/>
+                      </a:solidFill>
+                      <a:prstDash val="solid"/>
+                    </a:lnB>
+                    <a:solidFill>
+                      <a:srgbClr val="FFFFFF"/>
+                    </a:solidFill>
+                  </a:tcPr>
+                </a:tc>
+                <a:tc>
+                  <a:txBody>
+                    <a:bodyPr/>
+                    <a:lstStyle/>
+                    <a:p>
+                      <a:pPr algn="ctr">
+                        <a:lnSpc>
+                          <a:spcPct val="100000"/>
+                        </a:lnSpc>
+                      </a:pPr>
+                      <a:r>
+                        <a:rPr sz="860" b="0">
+                          <a:solidFill>
+                            <a:srgbClr val="1A1A1A"/>
+                          </a:solidFill>
+                          <a:latin typeface="Arial"/>
+                          <a:ea typeface="微软雅黑"/>
+                          <a:cs typeface="Arial"/>
+                        </a:rPr>
+                        <a:t>✅ 满足</a:t>
+                      </a:r>
+                    </a:p>
+                  </a:txBody>
+                  <a:tcPr marL="50292" marR="50292" marT="13716" marB="13716" anchor="ctr">
+                    <a:lnL w="9525" cap="flat" cmpd="sng" algn="ctr">
+                      <a:solidFill>
+                        <a:srgbClr val="D9D9D9"/>
+                      </a:solidFill>
+                      <a:prstDash val="solid"/>
+                    </a:lnL>
+                    <a:lnR w="9525" cap="flat" cmpd="sng" algn="ctr">
+                      <a:solidFill>
+                        <a:srgbClr val="D9D9D9"/>
+                      </a:solidFill>
+                      <a:prstDash val="solid"/>
+                    </a:lnR>
+                    <a:lnT w="9525" cap="flat" cmpd="sng" algn="ctr">
+                      <a:solidFill>
+                        <a:srgbClr val="D9D9D9"/>
+                      </a:solidFill>
+                      <a:prstDash val="solid"/>
+                    </a:lnT>
+                    <a:lnB w="9525" cap="flat" cmpd="sng" algn="ctr">
+                      <a:solidFill>
+                        <a:srgbClr val="D9D9D9"/>
+                      </a:solidFill>
+                      <a:prstDash val="solid"/>
+                    </a:lnB>
+                    <a:solidFill>
+                      <a:srgbClr val="FFFFFF"/>
+                    </a:solidFill>
+                  </a:tcPr>
+                </a:tc>
+              </a:tr>
+              <a:tr h="306324">
+                <a:tc>
+                  <a:txBody>
+                    <a:bodyPr/>
+                    <a:lstStyle/>
+                    <a:p>
+                      <a:pPr algn="l">
+                        <a:lnSpc>
+                          <a:spcPct val="100000"/>
+                        </a:lnSpc>
+                      </a:pPr>
+                      <a:r>
+                        <a:rPr sz="860" b="1">
+                          <a:solidFill>
+                            <a:srgbClr val="1A1A1A"/>
+                          </a:solidFill>
+                          <a:latin typeface="Arial"/>
+                          <a:ea typeface="微软雅黑"/>
+                          <a:cs typeface="Arial"/>
+                        </a:rPr>
+                        <a:t>ThingMagic M6e（模块）</a:t>
                       </a:r>
                     </a:p>
                   </a:txBody>
@@ -8890,7 +9724,7 @@
                         </a:lnSpc>
                       </a:pPr>
                       <a:r>
-                        <a:rPr sz="900" b="0">
+                        <a:rPr sz="860" b="0">
                           <a:solidFill>
                             <a:srgbClr val="1A1A1A"/>
                           </a:solidFill>
@@ -8898,7 +9732,113 @@
                           <a:ea typeface="微软雅黑"/>
                           <a:cs typeface="Arial"/>
                         </a:rPr>
-                        <a:t>近距离单点读取</a:t>
+                        <a:t>4 口</a:t>
+                      </a:r>
+                    </a:p>
+                  </a:txBody>
+                  <a:tcPr marL="50292" marR="50292" marT="13716" marB="13716" anchor="ctr">
+                    <a:lnL w="9525" cap="flat" cmpd="sng" algn="ctr">
+                      <a:solidFill>
+                        <a:srgbClr val="D9D9D9"/>
+                      </a:solidFill>
+                      <a:prstDash val="solid"/>
+                    </a:lnL>
+                    <a:lnR w="9525" cap="flat" cmpd="sng" algn="ctr">
+                      <a:solidFill>
+                        <a:srgbClr val="D9D9D9"/>
+                      </a:solidFill>
+                      <a:prstDash val="solid"/>
+                    </a:lnR>
+                    <a:lnT w="9525" cap="flat" cmpd="sng" algn="ctr">
+                      <a:solidFill>
+                        <a:srgbClr val="D9D9D9"/>
+                      </a:solidFill>
+                      <a:prstDash val="solid"/>
+                    </a:lnT>
+                    <a:lnB w="9525" cap="flat" cmpd="sng" algn="ctr">
+                      <a:solidFill>
+                        <a:srgbClr val="D9D9D9"/>
+                      </a:solidFill>
+                      <a:prstDash val="solid"/>
+                    </a:lnB>
+                    <a:solidFill>
+                      <a:srgbClr val="FFFFFF"/>
+                    </a:solidFill>
+                  </a:tcPr>
+                </a:tc>
+                <a:tc>
+                  <a:txBody>
+                    <a:bodyPr/>
+                    <a:lstStyle/>
+                    <a:p>
+                      <a:pPr algn="ctr">
+                        <a:lnSpc>
+                          <a:spcPct val="100000"/>
+                        </a:lnSpc>
+                      </a:pPr>
+                      <a:r>
+                        <a:rPr sz="860" b="0">
+                          <a:solidFill>
+                            <a:srgbClr val="1A1A1A"/>
+                          </a:solidFill>
+                          <a:latin typeface="Arial"/>
+                          <a:ea typeface="微软雅黑"/>
+                          <a:cs typeface="Arial"/>
+                        </a:rPr>
+                        <a:t>750 tags/s</a:t>
+                      </a:r>
+                    </a:p>
+                  </a:txBody>
+                  <a:tcPr marL="50292" marR="50292" marT="13716" marB="13716" anchor="ctr">
+                    <a:lnL w="9525" cap="flat" cmpd="sng" algn="ctr">
+                      <a:solidFill>
+                        <a:srgbClr val="D9D9D9"/>
+                      </a:solidFill>
+                      <a:prstDash val="solid"/>
+                    </a:lnL>
+                    <a:lnR w="9525" cap="flat" cmpd="sng" algn="ctr">
+                      <a:solidFill>
+                        <a:srgbClr val="D9D9D9"/>
+                      </a:solidFill>
+                      <a:prstDash val="solid"/>
+                    </a:lnR>
+                    <a:lnT w="9525" cap="flat" cmpd="sng" algn="ctr">
+                      <a:solidFill>
+                        <a:srgbClr val="D9D9D9"/>
+                      </a:solidFill>
+                      <a:prstDash val="solid"/>
+                    </a:lnT>
+                    <a:lnB w="9525" cap="flat" cmpd="sng" algn="ctr">
+                      <a:solidFill>
+                        <a:srgbClr val="D9D9D9"/>
+                      </a:solidFill>
+                      <a:prstDash val="solid"/>
+                    </a:lnB>
+                    <a:solidFill>
+                      <a:srgbClr val="FFFFFF"/>
+                    </a:solidFill>
+                  </a:tcPr>
+                </a:tc>
+                <a:tc>
+                  <a:txBody>
+                    <a:bodyPr/>
+                    <a:lstStyle/>
+                    <a:p>
+                      <a:pPr algn="ctr">
+                        <a:lnSpc>
+                          <a:spcPct val="100000"/>
+                        </a:lnSpc>
+                      </a:pPr>
+                      <a:r>
+                        <a:rPr sz="860" b="0">
+                          <a:solidFill>
+                            <a:srgbClr val="1A1A1A"/>
+                          </a:solidFill>
+                          <a:latin typeface="Arial"/>
+                          <a:ea typeface="微软雅黑"/>
+                          <a:cs typeface="Arial"/>
+                        </a:rPr>
+                        <a:t>🟡 需实测</a:t>
                       </a:r>
                     </a:p>
                   </a:txBody>
@@ -8933,7 +9873,7 @@
                   </a:tcPr>
                 </a:tc>
               </a:tr>
-              <a:tr h="347472">
+              <a:tr h="306324">
                 <a:tc>
                   <a:txBody>
                     <a:bodyPr/>
@@ -8945,7 +9885,7 @@
                         </a:lnSpc>
                       </a:pPr>
                       <a:r>
-                        <a:rPr sz="900" b="1">
+                        <a:rPr sz="860" b="1">
                           <a:solidFill>
                             <a:srgbClr val="1A1A1A"/>
                           </a:solidFill>
@@ -8953,7 +9893,7 @@
                           <a:ea typeface="微软雅黑"/>
                           <a:cs typeface="Arial"/>
                         </a:rPr>
-                        <a:t>手持 / PDA</a:t>
+                        <a:t>Silion SQM5100 / QM100</a:t>
                       </a:r>
                     </a:p>
                   </a:txBody>
@@ -8998,7 +9938,7 @@
                         </a:lnSpc>
                       </a:pPr>
                       <a:r>
-                        <a:rPr sz="900" b="0">
+                        <a:rPr sz="860" b="0">
                           <a:solidFill>
                             <a:srgbClr val="1A1A1A"/>
                           </a:solidFill>
@@ -9006,7 +9946,7 @@
                           <a:ea typeface="微软雅黑"/>
                           <a:cs typeface="Arial"/>
                         </a:rPr>
-                        <a:t>蓝牙 / WiFi</a:t>
+                        <a:t>−79 dBm · 需外置 PA</a:t>
                       </a:r>
                     </a:p>
                   </a:txBody>
@@ -9045,13 +9985,13 @@
                     <a:bodyPr/>
                     <a:lstStyle/>
                     <a:p>
-                      <a:pPr algn="l">
+                      <a:pPr algn="ctr">
                         <a:lnSpc>
                           <a:spcPct val="100000"/>
                         </a:lnSpc>
                       </a:pPr>
                       <a:r>
-                        <a:rPr sz="900" b="0">
+                        <a:rPr sz="860" b="0">
                           <a:solidFill>
                             <a:srgbClr val="1A1A1A"/>
                           </a:solidFill>
@@ -9059,7 +9999,60 @@
                           <a:ea typeface="微软雅黑"/>
                           <a:cs typeface="Arial"/>
                         </a:rPr>
-                        <a:t>抽检、盘点</a:t>
+                        <a:t>待定</a:t>
+                      </a:r>
+                    </a:p>
+                  </a:txBody>
+                  <a:tcPr marL="50292" marR="50292" marT="13716" marB="13716" anchor="ctr">
+                    <a:lnL w="9525" cap="flat" cmpd="sng" algn="ctr">
+                      <a:solidFill>
+                        <a:srgbClr val="D9D9D9"/>
+                      </a:solidFill>
+                      <a:prstDash val="solid"/>
+                    </a:lnL>
+                    <a:lnR w="9525" cap="flat" cmpd="sng" algn="ctr">
+                      <a:solidFill>
+                        <a:srgbClr val="D9D9D9"/>
+                      </a:solidFill>
+                      <a:prstDash val="solid"/>
+                    </a:lnR>
+                    <a:lnT w="9525" cap="flat" cmpd="sng" algn="ctr">
+                      <a:solidFill>
+                        <a:srgbClr val="D9D9D9"/>
+                      </a:solidFill>
+                      <a:prstDash val="solid"/>
+                    </a:lnT>
+                    <a:lnB w="9525" cap="flat" cmpd="sng" algn="ctr">
+                      <a:solidFill>
+                        <a:srgbClr val="D9D9D9"/>
+                      </a:solidFill>
+                      <a:prstDash val="solid"/>
+                    </a:lnB>
+                    <a:solidFill>
+                      <a:srgbClr val="FFFFFF"/>
+                    </a:solidFill>
+                  </a:tcPr>
+                </a:tc>
+                <a:tc>
+                  <a:txBody>
+                    <a:bodyPr/>
+                    <a:lstStyle/>
+                    <a:p>
+                      <a:pPr algn="ctr">
+                        <a:lnSpc>
+                          <a:spcPct val="100000"/>
+                        </a:lnSpc>
+                      </a:pPr>
+                      <a:r>
+                        <a:rPr sz="860" b="0">
+                          <a:solidFill>
+                            <a:srgbClr val="1A1A1A"/>
+                          </a:solidFill>
+                          <a:latin typeface="Arial"/>
+                          <a:ea typeface="微软雅黑"/>
+                          <a:cs typeface="Arial"/>
+                        </a:rPr>
+                        <a:t>⚠ 先整机实测</a:t>
                       </a:r>
                     </a:p>
                   </a:txBody>
@@ -9100,14 +10093,14 @@
       </p:graphicFrame>
       <p:sp>
         <p:nvSpPr>
-          <p:cNvPr id="11" name="TextBox 10"/>
+          <p:cNvPr id="13" name="TextBox 12"/>
           <p:cNvSpPr txBox="1"/>
           <p:nvPr/>
         </p:nvSpPr>
         <p:spPr>
           <a:xfrm>
-            <a:off x="7059168" y="1298448"/>
-            <a:ext cx="4572000" cy="237744"/>
+            <a:off x="566928" y="4389120"/>
+            <a:ext cx="11057839" cy="237744"/>
           </a:xfrm>
           <a:prstGeom prst="rect">
             <a:avLst/>
@@ -9134,909 +10127,67 @@
                 <a:ea typeface="微软雅黑"/>
                 <a:cs typeface="Arial"/>
               </a:rPr>
-              <a:t>代表性型号 · 手册参数</a:t>
+              <a:t>“一次过板读全 6 台”的三个必要条件（缺一项就掉到 5/6）</a:t>
             </a:r>
           </a:p>
         </p:txBody>
       </p:sp>
-      <p:graphicFrame>
-        <p:nvGraphicFramePr>
-          <p:cNvPr id="12" name="Table 11"/>
-          <p:cNvGraphicFramePr>
-            <a:graphicFrameLocks noGrp="1"/>
-          </p:cNvGraphicFramePr>
+      <p:sp>
+        <p:nvSpPr>
+          <p:cNvPr id="14" name="Rectangle 13"/>
+          <p:cNvSpPr/>
           <p:nvPr/>
-        </p:nvGraphicFramePr>
-        <p:xfrm>
-          <a:off x="7059168" y="1572768"/>
-          <a:ext cx="4562855" cy="2706624"/>
-        </p:xfrm>
-        <a:graphic>
-          <a:graphicData uri="http://schemas.openxmlformats.org/drawingml/2006/table">
-            <a:tbl>
-              <a:tblPr/>
-              <a:tblGrid>
-                <a:gridCol w="1874519"/>
-                <a:gridCol w="2688336"/>
-              </a:tblGrid>
-              <a:tr h="338328">
-                <a:tc>
-                  <a:txBody>
-                    <a:bodyPr/>
-                    <a:lstStyle/>
-                    <a:p>
-                      <a:pPr algn="l">
-                        <a:lnSpc>
-                          <a:spcPct val="100000"/>
-                        </a:lnSpc>
-                      </a:pPr>
-                      <a:r>
-                        <a:rPr sz="850" b="1">
-                          <a:solidFill>
-                            <a:srgbClr val="1A1A1A"/>
-                          </a:solidFill>
-                          <a:latin typeface="Arial"/>
-                          <a:ea typeface="微软雅黑"/>
-                          <a:cs typeface="Arial"/>
-                        </a:rPr>
-                        <a:t>型号</a:t>
-                      </a:r>
-                    </a:p>
-                  </a:txBody>
-                  <a:tcPr marL="50292" marR="50292" marT="13716" marB="13716" anchor="ctr">
-                    <a:lnL w="9525" cap="flat" cmpd="sng" algn="ctr">
-                      <a:solidFill>
-                        <a:srgbClr val="D9D9D9"/>
-                      </a:solidFill>
-                      <a:prstDash val="solid"/>
-                    </a:lnL>
-                    <a:lnR w="9525" cap="flat" cmpd="sng" algn="ctr">
-                      <a:solidFill>
-                        <a:srgbClr val="D9D9D9"/>
-                      </a:solidFill>
-                      <a:prstDash val="solid"/>
-                    </a:lnR>
-                    <a:lnT w="9525" cap="flat" cmpd="sng" algn="ctr">
-                      <a:solidFill>
-                        <a:srgbClr val="D9D9D9"/>
-                      </a:solidFill>
-                      <a:prstDash val="solid"/>
-                    </a:lnT>
-                    <a:lnB w="9525" cap="flat" cmpd="sng" algn="ctr">
-                      <a:solidFill>
-                        <a:srgbClr val="D9D9D9"/>
-                      </a:solidFill>
-                      <a:prstDash val="solid"/>
-                    </a:lnB>
-                    <a:solidFill>
-                      <a:srgbClr val="F2F2F2"/>
-                    </a:solidFill>
-                  </a:tcPr>
-                </a:tc>
-                <a:tc>
-                  <a:txBody>
-                    <a:bodyPr/>
-                    <a:lstStyle/>
-                    <a:p>
-                      <a:pPr algn="l">
-                        <a:lnSpc>
-                          <a:spcPct val="100000"/>
-                        </a:lnSpc>
-                      </a:pPr>
-                      <a:r>
-                        <a:rPr sz="850" b="1">
-                          <a:solidFill>
-                            <a:srgbClr val="1A1A1A"/>
-                          </a:solidFill>
-                          <a:latin typeface="Arial"/>
-                          <a:ea typeface="微软雅黑"/>
-                          <a:cs typeface="Arial"/>
-                        </a:rPr>
-                        <a:t>口数 / 功率 / 速率</a:t>
-                      </a:r>
-                    </a:p>
-                  </a:txBody>
-                  <a:tcPr marL="50292" marR="50292" marT="13716" marB="13716" anchor="ctr">
-                    <a:lnL w="9525" cap="flat" cmpd="sng" algn="ctr">
-                      <a:solidFill>
-                        <a:srgbClr val="D9D9D9"/>
-                      </a:solidFill>
-                      <a:prstDash val="solid"/>
-                    </a:lnL>
-                    <a:lnR w="9525" cap="flat" cmpd="sng" algn="ctr">
-                      <a:solidFill>
-                        <a:srgbClr val="D9D9D9"/>
-                      </a:solidFill>
-                      <a:prstDash val="solid"/>
-                    </a:lnR>
-                    <a:lnT w="9525" cap="flat" cmpd="sng" algn="ctr">
-                      <a:solidFill>
-                        <a:srgbClr val="D9D9D9"/>
-                      </a:solidFill>
-                      <a:prstDash val="solid"/>
-                    </a:lnT>
-                    <a:lnB w="9525" cap="flat" cmpd="sng" algn="ctr">
-                      <a:solidFill>
-                        <a:srgbClr val="D9D9D9"/>
-                      </a:solidFill>
-                      <a:prstDash val="solid"/>
-                    </a:lnB>
-                    <a:solidFill>
-                      <a:srgbClr val="F2F2F2"/>
-                    </a:solidFill>
-                  </a:tcPr>
-                </a:tc>
-              </a:tr>
-              <a:tr h="338328">
-                <a:tc>
-                  <a:txBody>
-                    <a:bodyPr/>
-                    <a:lstStyle/>
-                    <a:p>
-                      <a:pPr algn="l">
-                        <a:lnSpc>
-                          <a:spcPct val="100000"/>
-                        </a:lnSpc>
-                      </a:pPr>
-                      <a:r>
-                        <a:rPr sz="900" b="1">
-                          <a:solidFill>
-                            <a:srgbClr val="1A1A1A"/>
-                          </a:solidFill>
-                          <a:latin typeface="Arial"/>
-                          <a:ea typeface="微软雅黑"/>
-                          <a:cs typeface="Arial"/>
-                        </a:rPr>
-                        <a:t>Impinj R700</a:t>
-                      </a:r>
-                    </a:p>
-                  </a:txBody>
-                  <a:tcPr marL="50292" marR="50292" marT="13716" marB="13716" anchor="ctr">
-                    <a:lnL w="9525" cap="flat" cmpd="sng" algn="ctr">
-                      <a:solidFill>
-                        <a:srgbClr val="D9D9D9"/>
-                      </a:solidFill>
-                      <a:prstDash val="solid"/>
-                    </a:lnL>
-                    <a:lnR w="9525" cap="flat" cmpd="sng" algn="ctr">
-                      <a:solidFill>
-                        <a:srgbClr val="D9D9D9"/>
-                      </a:solidFill>
-                      <a:prstDash val="solid"/>
-                    </a:lnR>
-                    <a:lnT w="9525" cap="flat" cmpd="sng" algn="ctr">
-                      <a:solidFill>
-                        <a:srgbClr val="D9D9D9"/>
-                      </a:solidFill>
-                      <a:prstDash val="solid"/>
-                    </a:lnT>
-                    <a:lnB w="9525" cap="flat" cmpd="sng" algn="ctr">
-                      <a:solidFill>
-                        <a:srgbClr val="D9D9D9"/>
-                      </a:solidFill>
-                      <a:prstDash val="solid"/>
-                    </a:lnB>
-                    <a:solidFill>
-                      <a:srgbClr val="FFFFFF"/>
-                    </a:solidFill>
-                  </a:tcPr>
-                </a:tc>
-                <a:tc>
-                  <a:txBody>
-                    <a:bodyPr/>
-                    <a:lstStyle/>
-                    <a:p>
-                      <a:pPr algn="l">
-                        <a:lnSpc>
-                          <a:spcPct val="100000"/>
-                        </a:lnSpc>
-                      </a:pPr>
-                      <a:r>
-                        <a:rPr sz="900" b="0">
-                          <a:solidFill>
-                            <a:srgbClr val="1A1A1A"/>
-                          </a:solidFill>
-                          <a:latin typeface="Arial"/>
-                          <a:ea typeface="微软雅黑"/>
-                          <a:cs typeface="Arial"/>
-                        </a:rPr>
-                        <a:t>4 口 · 33 dBm · 1100 tags/s</a:t>
-                      </a:r>
-                    </a:p>
-                  </a:txBody>
-                  <a:tcPr marL="50292" marR="50292" marT="13716" marB="13716" anchor="ctr">
-                    <a:lnL w="9525" cap="flat" cmpd="sng" algn="ctr">
-                      <a:solidFill>
-                        <a:srgbClr val="D9D9D9"/>
-                      </a:solidFill>
-                      <a:prstDash val="solid"/>
-                    </a:lnL>
-                    <a:lnR w="9525" cap="flat" cmpd="sng" algn="ctr">
-                      <a:solidFill>
-                        <a:srgbClr val="D9D9D9"/>
-                      </a:solidFill>
-                      <a:prstDash val="solid"/>
-                    </a:lnR>
-                    <a:lnT w="9525" cap="flat" cmpd="sng" algn="ctr">
-                      <a:solidFill>
-                        <a:srgbClr val="D9D9D9"/>
-                      </a:solidFill>
-                      <a:prstDash val="solid"/>
-                    </a:lnT>
-                    <a:lnB w="9525" cap="flat" cmpd="sng" algn="ctr">
-                      <a:solidFill>
-                        <a:srgbClr val="D9D9D9"/>
-                      </a:solidFill>
-                      <a:prstDash val="solid"/>
-                    </a:lnB>
-                    <a:solidFill>
-                      <a:srgbClr val="FFFFFF"/>
-                    </a:solidFill>
-                  </a:tcPr>
-                </a:tc>
-              </a:tr>
-              <a:tr h="338328">
-                <a:tc>
-                  <a:txBody>
-                    <a:bodyPr/>
-                    <a:lstStyle/>
-                    <a:p>
-                      <a:pPr algn="l">
-                        <a:lnSpc>
-                          <a:spcPct val="100000"/>
-                        </a:lnSpc>
-                      </a:pPr>
-                      <a:r>
-                        <a:rPr sz="900" b="1">
-                          <a:solidFill>
-                            <a:srgbClr val="1A1A1A"/>
-                          </a:solidFill>
-                          <a:latin typeface="Arial"/>
-                          <a:ea typeface="微软雅黑"/>
-                          <a:cs typeface="Arial"/>
-                        </a:rPr>
-                        <a:t>Impinj R420</a:t>
-                      </a:r>
-                    </a:p>
-                  </a:txBody>
-                  <a:tcPr marL="50292" marR="50292" marT="13716" marB="13716" anchor="ctr">
-                    <a:lnL w="9525" cap="flat" cmpd="sng" algn="ctr">
-                      <a:solidFill>
-                        <a:srgbClr val="D9D9D9"/>
-                      </a:solidFill>
-                      <a:prstDash val="solid"/>
-                    </a:lnL>
-                    <a:lnR w="9525" cap="flat" cmpd="sng" algn="ctr">
-                      <a:solidFill>
-                        <a:srgbClr val="D9D9D9"/>
-                      </a:solidFill>
-                      <a:prstDash val="solid"/>
-                    </a:lnR>
-                    <a:lnT w="9525" cap="flat" cmpd="sng" algn="ctr">
-                      <a:solidFill>
-                        <a:srgbClr val="D9D9D9"/>
-                      </a:solidFill>
-                      <a:prstDash val="solid"/>
-                    </a:lnT>
-                    <a:lnB w="9525" cap="flat" cmpd="sng" algn="ctr">
-                      <a:solidFill>
-                        <a:srgbClr val="D9D9D9"/>
-                      </a:solidFill>
-                      <a:prstDash val="solid"/>
-                    </a:lnB>
-                    <a:solidFill>
-                      <a:srgbClr val="FFFFFF"/>
-                    </a:solidFill>
-                  </a:tcPr>
-                </a:tc>
-                <a:tc>
-                  <a:txBody>
-                    <a:bodyPr/>
-                    <a:lstStyle/>
-                    <a:p>
-                      <a:pPr algn="l">
-                        <a:lnSpc>
-                          <a:spcPct val="100000"/>
-                        </a:lnSpc>
-                      </a:pPr>
-                      <a:r>
-                        <a:rPr sz="900" b="0">
-                          <a:solidFill>
-                            <a:srgbClr val="1A1A1A"/>
-                          </a:solidFill>
-                          <a:latin typeface="Arial"/>
-                          <a:ea typeface="微软雅黑"/>
-                          <a:cs typeface="Arial"/>
-                        </a:rPr>
-                        <a:t>4 口 · 32.5 dBm · −84 dBm</a:t>
-                      </a:r>
-                    </a:p>
-                  </a:txBody>
-                  <a:tcPr marL="50292" marR="50292" marT="13716" marB="13716" anchor="ctr">
-                    <a:lnL w="9525" cap="flat" cmpd="sng" algn="ctr">
-                      <a:solidFill>
-                        <a:srgbClr val="D9D9D9"/>
-                      </a:solidFill>
-                      <a:prstDash val="solid"/>
-                    </a:lnL>
-                    <a:lnR w="9525" cap="flat" cmpd="sng" algn="ctr">
-                      <a:solidFill>
-                        <a:srgbClr val="D9D9D9"/>
-                      </a:solidFill>
-                      <a:prstDash val="solid"/>
-                    </a:lnR>
-                    <a:lnT w="9525" cap="flat" cmpd="sng" algn="ctr">
-                      <a:solidFill>
-                        <a:srgbClr val="D9D9D9"/>
-                      </a:solidFill>
-                      <a:prstDash val="solid"/>
-                    </a:lnT>
-                    <a:lnB w="9525" cap="flat" cmpd="sng" algn="ctr">
-                      <a:solidFill>
-                        <a:srgbClr val="D9D9D9"/>
-                      </a:solidFill>
-                      <a:prstDash val="solid"/>
-                    </a:lnB>
-                    <a:solidFill>
-                      <a:srgbClr val="FFFFFF"/>
-                    </a:solidFill>
-                  </a:tcPr>
-                </a:tc>
-              </a:tr>
-              <a:tr h="338328">
-                <a:tc>
-                  <a:txBody>
-                    <a:bodyPr/>
-                    <a:lstStyle/>
-                    <a:p>
-                      <a:pPr algn="l">
-                        <a:lnSpc>
-                          <a:spcPct val="100000"/>
-                        </a:lnSpc>
-                      </a:pPr>
-                      <a:r>
-                        <a:rPr sz="900" b="1">
-                          <a:solidFill>
-                            <a:srgbClr val="1A1A1A"/>
-                          </a:solidFill>
-                          <a:latin typeface="Arial"/>
-                          <a:ea typeface="微软雅黑"/>
-                          <a:cs typeface="Arial"/>
-                        </a:rPr>
-                        <a:t>RodinBell M-703 (E710)</a:t>
-                      </a:r>
-                    </a:p>
-                  </a:txBody>
-                  <a:tcPr marL="50292" marR="50292" marT="13716" marB="13716" anchor="ctr">
-                    <a:lnL w="9525" cap="flat" cmpd="sng" algn="ctr">
-                      <a:solidFill>
-                        <a:srgbClr val="D9D9D9"/>
-                      </a:solidFill>
-                      <a:prstDash val="solid"/>
-                    </a:lnL>
-                    <a:lnR w="9525" cap="flat" cmpd="sng" algn="ctr">
-                      <a:solidFill>
-                        <a:srgbClr val="D9D9D9"/>
-                      </a:solidFill>
-                      <a:prstDash val="solid"/>
-                    </a:lnR>
-                    <a:lnT w="9525" cap="flat" cmpd="sng" algn="ctr">
-                      <a:solidFill>
-                        <a:srgbClr val="D9D9D9"/>
-                      </a:solidFill>
-                      <a:prstDash val="solid"/>
-                    </a:lnT>
-                    <a:lnB w="9525" cap="flat" cmpd="sng" algn="ctr">
-                      <a:solidFill>
-                        <a:srgbClr val="D9D9D9"/>
-                      </a:solidFill>
-                      <a:prstDash val="solid"/>
-                    </a:lnB>
-                    <a:solidFill>
-                      <a:srgbClr val="FFFFFF"/>
-                    </a:solidFill>
-                  </a:tcPr>
-                </a:tc>
-                <a:tc>
-                  <a:txBody>
-                    <a:bodyPr/>
-                    <a:lstStyle/>
-                    <a:p>
-                      <a:pPr algn="l">
-                        <a:lnSpc>
-                          <a:spcPct val="100000"/>
-                        </a:lnSpc>
-                      </a:pPr>
-                      <a:r>
-                        <a:rPr sz="900" b="0">
-                          <a:solidFill>
-                            <a:srgbClr val="1A1A1A"/>
-                          </a:solidFill>
-                          <a:latin typeface="Arial"/>
-                          <a:ea typeface="微软雅黑"/>
-                          <a:cs typeface="Arial"/>
-                        </a:rPr>
-                        <a:t>8 口 · 33 dBm · 900 tags/s</a:t>
-                      </a:r>
-                    </a:p>
-                  </a:txBody>
-                  <a:tcPr marL="50292" marR="50292" marT="13716" marB="13716" anchor="ctr">
-                    <a:lnL w="9525" cap="flat" cmpd="sng" algn="ctr">
-                      <a:solidFill>
-                        <a:srgbClr val="D9D9D9"/>
-                      </a:solidFill>
-                      <a:prstDash val="solid"/>
-                    </a:lnL>
-                    <a:lnR w="9525" cap="flat" cmpd="sng" algn="ctr">
-                      <a:solidFill>
-                        <a:srgbClr val="D9D9D9"/>
-                      </a:solidFill>
-                      <a:prstDash val="solid"/>
-                    </a:lnR>
-                    <a:lnT w="9525" cap="flat" cmpd="sng" algn="ctr">
-                      <a:solidFill>
-                        <a:srgbClr val="D9D9D9"/>
-                      </a:solidFill>
-                      <a:prstDash val="solid"/>
-                    </a:lnT>
-                    <a:lnB w="9525" cap="flat" cmpd="sng" algn="ctr">
-                      <a:solidFill>
-                        <a:srgbClr val="D9D9D9"/>
-                      </a:solidFill>
-                      <a:prstDash val="solid"/>
-                    </a:lnB>
-                    <a:solidFill>
-                      <a:srgbClr val="FFFFFF"/>
-                    </a:solidFill>
-                  </a:tcPr>
-                </a:tc>
-              </a:tr>
-              <a:tr h="338328">
-                <a:tc>
-                  <a:txBody>
-                    <a:bodyPr/>
-                    <a:lstStyle/>
-                    <a:p>
-                      <a:pPr algn="l">
-                        <a:lnSpc>
-                          <a:spcPct val="100000"/>
-                        </a:lnSpc>
-                      </a:pPr>
-                      <a:r>
-                        <a:rPr sz="900" b="1">
-                          <a:solidFill>
-                            <a:srgbClr val="1A1A1A"/>
-                          </a:solidFill>
-                          <a:latin typeface="Arial"/>
-                          <a:ea typeface="微软雅黑"/>
-                          <a:cs typeface="Arial"/>
-                        </a:rPr>
-                        <a:t>ThingMagic M6e</a:t>
-                      </a:r>
-                    </a:p>
-                  </a:txBody>
-                  <a:tcPr marL="50292" marR="50292" marT="13716" marB="13716" anchor="ctr">
-                    <a:lnL w="9525" cap="flat" cmpd="sng" algn="ctr">
-                      <a:solidFill>
-                        <a:srgbClr val="D9D9D9"/>
-                      </a:solidFill>
-                      <a:prstDash val="solid"/>
-                    </a:lnL>
-                    <a:lnR w="9525" cap="flat" cmpd="sng" algn="ctr">
-                      <a:solidFill>
-                        <a:srgbClr val="D9D9D9"/>
-                      </a:solidFill>
-                      <a:prstDash val="solid"/>
-                    </a:lnR>
-                    <a:lnT w="9525" cap="flat" cmpd="sng" algn="ctr">
-                      <a:solidFill>
-                        <a:srgbClr val="D9D9D9"/>
-                      </a:solidFill>
-                      <a:prstDash val="solid"/>
-                    </a:lnT>
-                    <a:lnB w="9525" cap="flat" cmpd="sng" algn="ctr">
-                      <a:solidFill>
-                        <a:srgbClr val="D9D9D9"/>
-                      </a:solidFill>
-                      <a:prstDash val="solid"/>
-                    </a:lnB>
-                    <a:solidFill>
-                      <a:srgbClr val="FFFFFF"/>
-                    </a:solidFill>
-                  </a:tcPr>
-                </a:tc>
-                <a:tc>
-                  <a:txBody>
-                    <a:bodyPr/>
-                    <a:lstStyle/>
-                    <a:p>
-                      <a:pPr algn="l">
-                        <a:lnSpc>
-                          <a:spcPct val="100000"/>
-                        </a:lnSpc>
-                      </a:pPr>
-                      <a:r>
-                        <a:rPr sz="900" b="0">
-                          <a:solidFill>
-                            <a:srgbClr val="1A1A1A"/>
-                          </a:solidFill>
-                          <a:latin typeface="Arial"/>
-                          <a:ea typeface="微软雅黑"/>
-                          <a:cs typeface="Arial"/>
-                        </a:rPr>
-                        <a:t>4 口 · 750 tags/s</a:t>
-                      </a:r>
-                    </a:p>
-                  </a:txBody>
-                  <a:tcPr marL="50292" marR="50292" marT="13716" marB="13716" anchor="ctr">
-                    <a:lnL w="9525" cap="flat" cmpd="sng" algn="ctr">
-                      <a:solidFill>
-                        <a:srgbClr val="D9D9D9"/>
-                      </a:solidFill>
-                      <a:prstDash val="solid"/>
-                    </a:lnL>
-                    <a:lnR w="9525" cap="flat" cmpd="sng" algn="ctr">
-                      <a:solidFill>
-                        <a:srgbClr val="D9D9D9"/>
-                      </a:solidFill>
-                      <a:prstDash val="solid"/>
-                    </a:lnR>
-                    <a:lnT w="9525" cap="flat" cmpd="sng" algn="ctr">
-                      <a:solidFill>
-                        <a:srgbClr val="D9D9D9"/>
-                      </a:solidFill>
-                      <a:prstDash val="solid"/>
-                    </a:lnT>
-                    <a:lnB w="9525" cap="flat" cmpd="sng" algn="ctr">
-                      <a:solidFill>
-                        <a:srgbClr val="D9D9D9"/>
-                      </a:solidFill>
-                      <a:prstDash val="solid"/>
-                    </a:lnB>
-                    <a:solidFill>
-                      <a:srgbClr val="FFFFFF"/>
-                    </a:solidFill>
-                  </a:tcPr>
-                </a:tc>
-              </a:tr>
-              <a:tr h="338328">
-                <a:tc>
-                  <a:txBody>
-                    <a:bodyPr/>
-                    <a:lstStyle/>
-                    <a:p>
-                      <a:pPr algn="l">
-                        <a:lnSpc>
-                          <a:spcPct val="100000"/>
-                        </a:lnSpc>
-                      </a:pPr>
-                      <a:r>
-                        <a:rPr sz="900" b="1">
-                          <a:solidFill>
-                            <a:srgbClr val="1A1A1A"/>
-                          </a:solidFill>
-                          <a:latin typeface="Arial"/>
-                          <a:ea typeface="微软雅黑"/>
-                          <a:cs typeface="Arial"/>
-                        </a:rPr>
-                        <a:t>Zebra FX9600</a:t>
-                      </a:r>
-                    </a:p>
-                  </a:txBody>
-                  <a:tcPr marL="50292" marR="50292" marT="13716" marB="13716" anchor="ctr">
-                    <a:lnL w="9525" cap="flat" cmpd="sng" algn="ctr">
-                      <a:solidFill>
-                        <a:srgbClr val="D9D9D9"/>
-                      </a:solidFill>
-                      <a:prstDash val="solid"/>
-                    </a:lnL>
-                    <a:lnR w="9525" cap="flat" cmpd="sng" algn="ctr">
-                      <a:solidFill>
-                        <a:srgbClr val="D9D9D9"/>
-                      </a:solidFill>
-                      <a:prstDash val="solid"/>
-                    </a:lnR>
-                    <a:lnT w="9525" cap="flat" cmpd="sng" algn="ctr">
-                      <a:solidFill>
-                        <a:srgbClr val="D9D9D9"/>
-                      </a:solidFill>
-                      <a:prstDash val="solid"/>
-                    </a:lnT>
-                    <a:lnB w="9525" cap="flat" cmpd="sng" algn="ctr">
-                      <a:solidFill>
-                        <a:srgbClr val="D9D9D9"/>
-                      </a:solidFill>
-                      <a:prstDash val="solid"/>
-                    </a:lnB>
-                    <a:solidFill>
-                      <a:srgbClr val="FFFFFF"/>
-                    </a:solidFill>
-                  </a:tcPr>
-                </a:tc>
-                <a:tc>
-                  <a:txBody>
-                    <a:bodyPr/>
-                    <a:lstStyle/>
-                    <a:p>
-                      <a:pPr algn="l">
-                        <a:lnSpc>
-                          <a:spcPct val="100000"/>
-                        </a:lnSpc>
-                      </a:pPr>
-                      <a:r>
-                        <a:rPr sz="900" b="0">
-                          <a:solidFill>
-                            <a:srgbClr val="1A1A1A"/>
-                          </a:solidFill>
-                          <a:latin typeface="Arial"/>
-                          <a:ea typeface="微软雅黑"/>
-                          <a:cs typeface="Arial"/>
-                        </a:rPr>
-                        <a:t>4/8 口 · 33 dBm · −86 dBm</a:t>
-                      </a:r>
-                    </a:p>
-                  </a:txBody>
-                  <a:tcPr marL="50292" marR="50292" marT="13716" marB="13716" anchor="ctr">
-                    <a:lnL w="9525" cap="flat" cmpd="sng" algn="ctr">
-                      <a:solidFill>
-                        <a:srgbClr val="D9D9D9"/>
-                      </a:solidFill>
-                      <a:prstDash val="solid"/>
-                    </a:lnL>
-                    <a:lnR w="9525" cap="flat" cmpd="sng" algn="ctr">
-                      <a:solidFill>
-                        <a:srgbClr val="D9D9D9"/>
-                      </a:solidFill>
-                      <a:prstDash val="solid"/>
-                    </a:lnR>
-                    <a:lnT w="9525" cap="flat" cmpd="sng" algn="ctr">
-                      <a:solidFill>
-                        <a:srgbClr val="D9D9D9"/>
-                      </a:solidFill>
-                      <a:prstDash val="solid"/>
-                    </a:lnT>
-                    <a:lnB w="9525" cap="flat" cmpd="sng" algn="ctr">
-                      <a:solidFill>
-                        <a:srgbClr val="D9D9D9"/>
-                      </a:solidFill>
-                      <a:prstDash val="solid"/>
-                    </a:lnB>
-                    <a:solidFill>
-                      <a:srgbClr val="FFFFFF"/>
-                    </a:solidFill>
-                  </a:tcPr>
-                </a:tc>
-              </a:tr>
-              <a:tr h="338328">
-                <a:tc>
-                  <a:txBody>
-                    <a:bodyPr/>
-                    <a:lstStyle/>
-                    <a:p>
-                      <a:pPr algn="l">
-                        <a:lnSpc>
-                          <a:spcPct val="100000"/>
-                        </a:lnSpc>
-                      </a:pPr>
-                      <a:r>
-                        <a:rPr sz="900" b="1">
-                          <a:solidFill>
-                            <a:srgbClr val="1A1A1A"/>
-                          </a:solidFill>
-                          <a:latin typeface="Arial"/>
-                          <a:ea typeface="微软雅黑"/>
-                          <a:cs typeface="Arial"/>
-                        </a:rPr>
-                        <a:t>Kathrein RRU 4560</a:t>
-                      </a:r>
-                    </a:p>
-                  </a:txBody>
-                  <a:tcPr marL="50292" marR="50292" marT="13716" marB="13716" anchor="ctr">
-                    <a:lnL w="9525" cap="flat" cmpd="sng" algn="ctr">
-                      <a:solidFill>
-                        <a:srgbClr val="D9D9D9"/>
-                      </a:solidFill>
-                      <a:prstDash val="solid"/>
-                    </a:lnL>
-                    <a:lnR w="9525" cap="flat" cmpd="sng" algn="ctr">
-                      <a:solidFill>
-                        <a:srgbClr val="D9D9D9"/>
-                      </a:solidFill>
-                      <a:prstDash val="solid"/>
-                    </a:lnR>
-                    <a:lnT w="9525" cap="flat" cmpd="sng" algn="ctr">
-                      <a:solidFill>
-                        <a:srgbClr val="D9D9D9"/>
-                      </a:solidFill>
-                      <a:prstDash val="solid"/>
-                    </a:lnT>
-                    <a:lnB w="9525" cap="flat" cmpd="sng" algn="ctr">
-                      <a:solidFill>
-                        <a:srgbClr val="D9D9D9"/>
-                      </a:solidFill>
-                      <a:prstDash val="solid"/>
-                    </a:lnB>
-                    <a:solidFill>
-                      <a:srgbClr val="FFFFFF"/>
-                    </a:solidFill>
-                  </a:tcPr>
-                </a:tc>
-                <a:tc>
-                  <a:txBody>
-                    <a:bodyPr/>
-                    <a:lstStyle/>
-                    <a:p>
-                      <a:pPr algn="l">
-                        <a:lnSpc>
-                          <a:spcPct val="100000"/>
-                        </a:lnSpc>
-                      </a:pPr>
-                      <a:r>
-                        <a:rPr sz="900" b="0">
-                          <a:solidFill>
-                            <a:srgbClr val="1A1A1A"/>
-                          </a:solidFill>
-                          <a:latin typeface="Arial"/>
-                          <a:ea typeface="微软雅黑"/>
-                          <a:cs typeface="Arial"/>
-                        </a:rPr>
-                        <a:t>4 口 · 33 dBm</a:t>
-                      </a:r>
-                    </a:p>
-                  </a:txBody>
-                  <a:tcPr marL="50292" marR="50292" marT="13716" marB="13716" anchor="ctr">
-                    <a:lnL w="9525" cap="flat" cmpd="sng" algn="ctr">
-                      <a:solidFill>
-                        <a:srgbClr val="D9D9D9"/>
-                      </a:solidFill>
-                      <a:prstDash val="solid"/>
-                    </a:lnL>
-                    <a:lnR w="9525" cap="flat" cmpd="sng" algn="ctr">
-                      <a:solidFill>
-                        <a:srgbClr val="D9D9D9"/>
-                      </a:solidFill>
-                      <a:prstDash val="solid"/>
-                    </a:lnR>
-                    <a:lnT w="9525" cap="flat" cmpd="sng" algn="ctr">
-                      <a:solidFill>
-                        <a:srgbClr val="D9D9D9"/>
-                      </a:solidFill>
-                      <a:prstDash val="solid"/>
-                    </a:lnT>
-                    <a:lnB w="9525" cap="flat" cmpd="sng" algn="ctr">
-                      <a:solidFill>
-                        <a:srgbClr val="D9D9D9"/>
-                      </a:solidFill>
-                      <a:prstDash val="solid"/>
-                    </a:lnB>
-                    <a:solidFill>
-                      <a:srgbClr val="FFFFFF"/>
-                    </a:solidFill>
-                  </a:tcPr>
-                </a:tc>
-              </a:tr>
-              <a:tr h="338328">
-                <a:tc>
-                  <a:txBody>
-                    <a:bodyPr/>
-                    <a:lstStyle/>
-                    <a:p>
-                      <a:pPr algn="l">
-                        <a:lnSpc>
-                          <a:spcPct val="100000"/>
-                        </a:lnSpc>
-                      </a:pPr>
-                      <a:r>
-                        <a:rPr sz="900" b="1">
-                          <a:solidFill>
-                            <a:srgbClr val="1A1A1A"/>
-                          </a:solidFill>
-                          <a:latin typeface="Arial"/>
-                          <a:ea typeface="微软雅黑"/>
-                          <a:cs typeface="Arial"/>
-                        </a:rPr>
-                        <a:t>Silion SQM5100 (QM100)</a:t>
-                      </a:r>
-                    </a:p>
-                  </a:txBody>
-                  <a:tcPr marL="50292" marR="50292" marT="13716" marB="13716" anchor="ctr">
-                    <a:lnL w="9525" cap="flat" cmpd="sng" algn="ctr">
-                      <a:solidFill>
-                        <a:srgbClr val="D9D9D9"/>
-                      </a:solidFill>
-                      <a:prstDash val="solid"/>
-                    </a:lnL>
-                    <a:lnR w="9525" cap="flat" cmpd="sng" algn="ctr">
-                      <a:solidFill>
-                        <a:srgbClr val="D9D9D9"/>
-                      </a:solidFill>
-                      <a:prstDash val="solid"/>
-                    </a:lnR>
-                    <a:lnT w="9525" cap="flat" cmpd="sng" algn="ctr">
-                      <a:solidFill>
-                        <a:srgbClr val="D9D9D9"/>
-                      </a:solidFill>
-                      <a:prstDash val="solid"/>
-                    </a:lnT>
-                    <a:lnB w="9525" cap="flat" cmpd="sng" algn="ctr">
-                      <a:solidFill>
-                        <a:srgbClr val="D9D9D9"/>
-                      </a:solidFill>
-                      <a:prstDash val="solid"/>
-                    </a:lnB>
-                    <a:solidFill>
-                      <a:srgbClr val="FFFFFF"/>
-                    </a:solidFill>
-                  </a:tcPr>
-                </a:tc>
-                <a:tc>
-                  <a:txBody>
-                    <a:bodyPr/>
-                    <a:lstStyle/>
-                    <a:p>
-                      <a:pPr algn="l">
-                        <a:lnSpc>
-                          <a:spcPct val="100000"/>
-                        </a:lnSpc>
-                      </a:pPr>
-                      <a:r>
-                        <a:rPr sz="900" b="0">
-                          <a:solidFill>
-                            <a:srgbClr val="1A1A1A"/>
-                          </a:solidFill>
-                          <a:latin typeface="Arial"/>
-                          <a:ea typeface="微软雅黑"/>
-                          <a:cs typeface="Arial"/>
-                        </a:rPr>
-                        <a:t>−79 dBm 灵敏度 · 需外置 PA</a:t>
-                      </a:r>
-                    </a:p>
-                  </a:txBody>
-                  <a:tcPr marL="50292" marR="50292" marT="13716" marB="13716" anchor="ctr">
-                    <a:lnL w="9525" cap="flat" cmpd="sng" algn="ctr">
-                      <a:solidFill>
-                        <a:srgbClr val="D9D9D9"/>
-                      </a:solidFill>
-                      <a:prstDash val="solid"/>
-                    </a:lnL>
-                    <a:lnR w="9525" cap="flat" cmpd="sng" algn="ctr">
-                      <a:solidFill>
-                        <a:srgbClr val="D9D9D9"/>
-                      </a:solidFill>
-                      <a:prstDash val="solid"/>
-                    </a:lnR>
-                    <a:lnT w="9525" cap="flat" cmpd="sng" algn="ctr">
-                      <a:solidFill>
-                        <a:srgbClr val="D9D9D9"/>
-                      </a:solidFill>
-                      <a:prstDash val="solid"/>
-                    </a:lnT>
-                    <a:lnB w="9525" cap="flat" cmpd="sng" algn="ctr">
-                      <a:solidFill>
-                        <a:srgbClr val="D9D9D9"/>
-                      </a:solidFill>
-                      <a:prstDash val="solid"/>
-                    </a:lnB>
-                    <a:solidFill>
-                      <a:srgbClr val="FFFFFF"/>
-                    </a:solidFill>
-                  </a:tcPr>
-                </a:tc>
-              </a:tr>
-            </a:tbl>
-          </a:graphicData>
-        </a:graphic>
-      </p:graphicFrame>
-      <p:sp>
-        <p:nvSpPr>
-          <p:cNvPr id="13" name="TextBox 12"/>
+        </p:nvSpPr>
+        <p:spPr>
+          <a:xfrm>
+            <a:off x="566928" y="4663440"/>
+            <a:ext cx="3566160" cy="987552"/>
+          </a:xfrm>
+          <a:prstGeom prst="rect">
+            <a:avLst/>
+          </a:prstGeom>
+          <a:solidFill>
+            <a:srgbClr val="FAFBFC"/>
+          </a:solidFill>
+          <a:ln w="9525">
+            <a:solidFill>
+              <a:srgbClr val="E6E6E6"/>
+            </a:solidFill>
+          </a:ln>
+          <a:effectLst/>
+        </p:spPr>
+        <p:style>
+          <a:lnRef idx="1">
+            <a:schemeClr val="accent1"/>
+          </a:lnRef>
+          <a:fillRef idx="3">
+            <a:schemeClr val="accent1"/>
+          </a:fillRef>
+          <a:effectRef idx="2">
+            <a:schemeClr val="accent1"/>
+          </a:effectRef>
+          <a:fontRef idx="minor">
+            <a:schemeClr val="lt1"/>
+          </a:fontRef>
+        </p:style>
+        <p:txBody>
+          <a:bodyPr rtlCol="0" anchor="ctr" wrap="square"/>
+          <a:lstStyle/>
+          <a:p>
+            <a:pPr algn="ctr"/>
+          </a:p>
+        </p:txBody>
+      </p:sp>
+      <p:sp>
+        <p:nvSpPr>
+          <p:cNvPr id="15" name="TextBox 14"/>
           <p:cNvSpPr txBox="1"/>
           <p:nvPr/>
         </p:nvSpPr>
         <p:spPr>
           <a:xfrm>
-            <a:off x="7059168" y="4160520"/>
-            <a:ext cx="4562856" cy="1463040"/>
+            <a:off x="713232" y="4736592"/>
+            <a:ext cx="3291840" cy="219456"/>
           </a:xfrm>
           <a:prstGeom prst="rect">
             <a:avLst/>
@@ -10049,13 +10200,54 @@
           </a:bodyPr>
           <a:lstStyle/>
           <a:p>
-            <a:pPr>
+            <a:pPr algn="l">
               <a:lnSpc>
-                <a:spcPct val="135000"/>
+                <a:spcPct val="100000"/>
               </a:lnSpc>
             </a:pPr>
             <a:r>
-              <a:rPr sz="1000" b="1">
+              <a:rPr sz="950" b="1">
+                <a:solidFill>
+                  <a:srgbClr val="3E5DA8"/>
+                </a:solidFill>
+                <a:latin typeface="Arial"/>
+                <a:ea typeface="微软雅黑"/>
+                <a:cs typeface="Arial"/>
+              </a:rPr>
+              <a:t>① 覆盖（空间）</a:t>
+            </a:r>
+          </a:p>
+        </p:txBody>
+      </p:sp>
+      <p:sp>
+        <p:nvSpPr>
+          <p:cNvPr id="16" name="TextBox 15"/>
+          <p:cNvSpPr txBox="1"/>
+          <p:nvPr/>
+        </p:nvSpPr>
+        <p:spPr>
+          <a:xfrm>
+            <a:off x="713232" y="4974336"/>
+            <a:ext cx="3291840" cy="310896"/>
+          </a:xfrm>
+          <a:prstGeom prst="rect">
+            <a:avLst/>
+          </a:prstGeom>
+          <a:noFill/>
+        </p:spPr>
+        <p:txBody>
+          <a:bodyPr wrap="square" anchor="t" lIns="0" rIns="0" tIns="0" bIns="0">
+            <a:spAutoFit/>
+          </a:bodyPr>
+          <a:lstStyle/>
+          <a:p>
+            <a:pPr algn="l">
+              <a:lnSpc>
+                <a:spcPct val="115000"/>
+              </a:lnSpc>
+            </a:pPr>
+            <a:r>
+              <a:rPr sz="900" b="0">
                 <a:solidFill>
                   <a:srgbClr val="1A1A1A"/>
                 </a:solidFill>
@@ -10063,17 +10255,168 @@
                 <a:ea typeface="微软雅黑"/>
                 <a:cs typeface="Arial"/>
               </a:rPr>
-              <a:t>选型要点</a:t>
+              <a:t>6 dBi 259×259 / 9 dBi 360×360 都盖不满 600×400 箱面</a:t>
             </a:r>
           </a:p>
-          <a:p>
-            <a:pPr>
+        </p:txBody>
+      </p:sp>
+      <p:sp>
+        <p:nvSpPr>
+          <p:cNvPr id="17" name="TextBox 16"/>
+          <p:cNvSpPr txBox="1"/>
+          <p:nvPr/>
+        </p:nvSpPr>
+        <p:spPr>
+          <a:xfrm>
+            <a:off x="713232" y="5303520"/>
+            <a:ext cx="3291840" cy="292608"/>
+          </a:xfrm>
+          <a:prstGeom prst="rect">
+            <a:avLst/>
+          </a:prstGeom>
+          <a:noFill/>
+        </p:spPr>
+        <p:txBody>
+          <a:bodyPr wrap="square" anchor="t" lIns="0" rIns="0" tIns="0" bIns="0">
+            <a:spAutoFit/>
+          </a:bodyPr>
+          <a:lstStyle/>
+          <a:p>
+            <a:pPr algn="l">
               <a:lnSpc>
-                <a:spcPct val="135000"/>
+                <a:spcPct val="115000"/>
               </a:lnSpc>
             </a:pPr>
             <a:r>
-              <a:rPr sz="950" b="0">
+              <a:rPr sz="850" b="0">
+                <a:solidFill>
+                  <a:srgbClr val="8C8C8C"/>
+                </a:solidFill>
+                <a:latin typeface="Arial"/>
+                <a:ea typeface="微软雅黑"/>
+                <a:cs typeface="Arial"/>
+              </a:rPr>
+              <a:t>→ 双天线或偏心安装；本机实测 ant4 最强、ant3 最弱</a:t>
+            </a:r>
+          </a:p>
+        </p:txBody>
+      </p:sp>
+      <p:sp>
+        <p:nvSpPr>
+          <p:cNvPr id="18" name="Rectangle 17"/>
+          <p:cNvSpPr/>
+          <p:nvPr/>
+        </p:nvSpPr>
+        <p:spPr>
+          <a:xfrm>
+            <a:off x="4279392" y="4663440"/>
+            <a:ext cx="3566160" cy="987552"/>
+          </a:xfrm>
+          <a:prstGeom prst="rect">
+            <a:avLst/>
+          </a:prstGeom>
+          <a:solidFill>
+            <a:srgbClr val="FAFBFC"/>
+          </a:solidFill>
+          <a:ln w="9525">
+            <a:solidFill>
+              <a:srgbClr val="E6E6E6"/>
+            </a:solidFill>
+          </a:ln>
+          <a:effectLst/>
+        </p:spPr>
+        <p:style>
+          <a:lnRef idx="1">
+            <a:schemeClr val="accent1"/>
+          </a:lnRef>
+          <a:fillRef idx="3">
+            <a:schemeClr val="accent1"/>
+          </a:fillRef>
+          <a:effectRef idx="2">
+            <a:schemeClr val="accent1"/>
+          </a:effectRef>
+          <a:fontRef idx="minor">
+            <a:schemeClr val="lt1"/>
+          </a:fontRef>
+        </p:style>
+        <p:txBody>
+          <a:bodyPr rtlCol="0" anchor="ctr" wrap="square"/>
+          <a:lstStyle/>
+          <a:p>
+            <a:pPr algn="ctr"/>
+          </a:p>
+        </p:txBody>
+      </p:sp>
+      <p:sp>
+        <p:nvSpPr>
+          <p:cNvPr id="19" name="TextBox 18"/>
+          <p:cNvSpPr txBox="1"/>
+          <p:nvPr/>
+        </p:nvSpPr>
+        <p:spPr>
+          <a:xfrm>
+            <a:off x="4425696" y="4736592"/>
+            <a:ext cx="3291840" cy="219456"/>
+          </a:xfrm>
+          <a:prstGeom prst="rect">
+            <a:avLst/>
+          </a:prstGeom>
+          <a:noFill/>
+        </p:spPr>
+        <p:txBody>
+          <a:bodyPr wrap="square" anchor="t" lIns="0" rIns="0" tIns="0" bIns="0">
+            <a:spAutoFit/>
+          </a:bodyPr>
+          <a:lstStyle/>
+          <a:p>
+            <a:pPr algn="l">
+              <a:lnSpc>
+                <a:spcPct val="100000"/>
+              </a:lnSpc>
+            </a:pPr>
+            <a:r>
+              <a:rPr sz="950" b="1">
+                <a:solidFill>
+                  <a:srgbClr val="3E5DA8"/>
+                </a:solidFill>
+                <a:latin typeface="Arial"/>
+                <a:ea typeface="微软雅黑"/>
+                <a:cs typeface="Arial"/>
+              </a:rPr>
+              <a:t>② 极化（朝向）</a:t>
+            </a:r>
+          </a:p>
+        </p:txBody>
+      </p:sp>
+      <p:sp>
+        <p:nvSpPr>
+          <p:cNvPr id="20" name="TextBox 19"/>
+          <p:cNvSpPr txBox="1"/>
+          <p:nvPr/>
+        </p:nvSpPr>
+        <p:spPr>
+          <a:xfrm>
+            <a:off x="4425696" y="4974336"/>
+            <a:ext cx="3291840" cy="310896"/>
+          </a:xfrm>
+          <a:prstGeom prst="rect">
+            <a:avLst/>
+          </a:prstGeom>
+          <a:noFill/>
+        </p:spPr>
+        <p:txBody>
+          <a:bodyPr wrap="square" anchor="t" lIns="0" rIns="0" tIns="0" bIns="0">
+            <a:spAutoFit/>
+          </a:bodyPr>
+          <a:lstStyle/>
+          <a:p>
+            <a:pPr algn="l">
+              <a:lnSpc>
+                <a:spcPct val="115000"/>
+              </a:lnSpc>
+            </a:pPr>
+            <a:r>
+              <a:rPr sz="900" b="0">
                 <a:solidFill>
                   <a:srgbClr val="1A1A1A"/>
                 </a:solidFill>
@@ -10081,17 +10424,168 @@
                 <a:ea typeface="微软雅黑"/>
                 <a:cs typeface="Arial"/>
               </a:rPr>
-              <a:t>读距由「输出功率 + 天线增益 + 接收灵敏度」三者共同决定，单看功率会误判。</a:t>
+              <a:t>标签长轴固定，侧面照射直接掉 6–10 dB</a:t>
             </a:r>
           </a:p>
-          <a:p>
-            <a:pPr>
+        </p:txBody>
+      </p:sp>
+      <p:sp>
+        <p:nvSpPr>
+          <p:cNvPr id="21" name="TextBox 20"/>
+          <p:cNvSpPr txBox="1"/>
+          <p:nvPr/>
+        </p:nvSpPr>
+        <p:spPr>
+          <a:xfrm>
+            <a:off x="4425696" y="5303520"/>
+            <a:ext cx="3291840" cy="292608"/>
+          </a:xfrm>
+          <a:prstGeom prst="rect">
+            <a:avLst/>
+          </a:prstGeom>
+          <a:noFill/>
+        </p:spPr>
+        <p:txBody>
+          <a:bodyPr wrap="square" anchor="t" lIns="0" rIns="0" tIns="0" bIns="0">
+            <a:spAutoFit/>
+          </a:bodyPr>
+          <a:lstStyle/>
+          <a:p>
+            <a:pPr algn="l">
               <a:lnSpc>
-                <a:spcPct val="135000"/>
+                <a:spcPct val="115000"/>
               </a:lnSpc>
             </a:pPr>
             <a:r>
-              <a:rPr sz="950" b="0">
+              <a:rPr sz="850" b="0">
+                <a:solidFill>
+                  <a:srgbClr val="8C8C8C"/>
+                </a:solidFill>
+                <a:latin typeface="Arial"/>
+                <a:ea typeface="微软雅黑"/>
+                <a:cs typeface="Arial"/>
+              </a:rPr>
+              <a:t>→ 天线极化与标签轴对齐；9 dBi 波束窄，对位不准反而更差</a:t>
+            </a:r>
+          </a:p>
+        </p:txBody>
+      </p:sp>
+      <p:sp>
+        <p:nvSpPr>
+          <p:cNvPr id="22" name="Rectangle 21"/>
+          <p:cNvSpPr/>
+          <p:nvPr/>
+        </p:nvSpPr>
+        <p:spPr>
+          <a:xfrm>
+            <a:off x="7991855" y="4663440"/>
+            <a:ext cx="3566160" cy="987552"/>
+          </a:xfrm>
+          <a:prstGeom prst="rect">
+            <a:avLst/>
+          </a:prstGeom>
+          <a:solidFill>
+            <a:srgbClr val="FAFBFC"/>
+          </a:solidFill>
+          <a:ln w="9525">
+            <a:solidFill>
+              <a:srgbClr val="E6E6E6"/>
+            </a:solidFill>
+          </a:ln>
+          <a:effectLst/>
+        </p:spPr>
+        <p:style>
+          <a:lnRef idx="1">
+            <a:schemeClr val="accent1"/>
+          </a:lnRef>
+          <a:fillRef idx="3">
+            <a:schemeClr val="accent1"/>
+          </a:fillRef>
+          <a:effectRef idx="2">
+            <a:schemeClr val="accent1"/>
+          </a:effectRef>
+          <a:fontRef idx="minor">
+            <a:schemeClr val="lt1"/>
+          </a:fontRef>
+        </p:style>
+        <p:txBody>
+          <a:bodyPr rtlCol="0" anchor="ctr" wrap="square"/>
+          <a:lstStyle/>
+          <a:p>
+            <a:pPr algn="ctr"/>
+          </a:p>
+        </p:txBody>
+      </p:sp>
+      <p:sp>
+        <p:nvSpPr>
+          <p:cNvPr id="23" name="TextBox 22"/>
+          <p:cNvSpPr txBox="1"/>
+          <p:nvPr/>
+        </p:nvSpPr>
+        <p:spPr>
+          <a:xfrm>
+            <a:off x="8138159" y="4736592"/>
+            <a:ext cx="3291840" cy="219456"/>
+          </a:xfrm>
+          <a:prstGeom prst="rect">
+            <a:avLst/>
+          </a:prstGeom>
+          <a:noFill/>
+        </p:spPr>
+        <p:txBody>
+          <a:bodyPr wrap="square" anchor="t" lIns="0" rIns="0" tIns="0" bIns="0">
+            <a:spAutoFit/>
+          </a:bodyPr>
+          <a:lstStyle/>
+          <a:p>
+            <a:pPr algn="l">
+              <a:lnSpc>
+                <a:spcPct val="100000"/>
+              </a:lnSpc>
+            </a:pPr>
+            <a:r>
+              <a:rPr sz="950" b="1">
+                <a:solidFill>
+                  <a:srgbClr val="3E5DA8"/>
+                </a:solidFill>
+                <a:latin typeface="Arial"/>
+                <a:ea typeface="微软雅黑"/>
+                <a:cs typeface="Arial"/>
+              </a:rPr>
+              <a:t>③ 时间（速度）</a:t>
+            </a:r>
+          </a:p>
+        </p:txBody>
+      </p:sp>
+      <p:sp>
+        <p:nvSpPr>
+          <p:cNvPr id="24" name="TextBox 23"/>
+          <p:cNvSpPr txBox="1"/>
+          <p:nvPr/>
+        </p:nvSpPr>
+        <p:spPr>
+          <a:xfrm>
+            <a:off x="8138159" y="4974336"/>
+            <a:ext cx="3291840" cy="310896"/>
+          </a:xfrm>
+          <a:prstGeom prst="rect">
+            <a:avLst/>
+          </a:prstGeom>
+          <a:noFill/>
+        </p:spPr>
+        <p:txBody>
+          <a:bodyPr wrap="square" anchor="t" lIns="0" rIns="0" tIns="0" bIns="0">
+            <a:spAutoFit/>
+          </a:bodyPr>
+          <a:lstStyle/>
+          <a:p>
+            <a:pPr algn="l">
+              <a:lnSpc>
+                <a:spcPct val="115000"/>
+              </a:lnSpc>
+            </a:pPr>
+            <a:r>
+              <a:rPr sz="900" b="0">
                 <a:solidFill>
                   <a:srgbClr val="1A1A1A"/>
                 </a:solidFill>
@@ -10099,14 +10593,55 @@
                 <a:ea typeface="微软雅黑"/>
                 <a:cs typeface="Arial"/>
               </a:rPr>
-              <a:t>国产方案（QM100 类）片内 PA 仅 4 dBm，必须核对整机外置功放后的实测读取率。</a:t>
+              <a:t>0.5 s 窗口、每标签≥2 次机会 ⇒ 整机 ≥ 24 tags/s</a:t>
             </a:r>
           </a:p>
         </p:txBody>
       </p:sp>
       <p:sp>
         <p:nvSpPr>
-          <p:cNvPr id="14" name="Rectangle 13"/>
+          <p:cNvPr id="25" name="TextBox 24"/>
+          <p:cNvSpPr txBox="1"/>
+          <p:nvPr/>
+        </p:nvSpPr>
+        <p:spPr>
+          <a:xfrm>
+            <a:off x="8138159" y="5303520"/>
+            <a:ext cx="3291840" cy="292608"/>
+          </a:xfrm>
+          <a:prstGeom prst="rect">
+            <a:avLst/>
+          </a:prstGeom>
+          <a:noFill/>
+        </p:spPr>
+        <p:txBody>
+          <a:bodyPr wrap="square" anchor="t" lIns="0" rIns="0" tIns="0" bIns="0">
+            <a:spAutoFit/>
+          </a:bodyPr>
+          <a:lstStyle/>
+          <a:p>
+            <a:pPr algn="l">
+              <a:lnSpc>
+                <a:spcPct val="115000"/>
+              </a:lnSpc>
+            </a:pPr>
+            <a:r>
+              <a:rPr sz="850" b="0">
+                <a:solidFill>
+                  <a:srgbClr val="8C8C8C"/>
+                </a:solidFill>
+                <a:latin typeface="Arial"/>
+                <a:ea typeface="微软雅黑"/>
+                <a:cs typeface="Arial"/>
+              </a:rPr>
+              <a:t>→ 手册读取率是理想值，箱内实测要打七折</a:t>
+            </a:r>
+          </a:p>
+        </p:txBody>
+      </p:sp>
+      <p:sp>
+        <p:nvSpPr>
+          <p:cNvPr id="26" name="Rectangle 25"/>
           <p:cNvSpPr/>
           <p:nvPr/>
         </p:nvSpPr>
@@ -10150,7 +10685,7 @@
       </p:sp>
       <p:sp>
         <p:nvSpPr>
-          <p:cNvPr id="15" name="TextBox 14"/>
+          <p:cNvPr id="27" name="TextBox 26"/>
           <p:cNvSpPr txBox="1"/>
           <p:nvPr/>
         </p:nvSpPr>
@@ -10184,7 +10719,7 @@
                 <a:ea typeface="微软雅黑"/>
                 <a:cs typeface="Arial"/>
               </a:rPr>
-              <a:t>同厂（Impinj 体系）替换兼容性最好，先做基线；国产方案用于降本，必须实测标定</a:t>
+              <a:t>选型只看功率会选错：过板读全取决于「覆盖 + 极化 + 读取率」同时达标 —— 缺一项就是 5/6</a:t>
             </a:r>
           </a:p>
         </p:txBody>
@@ -12200,7 +12735,7 @@
       </p:pic>
       <p:pic>
         <p:nvPicPr>
-          <p:cNvPr id="9" name="Picture 8" descr="fig8_vendor_gain.png"/>
+          <p:cNvPr id="9" name="Picture 8" descr="fig12_pass_window.png"/>
           <p:cNvPicPr>
             <a:picLocks noChangeAspect="1"/>
           </p:cNvPicPr>
@@ -12214,8 +12749,8 @@
         </p:blipFill>
         <p:spPr>
           <a:xfrm>
-            <a:off x="6812280" y="1371600"/>
-            <a:ext cx="4809744" cy="2329719"/>
+            <a:off x="6812280" y="1389888"/>
+            <a:ext cx="4809744" cy="2254567"/>
           </a:xfrm>
           <a:prstGeom prst="rect">
             <a:avLst/>
@@ -12272,21 +12807,21 @@
           <p:nvPr/>
         </p:nvGraphicFramePr>
         <p:xfrm>
-          <a:off x="566928" y="3767328"/>
-          <a:ext cx="5870446" cy="1645920"/>
+          <a:off x="566928" y="3703320"/>
+          <a:ext cx="5870446" cy="1828800"/>
         </p:xfrm>
         <a:graphic>
           <a:graphicData uri="http://schemas.openxmlformats.org/drawingml/2006/table">
             <a:tbl>
               <a:tblPr/>
               <a:tblGrid>
-                <a:gridCol w="1729279"/>
-                <a:gridCol w="819132"/>
-                <a:gridCol w="819132"/>
-                <a:gridCol w="819132"/>
-                <a:gridCol w="1683771"/>
+                <a:gridCol w="1249031"/>
+                <a:gridCol w="1124128"/>
+                <a:gridCol w="1124128"/>
+                <a:gridCol w="1457203"/>
+                <a:gridCol w="915956"/>
               </a:tblGrid>
-              <a:tr h="329184">
+              <a:tr h="365760">
                 <a:tc>
                   <a:txBody>
                     <a:bodyPr/>
@@ -12298,7 +12833,7 @@
                         </a:lnSpc>
                       </a:pPr>
                       <a:r>
-                        <a:rPr sz="850" b="1">
+                        <a:rPr sz="819" b="1">
                           <a:solidFill>
                             <a:srgbClr val="1A1A1A"/>
                           </a:solidFill>
@@ -12351,7 +12886,7 @@
                         </a:lnSpc>
                       </a:pPr>
                       <a:r>
-                        <a:rPr sz="850" b="1">
+                        <a:rPr sz="819" b="1">
                           <a:solidFill>
                             <a:srgbClr val="1A1A1A"/>
                           </a:solidFill>
@@ -12359,7 +12894,7 @@
                           <a:ea typeface="微软雅黑"/>
                           <a:cs typeface="Arial"/>
                         </a:rPr>
-                        <a:t>0 cm</a:t>
+                        <a:t>10 cm 读全/6</a:t>
                       </a:r>
                     </a:p>
                   </a:txBody>
@@ -12404,7 +12939,7 @@
                         </a:lnSpc>
                       </a:pPr>
                       <a:r>
-                        <a:rPr sz="850" b="1">
+                        <a:rPr sz="819" b="1">
                           <a:solidFill>
                             <a:srgbClr val="1A1A1A"/>
                           </a:solidFill>
@@ -12412,7 +12947,7 @@
                           <a:ea typeface="微软雅黑"/>
                           <a:cs typeface="Arial"/>
                         </a:rPr>
-                        <a:t>10 cm</a:t>
+                        <a:t>30 cm 读全/6</a:t>
                       </a:r>
                     </a:p>
                   </a:txBody>
@@ -12457,7 +12992,7 @@
                         </a:lnSpc>
                       </a:pPr>
                       <a:r>
-                        <a:rPr sz="850" b="1">
+                        <a:rPr sz="819" b="1">
                           <a:solidFill>
                             <a:srgbClr val="1A1A1A"/>
                           </a:solidFill>
@@ -12465,7 +13000,7 @@
                           <a:ea typeface="微软雅黑"/>
                           <a:cs typeface="Arial"/>
                         </a:rPr>
-                        <a:t>30 cm</a:t>
+                        <a:t>0.5 s 过板 6/6（20 cm）</a:t>
                       </a:r>
                     </a:p>
                   </a:txBody>
@@ -12510,7 +13045,7 @@
                         </a:lnSpc>
                       </a:pPr>
                       <a:r>
-                        <a:rPr sz="850" b="1">
+                        <a:rPr sz="819" b="1">
                           <a:solidFill>
                             <a:srgbClr val="1A1A1A"/>
                           </a:solidFill>
@@ -12553,7 +13088,7 @@
                   </a:tcPr>
                 </a:tc>
               </a:tr>
-              <a:tr h="329184">
+              <a:tr h="365760">
                 <a:tc>
                   <a:txBody>
                     <a:bodyPr/>
@@ -12565,7 +13100,7 @@
                         </a:lnSpc>
                       </a:pPr>
                       <a:r>
-                        <a:rPr sz="900" b="1">
+                        <a:rPr sz="880" b="1">
                           <a:solidFill>
                             <a:srgbClr val="1A1A1A"/>
                           </a:solidFill>
@@ -12618,7 +13153,7 @@
                         </a:lnSpc>
                       </a:pPr>
                       <a:r>
-                        <a:rPr sz="900" b="0">
+                        <a:rPr sz="880" b="0">
                           <a:solidFill>
                             <a:srgbClr val="1A1A1A"/>
                           </a:solidFill>
@@ -12671,7 +13206,7 @@
                         </a:lnSpc>
                       </a:pPr>
                       <a:r>
-                        <a:rPr sz="900" b="0">
+                        <a:rPr sz="880" b="0">
                           <a:solidFill>
                             <a:srgbClr val="1A1A1A"/>
                           </a:solidFill>
@@ -12679,7 +13214,7 @@
                           <a:ea typeface="微软雅黑"/>
                           <a:cs typeface="Arial"/>
                         </a:rPr>
-                        <a:t>6.00</a:t>
+                        <a:t>5.22</a:t>
                       </a:r>
                     </a:p>
                   </a:txBody>
@@ -12724,7 +13259,7 @@
                         </a:lnSpc>
                       </a:pPr>
                       <a:r>
-                        <a:rPr sz="900" b="0">
+                        <a:rPr sz="880" b="0">
                           <a:solidFill>
                             <a:srgbClr val="1A1A1A"/>
                           </a:solidFill>
@@ -12732,7 +13267,7 @@
                           <a:ea typeface="微软雅黑"/>
                           <a:cs typeface="Arial"/>
                         </a:rPr>
-                        <a:t>5.22</a:t>
+                        <a:t>99.0%</a:t>
                       </a:r>
                     </a:p>
                   </a:txBody>
@@ -12777,7 +13312,7 @@
                         </a:lnSpc>
                       </a:pPr>
                       <a:r>
-                        <a:rPr sz="900" b="0">
+                        <a:rPr sz="880" b="0">
                           <a:solidFill>
                             <a:srgbClr val="1A1A1A"/>
                           </a:solidFill>
@@ -12820,7 +13355,7 @@
                   </a:tcPr>
                 </a:tc>
               </a:tr>
-              <a:tr h="329184">
+              <a:tr h="365760">
                 <a:tc>
                   <a:txBody>
                     <a:bodyPr/>
@@ -12832,7 +13367,7 @@
                         </a:lnSpc>
                       </a:pPr>
                       <a:r>
-                        <a:rPr sz="900" b="1">
+                        <a:rPr sz="880" b="1">
                           <a:solidFill>
                             <a:srgbClr val="1A1A1A"/>
                           </a:solidFill>
@@ -12885,7 +13420,7 @@
                         </a:lnSpc>
                       </a:pPr>
                       <a:r>
-                        <a:rPr sz="900" b="0">
+                        <a:rPr sz="880" b="0">
                           <a:solidFill>
                             <a:srgbClr val="1A1A1A"/>
                           </a:solidFill>
@@ -12938,7 +13473,7 @@
                         </a:lnSpc>
                       </a:pPr>
                       <a:r>
-                        <a:rPr sz="900" b="0">
+                        <a:rPr sz="880" b="0">
                           <a:solidFill>
                             <a:srgbClr val="1A1A1A"/>
                           </a:solidFill>
@@ -12946,7 +13481,7 @@
                           <a:ea typeface="微软雅黑"/>
                           <a:cs typeface="Arial"/>
                         </a:rPr>
-                        <a:t>6.00</a:t>
+                        <a:t>2.89</a:t>
                       </a:r>
                     </a:p>
                   </a:txBody>
@@ -12991,7 +13526,7 @@
                         </a:lnSpc>
                       </a:pPr>
                       <a:r>
-                        <a:rPr sz="900" b="0">
+                        <a:rPr sz="880" b="0">
                           <a:solidFill>
                             <a:srgbClr val="1A1A1A"/>
                           </a:solidFill>
@@ -12999,7 +13534,7 @@
                           <a:ea typeface="微软雅黑"/>
                           <a:cs typeface="Arial"/>
                         </a:rPr>
-                        <a:t>2.89</a:t>
+                        <a:t>79.0%</a:t>
                       </a:r>
                     </a:p>
                   </a:txBody>
@@ -13044,7 +13579,7 @@
                         </a:lnSpc>
                       </a:pPr>
                       <a:r>
-                        <a:rPr sz="900" b="0">
+                        <a:rPr sz="880" b="0">
                           <a:solidFill>
                             <a:srgbClr val="1A1A1A"/>
                           </a:solidFill>
@@ -13052,7 +13587,7 @@
                           <a:ea typeface="微软雅黑"/>
                           <a:cs typeface="Arial"/>
                         </a:rPr>
-                        <a:t>远档明显掉</a:t>
+                        <a:t>远档掉</a:t>
                       </a:r>
                     </a:p>
                   </a:txBody>
@@ -13087,7 +13622,7 @@
                   </a:tcPr>
                 </a:tc>
               </a:tr>
-              <a:tr h="329184">
+              <a:tr h="365760">
                 <a:tc>
                   <a:txBody>
                     <a:bodyPr/>
@@ -13099,7 +13634,7 @@
                         </a:lnSpc>
                       </a:pPr>
                       <a:r>
-                        <a:rPr sz="900" b="1">
+                        <a:rPr sz="880" b="1">
                           <a:solidFill>
                             <a:srgbClr val="1A1A1A"/>
                           </a:solidFill>
@@ -13152,7 +13687,7 @@
                         </a:lnSpc>
                       </a:pPr>
                       <a:r>
-                        <a:rPr sz="900" b="0">
+                        <a:rPr sz="880" b="0">
                           <a:solidFill>
                             <a:srgbClr val="1A1A1A"/>
                           </a:solidFill>
@@ -13205,7 +13740,7 @@
                         </a:lnSpc>
                       </a:pPr>
                       <a:r>
-                        <a:rPr sz="900" b="0">
+                        <a:rPr sz="880" b="0">
                           <a:solidFill>
                             <a:srgbClr val="1A1A1A"/>
                           </a:solidFill>
@@ -13213,7 +13748,7 @@
                           <a:ea typeface="微软雅黑"/>
                           <a:cs typeface="Arial"/>
                         </a:rPr>
-                        <a:t>6.00</a:t>
+                        <a:t>3.44</a:t>
                       </a:r>
                     </a:p>
                   </a:txBody>
@@ -13258,7 +13793,7 @@
                         </a:lnSpc>
                       </a:pPr>
                       <a:r>
-                        <a:rPr sz="900" b="0">
+                        <a:rPr sz="880" b="0">
                           <a:solidFill>
                             <a:srgbClr val="1A1A1A"/>
                           </a:solidFill>
@@ -13266,7 +13801,7 @@
                           <a:ea typeface="微软雅黑"/>
                           <a:cs typeface="Arial"/>
                         </a:rPr>
-                        <a:t>3.44</a:t>
+                        <a:t>82.7%</a:t>
                       </a:r>
                     </a:p>
                   </a:txBody>
@@ -13311,7 +13846,7 @@
                         </a:lnSpc>
                       </a:pPr>
                       <a:r>
-                        <a:rPr sz="900" b="0">
+                        <a:rPr sz="880" b="0">
                           <a:solidFill>
                             <a:srgbClr val="1A1A1A"/>
                           </a:solidFill>
@@ -13319,7 +13854,7 @@
                           <a:ea typeface="微软雅黑"/>
                           <a:cs typeface="Arial"/>
                         </a:rPr>
-                        <a:t>等效落后约 2 dB</a:t>
+                        <a:t>勉强</a:t>
                       </a:r>
                     </a:p>
                   </a:txBody>
@@ -13354,7 +13889,7 @@
                   </a:tcPr>
                 </a:tc>
               </a:tr>
-              <a:tr h="329184">
+              <a:tr h="365760">
                 <a:tc>
                   <a:txBody>
                     <a:bodyPr/>
@@ -13366,7 +13901,7 @@
                         </a:lnSpc>
                       </a:pPr>
                       <a:r>
-                        <a:rPr sz="900" b="1">
+                        <a:rPr sz="880" b="1">
                           <a:solidFill>
                             <a:srgbClr val="1A1A1A"/>
                           </a:solidFill>
@@ -13419,7 +13954,7 @@
                         </a:lnSpc>
                       </a:pPr>
                       <a:r>
-                        <a:rPr sz="900" b="0">
+                        <a:rPr sz="880" b="0">
                           <a:solidFill>
                             <a:srgbClr val="1A1A1A"/>
                           </a:solidFill>
@@ -13427,7 +13962,7 @@
                           <a:ea typeface="微软雅黑"/>
                           <a:cs typeface="Arial"/>
                         </a:rPr>
-                        <a:t>6.00</a:t>
+                        <a:t>5.67</a:t>
                       </a:r>
                     </a:p>
                   </a:txBody>
@@ -13472,7 +14007,7 @@
                         </a:lnSpc>
                       </a:pPr>
                       <a:r>
-                        <a:rPr sz="900" b="0">
+                        <a:rPr sz="880" b="0">
                           <a:solidFill>
                             <a:srgbClr val="1A1A1A"/>
                           </a:solidFill>
@@ -13480,7 +14015,7 @@
                           <a:ea typeface="微软雅黑"/>
                           <a:cs typeface="Arial"/>
                         </a:rPr>
-                        <a:t>5.67</a:t>
+                        <a:t>2.00</a:t>
                       </a:r>
                     </a:p>
                   </a:txBody>
@@ -13525,7 +14060,7 @@
                         </a:lnSpc>
                       </a:pPr>
                       <a:r>
-                        <a:rPr sz="900" b="0">
+                        <a:rPr sz="880" b="0">
                           <a:solidFill>
                             <a:srgbClr val="1A1A1A"/>
                           </a:solidFill>
@@ -13533,7 +14068,7 @@
                           <a:ea typeface="微软雅黑"/>
                           <a:cs typeface="Arial"/>
                         </a:rPr>
-                        <a:t>2.00</a:t>
+                        <a:t>18.8%</a:t>
                       </a:r>
                     </a:p>
                   </a:txBody>
@@ -13578,7 +14113,7 @@
                         </a:lnSpc>
                       </a:pPr>
                       <a:r>
-                        <a:rPr sz="900" b="0">
+                        <a:rPr sz="880" b="0">
                           <a:solidFill>
                             <a:srgbClr val="1A1A1A"/>
                           </a:solidFill>
@@ -13586,7 +14121,7 @@
                           <a:ea typeface="微软雅黑"/>
                           <a:cs typeface="Arial"/>
                         </a:rPr>
-                        <a:t>不满足远档</a:t>
+                        <a:t>不可用</a:t>
                       </a:r>
                     </a:p>
                   </a:txBody>
@@ -13633,8 +14168,8 @@
         </p:nvSpPr>
         <p:spPr>
           <a:xfrm>
-            <a:off x="6812280" y="3767328"/>
-            <a:ext cx="4809744" cy="1463040"/>
+            <a:off x="6812280" y="3703320"/>
+            <a:ext cx="4809744" cy="1737360"/>
           </a:xfrm>
           <a:prstGeom prst="rect">
             <a:avLst/>
@@ -13661,7 +14196,7 @@
                 <a:ea typeface="微软雅黑"/>
                 <a:cs typeface="Arial"/>
               </a:rPr>
-              <a:t>读法</a:t>
+              <a:t>按“过板一次读全”看</a:t>
             </a:r>
           </a:p>
           <a:p>
@@ -13679,7 +14214,7 @@
                 <a:ea typeface="微软雅黑"/>
                 <a:cs typeface="Arial"/>
               </a:rPr>
-              <a:t>0 cm 四种配置都 6/6；10 cm 时 B 厂 + 6 dBi 已掉到 5.67。</a:t>
+              <a:t>0.5 s 窗口、20 cm：只有 A 厂 + 9 dBi 达到 99%，其余 79% / 83% / 19%。</a:t>
             </a:r>
           </a:p>
           <a:p>
@@ -13697,7 +14232,7 @@
                 <a:ea typeface="微软雅黑"/>
                 <a:cs typeface="Arial"/>
               </a:rPr>
-              <a:t>30 cm 拉开差距：9 dBi 比 6 dBi，A 厂多 2.33 个、B 厂多 1.44 个标签。</a:t>
+              <a:t>30 cm 时 A 厂 + 9 dBi 掉到 68.9%，B 厂 + 9 dBi 只有 10.2% —— 远档靠天线增益，不靠厂家。</a:t>
             </a:r>
           </a:p>
           <a:p>
@@ -13715,7 +14250,7 @@
                 <a:ea typeface="微软雅黑"/>
                 <a:cs typeface="Arial"/>
               </a:rPr>
-              <a:t>⇒ 要么压距离，要么上 A 厂 + 9 dBi；只换厂家不换增益救不了远档。</a:t>
+              <a:t>⇒ 选型结论：A 厂 + 9 dBi 作基线；换厂家最多补 2 dB，救不回远档。</a:t>
             </a:r>
           </a:p>
         </p:txBody>
@@ -13800,7 +14335,7 @@
                 <a:ea typeface="微软雅黑"/>
                 <a:cs typeface="Arial"/>
               </a:rPr>
-              <a:t>天线增益（+3 dB）比换厂家（≈2 dB）更划算，且改造最小 —— 优先换天线，其次同厂换代</a:t>
+              <a:t>以「0.5 s 过板 6/6」为准：A 厂 + 9 dBi 99%，A 厂 + 6 dBi 79%，B 厂 + 6 dBi 仅 19%</a:t>
             </a:r>
           </a:p>
         </p:txBody>

--- a/RFID读取评估_2026-10-21/09_报告/RFID读取能力评估_2026-10-22.pptx
+++ b/RFID读取评估_2026-10-21/09_报告/RFID读取能力评估_2026-10-22.pptx
@@ -14,6 +14,7 @@
     <p:sldId id="262" r:id="rId13"/>
     <p:sldId id="263" r:id="rId14"/>
     <p:sldId id="264" r:id="rId16"/>
+    <p:sldId id="266" r:id="rId18"/>
     <p:sldId id="265" r:id="rId17"/>
   </p:sldIdLst>
   <p:sldSz cx="12191695" cy="6858000" type="screen4x3"/>
@@ -582,6 +583,76 @@
           <a:p>
             <a:r>
               <a:t>机型口径页。旧的 Kinder 与 KD/PT 代号是早期猜测，机台日志里根本没有，今天作废。改成 HQ代码-背壳：7907-P/M、8252-P/M、7771-M、7513-M；客户代码按事业部对照表，MES 配置名可交叉验证。背壳材质有直接证据：CongfigSize 里写 (Metal)/(Plastic)，AX8252 两种都在产，所以同机型要分开看。AX6727 那行数字明显异常，先记录，不建议当结论。</a:t>
+            </a:r>
+          </a:p>
+        </p:txBody>
+      </p:sp>
+      <p:sp>
+        <p:nvSpPr>
+          <p:cNvPr id="4" name="Slide Number Placeholder 3"/>
+          <p:cNvSpPr>
+            <a:spLocks noGrp="1"/>
+          </p:cNvSpPr>
+          <p:nvPr>
+            <p:ph type="sldNum" idx="5" sz="quarter"/>
+          </p:nvPr>
+        </p:nvSpPr>
+        <p:spPr/>
+      </p:sp>
+    </p:spTree>
+  </p:cSld>
+  <p:clrMapOvr>
+    <a:masterClrMapping/>
+  </p:clrMapOvr>
+</p:notes>
+</file>
+
+<file path=ppt/notesSlides/notesSlide11.xml><?xml version="1.0" encoding="utf-8"?>
+<p:notes xmlns:a="http://schemas.openxmlformats.org/drawingml/2006/main" xmlns:p="http://schemas.openxmlformats.org/presentationml/2006/main" xmlns:r="http://schemas.openxmlformats.org/officeDocument/2006/relationships">
+  <p:cSld>
+    <p:spTree>
+      <p:nvGrpSpPr>
+        <p:cNvPr id="1" name=""/>
+        <p:cNvGrpSpPr/>
+        <p:nvPr/>
+      </p:nvGrpSpPr>
+      <p:grpSpPr>
+        <a:xfrm>
+          <a:off x="0" y="0"/>
+          <a:ext cx="0" cy="0"/>
+          <a:chOff x="0" y="0"/>
+          <a:chExt cx="0" cy="0"/>
+        </a:xfrm>
+      </p:grpSpPr>
+      <p:sp>
+        <p:nvSpPr>
+          <p:cNvPr id="2" name="Slide Image Placeholder 1"/>
+          <p:cNvSpPr>
+            <a:spLocks noGrp="1"/>
+          </p:cNvSpPr>
+          <p:nvPr>
+            <p:ph type="sldImg" idx="2"/>
+          </p:nvPr>
+        </p:nvSpPr>
+        <p:spPr/>
+      </p:sp>
+      <p:sp>
+        <p:nvSpPr>
+          <p:cNvPr id="3" name="Notes Placeholder 2"/>
+          <p:cNvSpPr>
+            <a:spLocks noGrp="1"/>
+          </p:cNvSpPr>
+          <p:nvPr>
+            <p:ph type="body" idx="3" sz="quarter"/>
+          </p:nvPr>
+        </p:nvSpPr>
+        <p:spPr/>
+        <p:txBody>
+          <a:bodyPr/>
+          <a:lstStyle/>
+          <a:p>
+            <a:r>
+              <a:t>这页回答全场一定会被问的那句：既然 P5–P7 的模型说近距离能读全 6 个，为什么现网 95% 读 0？答案在数据形态上：95% 的箱窗口内 0 次读取，命中的那 5% 箱却平均 18 次读取，而且只读到 1–2 个标签 —— 读取是双峰的，说明多数箱根本没被盘存，而不是射频弱到读不到。第二点，readStatus=True 的 8.6% 与窗口内真读到标签的 4.9% 不是同一批，说明 readStatus 判的不是“读到任意标签”，语义要找程序方确认。第三点，命中的箱反复读同一两个标签，说明剩下的标签被位置/遮挡/极化挡住了。所以下一步不是买读码器，是 40 分钟做三组对照：贴一片已知好标签、rfidmon 手动触发一次、去掉金属背壳再读。</a:t>
             </a:r>
           </a:p>
         </p:txBody>
@@ -4353,7 +4424,7 @@
                 <a:ea typeface="微软雅黑"/>
                 <a:cs typeface="Arial"/>
               </a:rPr>
-              <a:t>六项要求 · 3D 示意 · 现网实测基线（P9–P10）+ 距离/箱型预测（待现场实测替换）</a:t>
+              <a:t>六项要求 · 3D 示意 · 现网实测基线（P9–P11）+ 距离/箱型预测（待现场实测替换）</a:t>
             </a:r>
           </a:p>
         </p:txBody>
@@ -4447,7 +4518,7 @@
                 <a:ea typeface="微软雅黑"/>
                 <a:cs typeface="Arial"/>
               </a:rPr>
-              <a:t>P9–P10 为机台日志回溯的实测值；其余为手册参数推算 + 模型预测；现场按 P8 模板填表后重出 V2</a:t>
+              <a:t>P9–P11 为机台日志回溯的实测值；其余为手册参数推算 + 模型预测；现场按 P8 模板填表后重出 V2</a:t>
             </a:r>
           </a:p>
         </p:txBody>
@@ -4547,7 +4618,7 @@
                 <a:ea typeface="微软雅黑"/>
                 <a:cs typeface="Arial"/>
               </a:rPr>
-              <a:t>机型口径：HQ 代码 / 客户代码 / 尺寸·品类（附 31 天实测）</a:t>
+              <a:t>95% 读 0 的归因：不是读不到，是绝大多数箱没被盘存</a:t>
             </a:r>
           </a:p>
         </p:txBody>
@@ -4588,7 +4659,7 @@
                 <a:ea typeface="微软雅黑"/>
                 <a:cs typeface="Arial"/>
               </a:rPr>
-              <a:t>客户口径取自事业部机型对照表；MES CongfigSize 可交叉验证（Prosexxx / Amaxxx / Julxxx 为脱敏写法）</a:t>
+              <a:t>同一批 31 天数据拆开看：95% 的箱 0 次读取；命中的 5% 箱平均 18 次，却只读到 1–2 个标签</a:t>
             </a:r>
           </a:p>
         </p:txBody>
@@ -4636,8 +4707,8 @@
         </p:nvSpPr>
         <p:spPr>
           <a:xfrm>
-            <a:off x="566928" y="6419088"/>
-            <a:ext cx="7315200" cy="237744"/>
+            <a:off x="566928" y="1316736"/>
+            <a:ext cx="3401568" cy="457200"/>
           </a:xfrm>
           <a:prstGeom prst="rect">
             <a:avLst/>
@@ -4656,7 +4727,1820 @@
               </a:lnSpc>
             </a:pPr>
             <a:r>
-              <a:rPr sz="800" b="0">
+              <a:rPr sz="2600" b="1">
+                <a:solidFill>
+                  <a:srgbClr val="3E5DA8"/>
+                </a:solidFill>
+                <a:latin typeface="Arial"/>
+                <a:ea typeface="微软雅黑"/>
+                <a:cs typeface="Arial"/>
+              </a:rPr>
+              <a:t>0.08 / 6</a:t>
+            </a:r>
+          </a:p>
+        </p:txBody>
+      </p:sp>
+      <p:sp>
+        <p:nvSpPr>
+          <p:cNvPr id="6" name="TextBox 5"/>
+          <p:cNvSpPr txBox="1"/>
+          <p:nvPr/>
+        </p:nvSpPr>
+        <p:spPr>
+          <a:xfrm>
+            <a:off x="566928" y="1737360"/>
+            <a:ext cx="3401568" cy="237744"/>
+          </a:xfrm>
+          <a:prstGeom prst="rect">
+            <a:avLst/>
+          </a:prstGeom>
+          <a:noFill/>
+        </p:spPr>
+        <p:txBody>
+          <a:bodyPr wrap="square" anchor="t" lIns="0" rIns="0" tIns="0" bIns="0">
+            <a:spAutoFit/>
+          </a:bodyPr>
+          <a:lstStyle/>
+          <a:p>
+            <a:pPr algn="l">
+              <a:lnSpc>
+                <a:spcPct val="100000"/>
+              </a:lnSpc>
+            </a:pPr>
+            <a:r>
+              <a:rPr sz="919" b="0">
+                <a:solidFill>
+                  <a:srgbClr val="8C8C8C"/>
+                </a:solidFill>
+                <a:latin typeface="Arial"/>
+                <a:ea typeface="微软雅黑"/>
+                <a:cs typeface="Arial"/>
+              </a:rPr>
+              <a:t>31 天 113,667 箱的平均读到标签数</a:t>
+            </a:r>
+          </a:p>
+        </p:txBody>
+      </p:sp>
+      <p:sp>
+        <p:nvSpPr>
+          <p:cNvPr id="7" name="TextBox 6"/>
+          <p:cNvSpPr txBox="1"/>
+          <p:nvPr/>
+        </p:nvSpPr>
+        <p:spPr>
+          <a:xfrm>
+            <a:off x="566928" y="1975104"/>
+            <a:ext cx="3401568" cy="502920"/>
+          </a:xfrm>
+          <a:prstGeom prst="rect">
+            <a:avLst/>
+          </a:prstGeom>
+          <a:noFill/>
+        </p:spPr>
+        <p:txBody>
+          <a:bodyPr wrap="square" anchor="t" lIns="0" rIns="0" tIns="0" bIns="0">
+            <a:spAutoFit/>
+          </a:bodyPr>
+          <a:lstStyle/>
+          <a:p>
+            <a:pPr algn="l">
+              <a:lnSpc>
+                <a:spcPct val="115000"/>
+              </a:lnSpc>
+            </a:pPr>
+            <a:r>
+              <a:rPr sz="940" b="0">
+                <a:solidFill>
+                  <a:srgbClr val="1A1A1A"/>
+                </a:solidFill>
+                <a:latin typeface="Arial"/>
+                <a:ea typeface="微软雅黑"/>
+                <a:cs typeface="Arial"/>
+              </a:rPr>
+              <a:t>不是“偶尔漏一个”，是绝大多数箱几乎不读</a:t>
+            </a:r>
+          </a:p>
+        </p:txBody>
+      </p:sp>
+      <p:sp>
+        <p:nvSpPr>
+          <p:cNvPr id="8" name="TextBox 7"/>
+          <p:cNvSpPr txBox="1"/>
+          <p:nvPr/>
+        </p:nvSpPr>
+        <p:spPr>
+          <a:xfrm>
+            <a:off x="4114800" y="1316736"/>
+            <a:ext cx="3401568" cy="457200"/>
+          </a:xfrm>
+          <a:prstGeom prst="rect">
+            <a:avLst/>
+          </a:prstGeom>
+          <a:noFill/>
+        </p:spPr>
+        <p:txBody>
+          <a:bodyPr wrap="square" anchor="t" lIns="0" rIns="0" tIns="0" bIns="0">
+            <a:spAutoFit/>
+          </a:bodyPr>
+          <a:lstStyle/>
+          <a:p>
+            <a:pPr algn="l">
+              <a:lnSpc>
+                <a:spcPct val="100000"/>
+              </a:lnSpc>
+            </a:pPr>
+            <a:r>
+              <a:rPr sz="2600" b="1">
+                <a:solidFill>
+                  <a:srgbClr val="5C7ED4"/>
+                </a:solidFill>
+                <a:latin typeface="Arial"/>
+                <a:ea typeface="微软雅黑"/>
+                <a:cs typeface="Arial"/>
+              </a:rPr>
+              <a:t>18.1 次</a:t>
+            </a:r>
+          </a:p>
+        </p:txBody>
+      </p:sp>
+      <p:sp>
+        <p:nvSpPr>
+          <p:cNvPr id="9" name="TextBox 8"/>
+          <p:cNvSpPr txBox="1"/>
+          <p:nvPr/>
+        </p:nvSpPr>
+        <p:spPr>
+          <a:xfrm>
+            <a:off x="4114800" y="1737360"/>
+            <a:ext cx="3401568" cy="237744"/>
+          </a:xfrm>
+          <a:prstGeom prst="rect">
+            <a:avLst/>
+          </a:prstGeom>
+          <a:noFill/>
+        </p:spPr>
+        <p:txBody>
+          <a:bodyPr wrap="square" anchor="t" lIns="0" rIns="0" tIns="0" bIns="0">
+            <a:spAutoFit/>
+          </a:bodyPr>
+          <a:lstStyle/>
+          <a:p>
+            <a:pPr algn="l">
+              <a:lnSpc>
+                <a:spcPct val="100000"/>
+              </a:lnSpc>
+            </a:pPr>
+            <a:r>
+              <a:rPr sz="919" b="0">
+                <a:solidFill>
+                  <a:srgbClr val="8C8C8C"/>
+                </a:solidFill>
+                <a:latin typeface="Arial"/>
+                <a:ea typeface="微软雅黑"/>
+                <a:cs typeface="Arial"/>
+              </a:rPr>
+              <a:t>命中箱（5,605 箱）的平均读取事件</a:t>
+            </a:r>
+          </a:p>
+        </p:txBody>
+      </p:sp>
+      <p:sp>
+        <p:nvSpPr>
+          <p:cNvPr id="10" name="TextBox 9"/>
+          <p:cNvSpPr txBox="1"/>
+          <p:nvPr/>
+        </p:nvSpPr>
+        <p:spPr>
+          <a:xfrm>
+            <a:off x="4114800" y="1975104"/>
+            <a:ext cx="3401568" cy="502920"/>
+          </a:xfrm>
+          <a:prstGeom prst="rect">
+            <a:avLst/>
+          </a:prstGeom>
+          <a:noFill/>
+        </p:spPr>
+        <p:txBody>
+          <a:bodyPr wrap="square" anchor="t" lIns="0" rIns="0" tIns="0" bIns="0">
+            <a:spAutoFit/>
+          </a:bodyPr>
+          <a:lstStyle/>
+          <a:p>
+            <a:pPr algn="l">
+              <a:lnSpc>
+                <a:spcPct val="115000"/>
+              </a:lnSpc>
+            </a:pPr>
+            <a:r>
+              <a:rPr sz="940" b="0">
+                <a:solidFill>
+                  <a:srgbClr val="1A1A1A"/>
+                </a:solidFill>
+                <a:latin typeface="Arial"/>
+                <a:ea typeface="微软雅黑"/>
+                <a:cs typeface="Arial"/>
+              </a:rPr>
+              <a:t>一旦被盘存就反复读 —— 双峰，不是均匀漏读</a:t>
+            </a:r>
+          </a:p>
+        </p:txBody>
+      </p:sp>
+      <p:sp>
+        <p:nvSpPr>
+          <p:cNvPr id="11" name="TextBox 10"/>
+          <p:cNvSpPr txBox="1"/>
+          <p:nvPr/>
+        </p:nvSpPr>
+        <p:spPr>
+          <a:xfrm>
+            <a:off x="7680960" y="1316736"/>
+            <a:ext cx="3913632" cy="457200"/>
+          </a:xfrm>
+          <a:prstGeom prst="rect">
+            <a:avLst/>
+          </a:prstGeom>
+          <a:noFill/>
+        </p:spPr>
+        <p:txBody>
+          <a:bodyPr wrap="square" anchor="t" lIns="0" rIns="0" tIns="0" bIns="0">
+            <a:spAutoFit/>
+          </a:bodyPr>
+          <a:lstStyle/>
+          <a:p>
+            <a:pPr algn="l">
+              <a:lnSpc>
+                <a:spcPct val="100000"/>
+              </a:lnSpc>
+            </a:pPr>
+            <a:r>
+              <a:rPr sz="2600" b="1">
+                <a:solidFill>
+                  <a:srgbClr val="C0504D"/>
+                </a:solidFill>
+                <a:latin typeface="Arial"/>
+                <a:ea typeface="微软雅黑"/>
+                <a:cs typeface="Arial"/>
+              </a:rPr>
+              <a:t>4.9% ≠ 8.6%</a:t>
+            </a:r>
+          </a:p>
+        </p:txBody>
+      </p:sp>
+      <p:sp>
+        <p:nvSpPr>
+          <p:cNvPr id="12" name="TextBox 11"/>
+          <p:cNvSpPr txBox="1"/>
+          <p:nvPr/>
+        </p:nvSpPr>
+        <p:spPr>
+          <a:xfrm>
+            <a:off x="7680960" y="1737360"/>
+            <a:ext cx="3913632" cy="237744"/>
+          </a:xfrm>
+          <a:prstGeom prst="rect">
+            <a:avLst/>
+          </a:prstGeom>
+          <a:noFill/>
+        </p:spPr>
+        <p:txBody>
+          <a:bodyPr wrap="square" anchor="t" lIns="0" rIns="0" tIns="0" bIns="0">
+            <a:spAutoFit/>
+          </a:bodyPr>
+          <a:lstStyle/>
+          <a:p>
+            <a:pPr algn="l">
+              <a:lnSpc>
+                <a:spcPct val="100000"/>
+              </a:lnSpc>
+            </a:pPr>
+            <a:r>
+              <a:rPr sz="919" b="0">
+                <a:solidFill>
+                  <a:srgbClr val="8C8C8C"/>
+                </a:solidFill>
+                <a:latin typeface="Arial"/>
+                <a:ea typeface="微软雅黑"/>
+                <a:cs typeface="Arial"/>
+              </a:rPr>
+              <a:t>窗口内 ≥1 标签 5,605 箱 vs readStatus=True 9,782 箱</a:t>
+            </a:r>
+          </a:p>
+        </p:txBody>
+      </p:sp>
+      <p:sp>
+        <p:nvSpPr>
+          <p:cNvPr id="13" name="TextBox 12"/>
+          <p:cNvSpPr txBox="1"/>
+          <p:nvPr/>
+        </p:nvSpPr>
+        <p:spPr>
+          <a:xfrm>
+            <a:off x="7680960" y="1975104"/>
+            <a:ext cx="3913632" cy="502920"/>
+          </a:xfrm>
+          <a:prstGeom prst="rect">
+            <a:avLst/>
+          </a:prstGeom>
+          <a:noFill/>
+        </p:spPr>
+        <p:txBody>
+          <a:bodyPr wrap="square" anchor="t" lIns="0" rIns="0" tIns="0" bIns="0">
+            <a:spAutoFit/>
+          </a:bodyPr>
+          <a:lstStyle/>
+          <a:p>
+            <a:pPr algn="l">
+              <a:lnSpc>
+                <a:spcPct val="115000"/>
+              </a:lnSpc>
+            </a:pPr>
+            <a:r>
+              <a:rPr sz="940" b="0">
+                <a:solidFill>
+                  <a:srgbClr val="1A1A1A"/>
+                </a:solidFill>
+                <a:latin typeface="Arial"/>
+                <a:ea typeface="微软雅黑"/>
+                <a:cs typeface="Arial"/>
+              </a:rPr>
+              <a:t>readStatus 判的不是“这个窗口读到任意标签”</a:t>
+            </a:r>
+          </a:p>
+        </p:txBody>
+      </p:sp>
+      <p:sp>
+        <p:nvSpPr>
+          <p:cNvPr id="14" name="TextBox 13"/>
+          <p:cNvSpPr txBox="1"/>
+          <p:nvPr/>
+        </p:nvSpPr>
+        <p:spPr>
+          <a:xfrm>
+            <a:off x="566928" y="2377440"/>
+            <a:ext cx="5532120" cy="237744"/>
+          </a:xfrm>
+          <a:prstGeom prst="rect">
+            <a:avLst/>
+          </a:prstGeom>
+          <a:noFill/>
+        </p:spPr>
+        <p:txBody>
+          <a:bodyPr wrap="square" anchor="t" lIns="0" rIns="0" tIns="0" bIns="0">
+            <a:spAutoFit/>
+          </a:bodyPr>
+          <a:lstStyle/>
+          <a:p>
+            <a:pPr algn="l">
+              <a:lnSpc>
+                <a:spcPct val="100000"/>
+              </a:lnSpc>
+            </a:pPr>
+            <a:r>
+              <a:rPr sz="1000" b="1">
+                <a:solidFill>
+                  <a:srgbClr val="1A1A1A"/>
+                </a:solidFill>
+                <a:latin typeface="Arial"/>
+                <a:ea typeface="微软雅黑"/>
+                <a:cs typeface="Arial"/>
+              </a:rPr>
+              <a:t>三种解释（不互斥）与手上的证据</a:t>
+            </a:r>
+          </a:p>
+        </p:txBody>
+      </p:sp>
+      <p:sp>
+        <p:nvSpPr>
+          <p:cNvPr id="15" name="Rectangle 14"/>
+          <p:cNvSpPr/>
+          <p:nvPr/>
+        </p:nvSpPr>
+        <p:spPr>
+          <a:xfrm>
+            <a:off x="566928" y="2651760"/>
+            <a:ext cx="5532120" cy="932688"/>
+          </a:xfrm>
+          <a:prstGeom prst="rect">
+            <a:avLst/>
+          </a:prstGeom>
+          <a:solidFill>
+            <a:srgbClr val="FAFBFC"/>
+          </a:solidFill>
+          <a:ln w="9525">
+            <a:solidFill>
+              <a:srgbClr val="E6E6E6"/>
+            </a:solidFill>
+          </a:ln>
+          <a:effectLst/>
+        </p:spPr>
+        <p:style>
+          <a:lnRef idx="1">
+            <a:schemeClr val="accent1"/>
+          </a:lnRef>
+          <a:fillRef idx="3">
+            <a:schemeClr val="accent1"/>
+          </a:fillRef>
+          <a:effectRef idx="2">
+            <a:schemeClr val="accent1"/>
+          </a:effectRef>
+          <a:fontRef idx="minor">
+            <a:schemeClr val="lt1"/>
+          </a:fontRef>
+        </p:style>
+        <p:txBody>
+          <a:bodyPr rtlCol="0" anchor="ctr" wrap="square"/>
+          <a:lstStyle/>
+          <a:p>
+            <a:pPr algn="ctr"/>
+          </a:p>
+        </p:txBody>
+      </p:sp>
+      <p:sp>
+        <p:nvSpPr>
+          <p:cNvPr id="16" name="TextBox 15"/>
+          <p:cNvSpPr txBox="1"/>
+          <p:nvPr/>
+        </p:nvSpPr>
+        <p:spPr>
+          <a:xfrm>
+            <a:off x="713232" y="2734056"/>
+            <a:ext cx="5212080" cy="219456"/>
+          </a:xfrm>
+          <a:prstGeom prst="rect">
+            <a:avLst/>
+          </a:prstGeom>
+          <a:noFill/>
+        </p:spPr>
+        <p:txBody>
+          <a:bodyPr wrap="square" anchor="t" lIns="0" rIns="0" tIns="0" bIns="0">
+            <a:spAutoFit/>
+          </a:bodyPr>
+          <a:lstStyle/>
+          <a:p>
+            <a:pPr algn="l">
+              <a:lnSpc>
+                <a:spcPct val="100000"/>
+              </a:lnSpc>
+            </a:pPr>
+            <a:r>
+              <a:rPr sz="960" b="1">
+                <a:solidFill>
+                  <a:srgbClr val="3E5DA8"/>
+                </a:solidFill>
+                <a:latin typeface="Arial"/>
+                <a:ea typeface="微软雅黑"/>
+                <a:cs typeface="Arial"/>
+              </a:rPr>
+              <a:t>A  触发 / 到位判定</a:t>
+            </a:r>
+          </a:p>
+        </p:txBody>
+      </p:sp>
+      <p:sp>
+        <p:nvSpPr>
+          <p:cNvPr id="17" name="TextBox 16"/>
+          <p:cNvSpPr txBox="1"/>
+          <p:nvPr/>
+        </p:nvSpPr>
+        <p:spPr>
+          <a:xfrm>
+            <a:off x="713232" y="2962656"/>
+            <a:ext cx="5212080" cy="566928"/>
+          </a:xfrm>
+          <a:prstGeom prst="rect">
+            <a:avLst/>
+          </a:prstGeom>
+          <a:noFill/>
+        </p:spPr>
+        <p:txBody>
+          <a:bodyPr wrap="square" anchor="t" lIns="0" rIns="0" tIns="0" bIns="0">
+            <a:spAutoFit/>
+          </a:bodyPr>
+          <a:lstStyle/>
+          <a:p>
+            <a:pPr algn="l">
+              <a:lnSpc>
+                <a:spcPct val="120000"/>
+              </a:lnSpc>
+            </a:pPr>
+            <a:r>
+              <a:rPr sz="880" b="0">
+                <a:solidFill>
+                  <a:srgbClr val="1A1A1A"/>
+                </a:solidFill>
+                <a:latin typeface="Arial"/>
+                <a:ea typeface="微软雅黑"/>
+                <a:cs typeface="Arial"/>
+              </a:rPr>
+              <a:t>95% 的箱在窗口内 0 次读取；命中的箱却平均 18 次</a:t>
+            </a:r>
+          </a:p>
+          <a:p>
+            <a:pPr algn="l">
+              <a:lnSpc>
+                <a:spcPct val="120000"/>
+              </a:lnSpc>
+            </a:pPr>
+            <a:r>
+              <a:rPr sz="880" b="0">
+                <a:solidFill>
+                  <a:srgbClr val="1A1A1A"/>
+                </a:solidFill>
+                <a:latin typeface="Arial"/>
+                <a:ea typeface="微软雅黑"/>
+                <a:cs typeface="Arial"/>
+              </a:rPr>
+              <a:t>⇒ 更像“箱没进入盘存”，不是“弱到读不到”</a:t>
+            </a:r>
+          </a:p>
+        </p:txBody>
+      </p:sp>
+      <p:sp>
+        <p:nvSpPr>
+          <p:cNvPr id="18" name="Rectangle 17"/>
+          <p:cNvSpPr/>
+          <p:nvPr/>
+        </p:nvSpPr>
+        <p:spPr>
+          <a:xfrm>
+            <a:off x="566928" y="3657600"/>
+            <a:ext cx="5532120" cy="932688"/>
+          </a:xfrm>
+          <a:prstGeom prst="rect">
+            <a:avLst/>
+          </a:prstGeom>
+          <a:solidFill>
+            <a:srgbClr val="FAFBFC"/>
+          </a:solidFill>
+          <a:ln w="9525">
+            <a:solidFill>
+              <a:srgbClr val="E6E6E6"/>
+            </a:solidFill>
+          </a:ln>
+          <a:effectLst/>
+        </p:spPr>
+        <p:style>
+          <a:lnRef idx="1">
+            <a:schemeClr val="accent1"/>
+          </a:lnRef>
+          <a:fillRef idx="3">
+            <a:schemeClr val="accent1"/>
+          </a:fillRef>
+          <a:effectRef idx="2">
+            <a:schemeClr val="accent1"/>
+          </a:effectRef>
+          <a:fontRef idx="minor">
+            <a:schemeClr val="lt1"/>
+          </a:fontRef>
+        </p:style>
+        <p:txBody>
+          <a:bodyPr rtlCol="0" anchor="ctr" wrap="square"/>
+          <a:lstStyle/>
+          <a:p>
+            <a:pPr algn="ctr"/>
+          </a:p>
+        </p:txBody>
+      </p:sp>
+      <p:sp>
+        <p:nvSpPr>
+          <p:cNvPr id="19" name="TextBox 18"/>
+          <p:cNvSpPr txBox="1"/>
+          <p:nvPr/>
+        </p:nvSpPr>
+        <p:spPr>
+          <a:xfrm>
+            <a:off x="713232" y="3739896"/>
+            <a:ext cx="5212080" cy="219456"/>
+          </a:xfrm>
+          <a:prstGeom prst="rect">
+            <a:avLst/>
+          </a:prstGeom>
+          <a:noFill/>
+        </p:spPr>
+        <p:txBody>
+          <a:bodyPr wrap="square" anchor="t" lIns="0" rIns="0" tIns="0" bIns="0">
+            <a:spAutoFit/>
+          </a:bodyPr>
+          <a:lstStyle/>
+          <a:p>
+            <a:pPr algn="l">
+              <a:lnSpc>
+                <a:spcPct val="100000"/>
+              </a:lnSpc>
+            </a:pPr>
+            <a:r>
+              <a:rPr sz="960" b="1">
+                <a:solidFill>
+                  <a:srgbClr val="3E5DA8"/>
+                </a:solidFill>
+                <a:latin typeface="Arial"/>
+                <a:ea typeface="微软雅黑"/>
+                <a:cs typeface="Arial"/>
+              </a:rPr>
+              <a:t>B  readStatus 口径</a:t>
+            </a:r>
+          </a:p>
+        </p:txBody>
+      </p:sp>
+      <p:sp>
+        <p:nvSpPr>
+          <p:cNvPr id="20" name="TextBox 19"/>
+          <p:cNvSpPr txBox="1"/>
+          <p:nvPr/>
+        </p:nvSpPr>
+        <p:spPr>
+          <a:xfrm>
+            <a:off x="713232" y="3968496"/>
+            <a:ext cx="5212080" cy="566928"/>
+          </a:xfrm>
+          <a:prstGeom prst="rect">
+            <a:avLst/>
+          </a:prstGeom>
+          <a:noFill/>
+        </p:spPr>
+        <p:txBody>
+          <a:bodyPr wrap="square" anchor="t" lIns="0" rIns="0" tIns="0" bIns="0">
+            <a:spAutoFit/>
+          </a:bodyPr>
+          <a:lstStyle/>
+          <a:p>
+            <a:pPr algn="l">
+              <a:lnSpc>
+                <a:spcPct val="120000"/>
+              </a:lnSpc>
+            </a:pPr>
+            <a:r>
+              <a:rPr sz="880" b="0">
+                <a:solidFill>
+                  <a:srgbClr val="1A1A1A"/>
+                </a:solidFill>
+                <a:latin typeface="Arial"/>
+                <a:ea typeface="微软雅黑"/>
+                <a:cs typeface="Arial"/>
+              </a:rPr>
+              <a:t>窗口内 ≥1 标签 4.9%、readStatus=True 8.6%，两组既不等也不互相包含</a:t>
+            </a:r>
+          </a:p>
+          <a:p>
+            <a:pPr algn="l">
+              <a:lnSpc>
+                <a:spcPct val="120000"/>
+              </a:lnSpc>
+            </a:pPr>
+            <a:r>
+              <a:rPr sz="880" b="0">
+                <a:solidFill>
+                  <a:srgbClr val="1A1A1A"/>
+                </a:solidFill>
+                <a:latin typeface="Arial"/>
+                <a:ea typeface="微软雅黑"/>
+                <a:cs typeface="Arial"/>
+              </a:rPr>
+              <a:t>⇒ 它判的是指定标签 / 读全条件，需程序方确认</a:t>
+            </a:r>
+          </a:p>
+        </p:txBody>
+      </p:sp>
+      <p:sp>
+        <p:nvSpPr>
+          <p:cNvPr id="21" name="Rectangle 20"/>
+          <p:cNvSpPr/>
+          <p:nvPr/>
+        </p:nvSpPr>
+        <p:spPr>
+          <a:xfrm>
+            <a:off x="566928" y="4663440"/>
+            <a:ext cx="5532120" cy="932688"/>
+          </a:xfrm>
+          <a:prstGeom prst="rect">
+            <a:avLst/>
+          </a:prstGeom>
+          <a:solidFill>
+            <a:srgbClr val="FAFBFC"/>
+          </a:solidFill>
+          <a:ln w="9525">
+            <a:solidFill>
+              <a:srgbClr val="E6E6E6"/>
+            </a:solidFill>
+          </a:ln>
+          <a:effectLst/>
+        </p:spPr>
+        <p:style>
+          <a:lnRef idx="1">
+            <a:schemeClr val="accent1"/>
+          </a:lnRef>
+          <a:fillRef idx="3">
+            <a:schemeClr val="accent1"/>
+          </a:fillRef>
+          <a:effectRef idx="2">
+            <a:schemeClr val="accent1"/>
+          </a:effectRef>
+          <a:fontRef idx="minor">
+            <a:schemeClr val="lt1"/>
+          </a:fontRef>
+        </p:style>
+        <p:txBody>
+          <a:bodyPr rtlCol="0" anchor="ctr" wrap="square"/>
+          <a:lstStyle/>
+          <a:p>
+            <a:pPr algn="ctr"/>
+          </a:p>
+        </p:txBody>
+      </p:sp>
+      <p:sp>
+        <p:nvSpPr>
+          <p:cNvPr id="22" name="TextBox 21"/>
+          <p:cNvSpPr txBox="1"/>
+          <p:nvPr/>
+        </p:nvSpPr>
+        <p:spPr>
+          <a:xfrm>
+            <a:off x="713232" y="4745736"/>
+            <a:ext cx="5212080" cy="219456"/>
+          </a:xfrm>
+          <a:prstGeom prst="rect">
+            <a:avLst/>
+          </a:prstGeom>
+          <a:noFill/>
+        </p:spPr>
+        <p:txBody>
+          <a:bodyPr wrap="square" anchor="t" lIns="0" rIns="0" tIns="0" bIns="0">
+            <a:spAutoFit/>
+          </a:bodyPr>
+          <a:lstStyle/>
+          <a:p>
+            <a:pPr algn="l">
+              <a:lnSpc>
+                <a:spcPct val="100000"/>
+              </a:lnSpc>
+            </a:pPr>
+            <a:r>
+              <a:rPr sz="960" b="1">
+                <a:solidFill>
+                  <a:srgbClr val="3E5DA8"/>
+                </a:solidFill>
+                <a:latin typeface="Arial"/>
+                <a:ea typeface="微软雅黑"/>
+                <a:cs typeface="Arial"/>
+              </a:rPr>
+              <a:t>C  标签侧（贴标位置 / 遮挡 / 极化）</a:t>
+            </a:r>
+          </a:p>
+        </p:txBody>
+      </p:sp>
+      <p:sp>
+        <p:nvSpPr>
+          <p:cNvPr id="23" name="TextBox 22"/>
+          <p:cNvSpPr txBox="1"/>
+          <p:nvPr/>
+        </p:nvSpPr>
+        <p:spPr>
+          <a:xfrm>
+            <a:off x="713232" y="4974336"/>
+            <a:ext cx="5212080" cy="566928"/>
+          </a:xfrm>
+          <a:prstGeom prst="rect">
+            <a:avLst/>
+          </a:prstGeom>
+          <a:noFill/>
+        </p:spPr>
+        <p:txBody>
+          <a:bodyPr wrap="square" anchor="t" lIns="0" rIns="0" tIns="0" bIns="0">
+            <a:spAutoFit/>
+          </a:bodyPr>
+          <a:lstStyle/>
+          <a:p>
+            <a:pPr algn="l">
+              <a:lnSpc>
+                <a:spcPct val="120000"/>
+              </a:lnSpc>
+            </a:pPr>
+            <a:r>
+              <a:rPr sz="880" b="0">
+                <a:solidFill>
+                  <a:srgbClr val="1A1A1A"/>
+                </a:solidFill>
+                <a:latin typeface="Arial"/>
+                <a:ea typeface="微软雅黑"/>
+                <a:cs typeface="Arial"/>
+              </a:rPr>
+              <a:t>命中的箱也只读到 1–2 个标签、且反复读同一两个</a:t>
+            </a:r>
+          </a:p>
+          <a:p>
+            <a:pPr algn="l">
+              <a:lnSpc>
+                <a:spcPct val="120000"/>
+              </a:lnSpc>
+            </a:pPr>
+            <a:r>
+              <a:rPr sz="880" b="0">
+                <a:solidFill>
+                  <a:srgbClr val="1A1A1A"/>
+                </a:solidFill>
+                <a:latin typeface="Arial"/>
+                <a:ea typeface="微软雅黑"/>
+                <a:cs typeface="Arial"/>
+              </a:rPr>
+              <a:t>⇒ 部分标签被挡住或被箱体极化屏蔽，不是全都弱</a:t>
+            </a:r>
+          </a:p>
+        </p:txBody>
+      </p:sp>
+      <p:sp>
+        <p:nvSpPr>
+          <p:cNvPr id="24" name="TextBox 23"/>
+          <p:cNvSpPr txBox="1"/>
+          <p:nvPr/>
+        </p:nvSpPr>
+        <p:spPr>
+          <a:xfrm>
+            <a:off x="6355080" y="2377440"/>
+            <a:ext cx="5266944" cy="237744"/>
+          </a:xfrm>
+          <a:prstGeom prst="rect">
+            <a:avLst/>
+          </a:prstGeom>
+          <a:noFill/>
+        </p:spPr>
+        <p:txBody>
+          <a:bodyPr wrap="square" anchor="t" lIns="0" rIns="0" tIns="0" bIns="0">
+            <a:spAutoFit/>
+          </a:bodyPr>
+          <a:lstStyle/>
+          <a:p>
+            <a:pPr algn="l">
+              <a:lnSpc>
+                <a:spcPct val="100000"/>
+              </a:lnSpc>
+            </a:pPr>
+            <a:r>
+              <a:rPr sz="1000" b="1">
+                <a:solidFill>
+                  <a:srgbClr val="1A1A1A"/>
+                </a:solidFill>
+                <a:latin typeface="Arial"/>
+                <a:ea typeface="微软雅黑"/>
+                <a:cs typeface="Arial"/>
+              </a:rPr>
+              <a:t>40 分钟就能定性的判别实验（不用改硬件）</a:t>
+            </a:r>
+          </a:p>
+        </p:txBody>
+      </p:sp>
+      <p:graphicFrame>
+        <p:nvGraphicFramePr>
+          <p:cNvPr id="25" name="Table 24"/>
+          <p:cNvGraphicFramePr>
+            <a:graphicFrameLocks noGrp="1"/>
+          </p:cNvGraphicFramePr>
+          <p:nvPr/>
+        </p:nvGraphicFramePr>
+        <p:xfrm>
+          <a:off x="6355080" y="2651760"/>
+          <a:ext cx="5266942" cy="1609344"/>
+        </p:xfrm>
+        <a:graphic>
+          <a:graphicData uri="http://schemas.openxmlformats.org/drawingml/2006/table">
+            <a:tbl>
+              <a:tblPr/>
+              <a:tblGrid>
+                <a:gridCol w="365759"/>
+                <a:gridCol w="2395727"/>
+                <a:gridCol w="2505456"/>
+              </a:tblGrid>
+              <a:tr h="402336">
+                <a:tc>
+                  <a:txBody>
+                    <a:bodyPr/>
+                    <a:lstStyle/>
+                    <a:p>
+                      <a:pPr algn="ctr">
+                        <a:lnSpc>
+                          <a:spcPct val="100000"/>
+                        </a:lnSpc>
+                      </a:pPr>
+                      <a:r>
+                        <a:rPr sz="850" b="1">
+                          <a:solidFill>
+                            <a:srgbClr val="1A1A1A"/>
+                          </a:solidFill>
+                          <a:latin typeface="Arial"/>
+                          <a:ea typeface="微软雅黑"/>
+                          <a:cs typeface="Arial"/>
+                        </a:rPr>
+                        <a:t>#</a:t>
+                      </a:r>
+                    </a:p>
+                  </a:txBody>
+                  <a:tcPr marL="50292" marR="50292" marT="13716" marB="13716" anchor="ctr">
+                    <a:lnL w="9525" cap="flat" cmpd="sng" algn="ctr">
+                      <a:solidFill>
+                        <a:srgbClr val="D9D9D9"/>
+                      </a:solidFill>
+                      <a:prstDash val="solid"/>
+                    </a:lnL>
+                    <a:lnR w="9525" cap="flat" cmpd="sng" algn="ctr">
+                      <a:solidFill>
+                        <a:srgbClr val="D9D9D9"/>
+                      </a:solidFill>
+                      <a:prstDash val="solid"/>
+                    </a:lnR>
+                    <a:lnT w="9525" cap="flat" cmpd="sng" algn="ctr">
+                      <a:solidFill>
+                        <a:srgbClr val="D9D9D9"/>
+                      </a:solidFill>
+                      <a:prstDash val="solid"/>
+                    </a:lnT>
+                    <a:lnB w="9525" cap="flat" cmpd="sng" algn="ctr">
+                      <a:solidFill>
+                        <a:srgbClr val="D9D9D9"/>
+                      </a:solidFill>
+                      <a:prstDash val="solid"/>
+                    </a:lnB>
+                    <a:solidFill>
+                      <a:srgbClr val="F2F2F2"/>
+                    </a:solidFill>
+                  </a:tcPr>
+                </a:tc>
+                <a:tc>
+                  <a:txBody>
+                    <a:bodyPr/>
+                    <a:lstStyle/>
+                    <a:p>
+                      <a:pPr algn="l">
+                        <a:lnSpc>
+                          <a:spcPct val="100000"/>
+                        </a:lnSpc>
+                      </a:pPr>
+                      <a:r>
+                        <a:rPr sz="850" b="1">
+                          <a:solidFill>
+                            <a:srgbClr val="1A1A1A"/>
+                          </a:solidFill>
+                          <a:latin typeface="Arial"/>
+                          <a:ea typeface="微软雅黑"/>
+                          <a:cs typeface="Arial"/>
+                        </a:rPr>
+                        <a:t>做法</a:t>
+                      </a:r>
+                    </a:p>
+                  </a:txBody>
+                  <a:tcPr marL="50292" marR="50292" marT="13716" marB="13716" anchor="ctr">
+                    <a:lnL w="9525" cap="flat" cmpd="sng" algn="ctr">
+                      <a:solidFill>
+                        <a:srgbClr val="D9D9D9"/>
+                      </a:solidFill>
+                      <a:prstDash val="solid"/>
+                    </a:lnL>
+                    <a:lnR w="9525" cap="flat" cmpd="sng" algn="ctr">
+                      <a:solidFill>
+                        <a:srgbClr val="D9D9D9"/>
+                      </a:solidFill>
+                      <a:prstDash val="solid"/>
+                    </a:lnR>
+                    <a:lnT w="9525" cap="flat" cmpd="sng" algn="ctr">
+                      <a:solidFill>
+                        <a:srgbClr val="D9D9D9"/>
+                      </a:solidFill>
+                      <a:prstDash val="solid"/>
+                    </a:lnT>
+                    <a:lnB w="9525" cap="flat" cmpd="sng" algn="ctr">
+                      <a:solidFill>
+                        <a:srgbClr val="D9D9D9"/>
+                      </a:solidFill>
+                      <a:prstDash val="solid"/>
+                    </a:lnB>
+                    <a:solidFill>
+                      <a:srgbClr val="F2F2F2"/>
+                    </a:solidFill>
+                  </a:tcPr>
+                </a:tc>
+                <a:tc>
+                  <a:txBody>
+                    <a:bodyPr/>
+                    <a:lstStyle/>
+                    <a:p>
+                      <a:pPr algn="l">
+                        <a:lnSpc>
+                          <a:spcPct val="100000"/>
+                        </a:lnSpc>
+                      </a:pPr>
+                      <a:r>
+                        <a:rPr sz="850" b="1">
+                          <a:solidFill>
+                            <a:srgbClr val="1A1A1A"/>
+                          </a:solidFill>
+                          <a:latin typeface="Arial"/>
+                          <a:ea typeface="微软雅黑"/>
+                          <a:cs typeface="Arial"/>
+                        </a:rPr>
+                        <a:t>若结果是这样，则结论</a:t>
+                      </a:r>
+                    </a:p>
+                  </a:txBody>
+                  <a:tcPr marL="50292" marR="50292" marT="13716" marB="13716" anchor="ctr">
+                    <a:lnL w="9525" cap="flat" cmpd="sng" algn="ctr">
+                      <a:solidFill>
+                        <a:srgbClr val="D9D9D9"/>
+                      </a:solidFill>
+                      <a:prstDash val="solid"/>
+                    </a:lnL>
+                    <a:lnR w="9525" cap="flat" cmpd="sng" algn="ctr">
+                      <a:solidFill>
+                        <a:srgbClr val="D9D9D9"/>
+                      </a:solidFill>
+                      <a:prstDash val="solid"/>
+                    </a:lnR>
+                    <a:lnT w="9525" cap="flat" cmpd="sng" algn="ctr">
+                      <a:solidFill>
+                        <a:srgbClr val="D9D9D9"/>
+                      </a:solidFill>
+                      <a:prstDash val="solid"/>
+                    </a:lnT>
+                    <a:lnB w="9525" cap="flat" cmpd="sng" algn="ctr">
+                      <a:solidFill>
+                        <a:srgbClr val="D9D9D9"/>
+                      </a:solidFill>
+                      <a:prstDash val="solid"/>
+                    </a:lnB>
+                    <a:solidFill>
+                      <a:srgbClr val="F2F2F2"/>
+                    </a:solidFill>
+                  </a:tcPr>
+                </a:tc>
+              </a:tr>
+              <a:tr h="402336">
+                <a:tc>
+                  <a:txBody>
+                    <a:bodyPr/>
+                    <a:lstStyle/>
+                    <a:p>
+                      <a:pPr algn="ctr">
+                        <a:lnSpc>
+                          <a:spcPct val="100000"/>
+                        </a:lnSpc>
+                      </a:pPr>
+                      <a:r>
+                        <a:rPr sz="880" b="0">
+                          <a:solidFill>
+                            <a:srgbClr val="1A1A1A"/>
+                          </a:solidFill>
+                          <a:latin typeface="Arial"/>
+                          <a:ea typeface="微软雅黑"/>
+                          <a:cs typeface="Arial"/>
+                        </a:rPr>
+                        <a:t>1</a:t>
+                      </a:r>
+                    </a:p>
+                  </a:txBody>
+                  <a:tcPr marL="50292" marR="50292" marT="13716" marB="13716" anchor="ctr">
+                    <a:lnL w="9525" cap="flat" cmpd="sng" algn="ctr">
+                      <a:solidFill>
+                        <a:srgbClr val="D9D9D9"/>
+                      </a:solidFill>
+                      <a:prstDash val="solid"/>
+                    </a:lnL>
+                    <a:lnR w="9525" cap="flat" cmpd="sng" algn="ctr">
+                      <a:solidFill>
+                        <a:srgbClr val="D9D9D9"/>
+                      </a:solidFill>
+                      <a:prstDash val="solid"/>
+                    </a:lnR>
+                    <a:lnT w="9525" cap="flat" cmpd="sng" algn="ctr">
+                      <a:solidFill>
+                        <a:srgbClr val="D9D9D9"/>
+                      </a:solidFill>
+                      <a:prstDash val="solid"/>
+                    </a:lnT>
+                    <a:lnB w="9525" cap="flat" cmpd="sng" algn="ctr">
+                      <a:solidFill>
+                        <a:srgbClr val="D9D9D9"/>
+                      </a:solidFill>
+                      <a:prstDash val="solid"/>
+                    </a:lnB>
+                    <a:solidFill>
+                      <a:srgbClr val="FFFFFF"/>
+                    </a:solidFill>
+                  </a:tcPr>
+                </a:tc>
+                <a:tc>
+                  <a:txBody>
+                    <a:bodyPr/>
+                    <a:lstStyle/>
+                    <a:p>
+                      <a:pPr algn="l">
+                        <a:lnSpc>
+                          <a:spcPct val="100000"/>
+                        </a:lnSpc>
+                      </a:pPr>
+                      <a:r>
+                        <a:rPr sz="880" b="0">
+                          <a:solidFill>
+                            <a:srgbClr val="1A1A1A"/>
+                          </a:solidFill>
+                          <a:latin typeface="Arial"/>
+                          <a:ea typeface="微软雅黑"/>
+                          <a:cs typeface="Arial"/>
+                        </a:rPr>
+                        <a:t>箱面额外贴 1 片已知好标签，正常过箱</a:t>
+                      </a:r>
+                    </a:p>
+                  </a:txBody>
+                  <a:tcPr marL="50292" marR="50292" marT="13716" marB="13716" anchor="ctr">
+                    <a:lnL w="9525" cap="flat" cmpd="sng" algn="ctr">
+                      <a:solidFill>
+                        <a:srgbClr val="D9D9D9"/>
+                      </a:solidFill>
+                      <a:prstDash val="solid"/>
+                    </a:lnL>
+                    <a:lnR w="9525" cap="flat" cmpd="sng" algn="ctr">
+                      <a:solidFill>
+                        <a:srgbClr val="D9D9D9"/>
+                      </a:solidFill>
+                      <a:prstDash val="solid"/>
+                    </a:lnR>
+                    <a:lnT w="9525" cap="flat" cmpd="sng" algn="ctr">
+                      <a:solidFill>
+                        <a:srgbClr val="D9D9D9"/>
+                      </a:solidFill>
+                      <a:prstDash val="solid"/>
+                    </a:lnT>
+                    <a:lnB w="9525" cap="flat" cmpd="sng" algn="ctr">
+                      <a:solidFill>
+                        <a:srgbClr val="D9D9D9"/>
+                      </a:solidFill>
+                      <a:prstDash val="solid"/>
+                    </a:lnB>
+                    <a:solidFill>
+                      <a:srgbClr val="FFFFFF"/>
+                    </a:solidFill>
+                  </a:tcPr>
+                </a:tc>
+                <a:tc>
+                  <a:txBody>
+                    <a:bodyPr/>
+                    <a:lstStyle/>
+                    <a:p>
+                      <a:pPr algn="l">
+                        <a:lnSpc>
+                          <a:spcPct val="100000"/>
+                        </a:lnSpc>
+                      </a:pPr>
+                      <a:r>
+                        <a:rPr sz="880" b="0">
+                          <a:solidFill>
+                            <a:srgbClr val="1A1A1A"/>
+                          </a:solidFill>
+                          <a:latin typeface="Arial"/>
+                          <a:ea typeface="微软雅黑"/>
+                          <a:cs typeface="Arial"/>
+                        </a:rPr>
+                        <a:t>读到这片标签但 readStatus 仍 False ⇒ B</a:t>
+                      </a:r>
+                    </a:p>
+                  </a:txBody>
+                  <a:tcPr marL="50292" marR="50292" marT="13716" marB="13716" anchor="ctr">
+                    <a:lnL w="9525" cap="flat" cmpd="sng" algn="ctr">
+                      <a:solidFill>
+                        <a:srgbClr val="D9D9D9"/>
+                      </a:solidFill>
+                      <a:prstDash val="solid"/>
+                    </a:lnL>
+                    <a:lnR w="9525" cap="flat" cmpd="sng" algn="ctr">
+                      <a:solidFill>
+                        <a:srgbClr val="D9D9D9"/>
+                      </a:solidFill>
+                      <a:prstDash val="solid"/>
+                    </a:lnR>
+                    <a:lnT w="9525" cap="flat" cmpd="sng" algn="ctr">
+                      <a:solidFill>
+                        <a:srgbClr val="D9D9D9"/>
+                      </a:solidFill>
+                      <a:prstDash val="solid"/>
+                    </a:lnT>
+                    <a:lnB w="9525" cap="flat" cmpd="sng" algn="ctr">
+                      <a:solidFill>
+                        <a:srgbClr val="D9D9D9"/>
+                      </a:solidFill>
+                      <a:prstDash val="solid"/>
+                    </a:lnB>
+                    <a:solidFill>
+                      <a:srgbClr val="FFFFFF"/>
+                    </a:solidFill>
+                  </a:tcPr>
+                </a:tc>
+              </a:tr>
+              <a:tr h="402336">
+                <a:tc>
+                  <a:txBody>
+                    <a:bodyPr/>
+                    <a:lstStyle/>
+                    <a:p>
+                      <a:pPr algn="ctr">
+                        <a:lnSpc>
+                          <a:spcPct val="100000"/>
+                        </a:lnSpc>
+                      </a:pPr>
+                      <a:r>
+                        <a:rPr sz="880" b="0">
+                          <a:solidFill>
+                            <a:srgbClr val="1A1A1A"/>
+                          </a:solidFill>
+                          <a:latin typeface="Arial"/>
+                          <a:ea typeface="微软雅黑"/>
+                          <a:cs typeface="Arial"/>
+                        </a:rPr>
+                        <a:t>2</a:t>
+                      </a:r>
+                    </a:p>
+                  </a:txBody>
+                  <a:tcPr marL="50292" marR="50292" marT="13716" marB="13716" anchor="ctr">
+                    <a:lnL w="9525" cap="flat" cmpd="sng" algn="ctr">
+                      <a:solidFill>
+                        <a:srgbClr val="D9D9D9"/>
+                      </a:solidFill>
+                      <a:prstDash val="solid"/>
+                    </a:lnL>
+                    <a:lnR w="9525" cap="flat" cmpd="sng" algn="ctr">
+                      <a:solidFill>
+                        <a:srgbClr val="D9D9D9"/>
+                      </a:solidFill>
+                      <a:prstDash val="solid"/>
+                    </a:lnR>
+                    <a:lnT w="9525" cap="flat" cmpd="sng" algn="ctr">
+                      <a:solidFill>
+                        <a:srgbClr val="D9D9D9"/>
+                      </a:solidFill>
+                      <a:prstDash val="solid"/>
+                    </a:lnT>
+                    <a:lnB w="9525" cap="flat" cmpd="sng" algn="ctr">
+                      <a:solidFill>
+                        <a:srgbClr val="D9D9D9"/>
+                      </a:solidFill>
+                      <a:prstDash val="solid"/>
+                    </a:lnB>
+                    <a:solidFill>
+                      <a:srgbClr val="FFFFFF"/>
+                    </a:solidFill>
+                  </a:tcPr>
+                </a:tc>
+                <a:tc>
+                  <a:txBody>
+                    <a:bodyPr/>
+                    <a:lstStyle/>
+                    <a:p>
+                      <a:pPr algn="l">
+                        <a:lnSpc>
+                          <a:spcPct val="100000"/>
+                        </a:lnSpc>
+                      </a:pPr>
+                      <a:r>
+                        <a:rPr sz="880" b="0">
+                          <a:solidFill>
+                            <a:srgbClr val="1A1A1A"/>
+                          </a:solidFill>
+                          <a:latin typeface="Arial"/>
+                          <a:ea typeface="微软雅黑"/>
+                          <a:cs typeface="Arial"/>
+                        </a:rPr>
+                        <a:t>rfidmon 占会话，同一箱手动触发一次盘存</a:t>
+                      </a:r>
+                    </a:p>
+                  </a:txBody>
+                  <a:tcPr marL="50292" marR="50292" marT="13716" marB="13716" anchor="ctr">
+                    <a:lnL w="9525" cap="flat" cmpd="sng" algn="ctr">
+                      <a:solidFill>
+                        <a:srgbClr val="D9D9D9"/>
+                      </a:solidFill>
+                      <a:prstDash val="solid"/>
+                    </a:lnL>
+                    <a:lnR w="9525" cap="flat" cmpd="sng" algn="ctr">
+                      <a:solidFill>
+                        <a:srgbClr val="D9D9D9"/>
+                      </a:solidFill>
+                      <a:prstDash val="solid"/>
+                    </a:lnR>
+                    <a:lnT w="9525" cap="flat" cmpd="sng" algn="ctr">
+                      <a:solidFill>
+                        <a:srgbClr val="D9D9D9"/>
+                      </a:solidFill>
+                      <a:prstDash val="solid"/>
+                    </a:lnT>
+                    <a:lnB w="9525" cap="flat" cmpd="sng" algn="ctr">
+                      <a:solidFill>
+                        <a:srgbClr val="D9D9D9"/>
+                      </a:solidFill>
+                      <a:prstDash val="solid"/>
+                    </a:lnB>
+                    <a:solidFill>
+                      <a:srgbClr val="FFFFFF"/>
+                    </a:solidFill>
+                  </a:tcPr>
+                </a:tc>
+                <a:tc>
+                  <a:txBody>
+                    <a:bodyPr/>
+                    <a:lstStyle/>
+                    <a:p>
+                      <a:pPr algn="l">
+                        <a:lnSpc>
+                          <a:spcPct val="100000"/>
+                        </a:lnSpc>
+                      </a:pPr>
+                      <a:r>
+                        <a:rPr sz="880" b="0">
+                          <a:solidFill>
+                            <a:srgbClr val="1A1A1A"/>
+                          </a:solidFill>
+                          <a:latin typeface="Arial"/>
+                          <a:ea typeface="微软雅黑"/>
+                          <a:cs typeface="Arial"/>
+                        </a:rPr>
+                        <a:t>能读到 6 个 ⇒ A，与射频能力无关</a:t>
+                      </a:r>
+                    </a:p>
+                  </a:txBody>
+                  <a:tcPr marL="50292" marR="50292" marT="13716" marB="13716" anchor="ctr">
+                    <a:lnL w="9525" cap="flat" cmpd="sng" algn="ctr">
+                      <a:solidFill>
+                        <a:srgbClr val="D9D9D9"/>
+                      </a:solidFill>
+                      <a:prstDash val="solid"/>
+                    </a:lnL>
+                    <a:lnR w="9525" cap="flat" cmpd="sng" algn="ctr">
+                      <a:solidFill>
+                        <a:srgbClr val="D9D9D9"/>
+                      </a:solidFill>
+                      <a:prstDash val="solid"/>
+                    </a:lnR>
+                    <a:lnT w="9525" cap="flat" cmpd="sng" algn="ctr">
+                      <a:solidFill>
+                        <a:srgbClr val="D9D9D9"/>
+                      </a:solidFill>
+                      <a:prstDash val="solid"/>
+                    </a:lnT>
+                    <a:lnB w="9525" cap="flat" cmpd="sng" algn="ctr">
+                      <a:solidFill>
+                        <a:srgbClr val="D9D9D9"/>
+                      </a:solidFill>
+                      <a:prstDash val="solid"/>
+                    </a:lnB>
+                    <a:solidFill>
+                      <a:srgbClr val="FFFFFF"/>
+                    </a:solidFill>
+                  </a:tcPr>
+                </a:tc>
+              </a:tr>
+              <a:tr h="402336">
+                <a:tc>
+                  <a:txBody>
+                    <a:bodyPr/>
+                    <a:lstStyle/>
+                    <a:p>
+                      <a:pPr algn="ctr">
+                        <a:lnSpc>
+                          <a:spcPct val="100000"/>
+                        </a:lnSpc>
+                      </a:pPr>
+                      <a:r>
+                        <a:rPr sz="880" b="0">
+                          <a:solidFill>
+                            <a:srgbClr val="1A1A1A"/>
+                          </a:solidFill>
+                          <a:latin typeface="Arial"/>
+                          <a:ea typeface="微软雅黑"/>
+                          <a:cs typeface="Arial"/>
+                        </a:rPr>
+                        <a:t>3</a:t>
+                      </a:r>
+                    </a:p>
+                  </a:txBody>
+                  <a:tcPr marL="50292" marR="50292" marT="13716" marB="13716" anchor="ctr">
+                    <a:lnL w="9525" cap="flat" cmpd="sng" algn="ctr">
+                      <a:solidFill>
+                        <a:srgbClr val="D9D9D9"/>
+                      </a:solidFill>
+                      <a:prstDash val="solid"/>
+                    </a:lnL>
+                    <a:lnR w="9525" cap="flat" cmpd="sng" algn="ctr">
+                      <a:solidFill>
+                        <a:srgbClr val="D9D9D9"/>
+                      </a:solidFill>
+                      <a:prstDash val="solid"/>
+                    </a:lnR>
+                    <a:lnT w="9525" cap="flat" cmpd="sng" algn="ctr">
+                      <a:solidFill>
+                        <a:srgbClr val="D9D9D9"/>
+                      </a:solidFill>
+                      <a:prstDash val="solid"/>
+                    </a:lnT>
+                    <a:lnB w="9525" cap="flat" cmpd="sng" algn="ctr">
+                      <a:solidFill>
+                        <a:srgbClr val="D9D9D9"/>
+                      </a:solidFill>
+                      <a:prstDash val="solid"/>
+                    </a:lnB>
+                    <a:solidFill>
+                      <a:srgbClr val="FFFFFF"/>
+                    </a:solidFill>
+                  </a:tcPr>
+                </a:tc>
+                <a:tc>
+                  <a:txBody>
+                    <a:bodyPr/>
+                    <a:lstStyle/>
+                    <a:p>
+                      <a:pPr algn="l">
+                        <a:lnSpc>
+                          <a:spcPct val="100000"/>
+                        </a:lnSpc>
+                      </a:pPr>
+                      <a:r>
+                        <a:rPr sz="880" b="0">
+                          <a:solidFill>
+                            <a:srgbClr val="1A1A1A"/>
+                          </a:solidFill>
+                          <a:latin typeface="Arial"/>
+                          <a:ea typeface="微软雅黑"/>
+                          <a:cs typeface="Arial"/>
+                        </a:rPr>
+                        <a:t>不装金属背壳 / 把标签面对读码器再过一次</a:t>
+                      </a:r>
+                    </a:p>
+                  </a:txBody>
+                  <a:tcPr marL="50292" marR="50292" marT="13716" marB="13716" anchor="ctr">
+                    <a:lnL w="9525" cap="flat" cmpd="sng" algn="ctr">
+                      <a:solidFill>
+                        <a:srgbClr val="D9D9D9"/>
+                      </a:solidFill>
+                      <a:prstDash val="solid"/>
+                    </a:lnL>
+                    <a:lnR w="9525" cap="flat" cmpd="sng" algn="ctr">
+                      <a:solidFill>
+                        <a:srgbClr val="D9D9D9"/>
+                      </a:solidFill>
+                      <a:prstDash val="solid"/>
+                    </a:lnR>
+                    <a:lnT w="9525" cap="flat" cmpd="sng" algn="ctr">
+                      <a:solidFill>
+                        <a:srgbClr val="D9D9D9"/>
+                      </a:solidFill>
+                      <a:prstDash val="solid"/>
+                    </a:lnT>
+                    <a:lnB w="9525" cap="flat" cmpd="sng" algn="ctr">
+                      <a:solidFill>
+                        <a:srgbClr val="D9D9D9"/>
+                      </a:solidFill>
+                      <a:prstDash val="solid"/>
+                    </a:lnB>
+                    <a:solidFill>
+                      <a:srgbClr val="FFFFFF"/>
+                    </a:solidFill>
+                  </a:tcPr>
+                </a:tc>
+                <a:tc>
+                  <a:txBody>
+                    <a:bodyPr/>
+                    <a:lstStyle/>
+                    <a:p>
+                      <a:pPr algn="l">
+                        <a:lnSpc>
+                          <a:spcPct val="100000"/>
+                        </a:lnSpc>
+                      </a:pPr>
+                      <a:r>
+                        <a:rPr sz="880" b="0">
+                          <a:solidFill>
+                            <a:srgbClr val="1A1A1A"/>
+                          </a:solidFill>
+                          <a:latin typeface="Arial"/>
+                          <a:ea typeface="微软雅黑"/>
+                          <a:cs typeface="Arial"/>
+                        </a:rPr>
+                        <a:t>变成 6/6 ⇒ C（遮挡或贴标位置）</a:t>
+                      </a:r>
+                    </a:p>
+                  </a:txBody>
+                  <a:tcPr marL="50292" marR="50292" marT="13716" marB="13716" anchor="ctr">
+                    <a:lnL w="9525" cap="flat" cmpd="sng" algn="ctr">
+                      <a:solidFill>
+                        <a:srgbClr val="D9D9D9"/>
+                      </a:solidFill>
+                      <a:prstDash val="solid"/>
+                    </a:lnL>
+                    <a:lnR w="9525" cap="flat" cmpd="sng" algn="ctr">
+                      <a:solidFill>
+                        <a:srgbClr val="D9D9D9"/>
+                      </a:solidFill>
+                      <a:prstDash val="solid"/>
+                    </a:lnR>
+                    <a:lnT w="9525" cap="flat" cmpd="sng" algn="ctr">
+                      <a:solidFill>
+                        <a:srgbClr val="D9D9D9"/>
+                      </a:solidFill>
+                      <a:prstDash val="solid"/>
+                    </a:lnT>
+                    <a:lnB w="9525" cap="flat" cmpd="sng" algn="ctr">
+                      <a:solidFill>
+                        <a:srgbClr val="D9D9D9"/>
+                      </a:solidFill>
+                      <a:prstDash val="solid"/>
+                    </a:lnB>
+                    <a:solidFill>
+                      <a:srgbClr val="FFFFFF"/>
+                    </a:solidFill>
+                  </a:tcPr>
+                </a:tc>
+              </a:tr>
+            </a:tbl>
+          </a:graphicData>
+        </a:graphic>
+      </p:graphicFrame>
+      <p:sp>
+        <p:nvSpPr>
+          <p:cNvPr id="26" name="Rectangle 25"/>
+          <p:cNvSpPr/>
+          <p:nvPr/>
+        </p:nvSpPr>
+        <p:spPr>
+          <a:xfrm>
+            <a:off x="6355080" y="4425696"/>
+            <a:ext cx="5266944" cy="1316736"/>
+          </a:xfrm>
+          <a:prstGeom prst="rect">
+            <a:avLst/>
+          </a:prstGeom>
+          <a:solidFill>
+            <a:srgbClr val="E6EDF9"/>
+          </a:solidFill>
+          <a:ln>
+            <a:noFill/>
+          </a:ln>
+          <a:effectLst/>
+        </p:spPr>
+        <p:style>
+          <a:lnRef idx="1">
+            <a:schemeClr val="accent1"/>
+          </a:lnRef>
+          <a:fillRef idx="3">
+            <a:schemeClr val="accent1"/>
+          </a:fillRef>
+          <a:effectRef idx="2">
+            <a:schemeClr val="accent1"/>
+          </a:effectRef>
+          <a:fontRef idx="minor">
+            <a:schemeClr val="lt1"/>
+          </a:fontRef>
+        </p:style>
+        <p:txBody>
+          <a:bodyPr rtlCol="0" anchor="ctr" wrap="square"/>
+          <a:lstStyle/>
+          <a:p>
+            <a:pPr algn="ctr"/>
+          </a:p>
+        </p:txBody>
+      </p:sp>
+      <p:sp>
+        <p:nvSpPr>
+          <p:cNvPr id="27" name="TextBox 26"/>
+          <p:cNvSpPr txBox="1"/>
+          <p:nvPr/>
+        </p:nvSpPr>
+        <p:spPr>
+          <a:xfrm>
+            <a:off x="6519672" y="4535424"/>
+            <a:ext cx="4937760" cy="1152144"/>
+          </a:xfrm>
+          <a:prstGeom prst="rect">
+            <a:avLst/>
+          </a:prstGeom>
+          <a:noFill/>
+        </p:spPr>
+        <p:txBody>
+          <a:bodyPr wrap="square" lIns="0" rIns="0" tIns="0" bIns="0">
+            <a:spAutoFit/>
+          </a:bodyPr>
+          <a:lstStyle/>
+          <a:p>
+            <a:pPr>
+              <a:lnSpc>
+                <a:spcPct val="125000"/>
+              </a:lnSpc>
+            </a:pPr>
+            <a:r>
+              <a:rPr sz="960" b="1">
+                <a:solidFill>
+                  <a:srgbClr val="3E5DA8"/>
+                </a:solidFill>
+                <a:latin typeface="Arial"/>
+                <a:ea typeface="微软雅黑"/>
+                <a:cs typeface="Arial"/>
+              </a:rPr>
+              <a:t>这一步和 P5–P7 的模型预测什么关系</a:t>
+            </a:r>
+          </a:p>
+          <a:p>
+            <a:pPr>
+              <a:lnSpc>
+                <a:spcPct val="125000"/>
+              </a:lnSpc>
+            </a:pPr>
+            <a:r>
+              <a:rPr sz="880" b="0">
+                <a:solidFill>
+                  <a:srgbClr val="1A1A1A"/>
+                </a:solidFill>
+                <a:latin typeface="Arial"/>
+                <a:ea typeface="微软雅黑"/>
+                <a:cs typeface="Arial"/>
+              </a:rPr>
+              <a:t>模型说的是“布好之后能不能读到 6 个”，前提是箱真的被盘存、标签真的在箱里。</a:t>
+            </a:r>
+          </a:p>
+          <a:p>
+            <a:pPr>
+              <a:lnSpc>
+                <a:spcPct val="125000"/>
+              </a:lnSpc>
+            </a:pPr>
+            <a:r>
+              <a:rPr sz="880" b="0">
+                <a:solidFill>
+                  <a:srgbClr val="1A1A1A"/>
+                </a:solidFill>
+                <a:latin typeface="Arial"/>
+                <a:ea typeface="微软雅黑"/>
+                <a:cs typeface="Arial"/>
+              </a:rPr>
+              <a:t>现网实测（三面天线 &lt;5 cm 仍 0.08/6、读到数与距离无相关）说明这个前提现在不成立。</a:t>
+            </a:r>
+          </a:p>
+          <a:p>
+            <a:pPr>
+              <a:lnSpc>
+                <a:spcPct val="125000"/>
+              </a:lnSpc>
+            </a:pPr>
+            <a:r>
+              <a:rPr sz="880" b="1">
+                <a:solidFill>
+                  <a:srgbClr val="3E5DA8"/>
+                </a:solidFill>
+                <a:latin typeface="Arial"/>
+                <a:ea typeface="微软雅黑"/>
+                <a:cs typeface="Arial"/>
+              </a:rPr>
+              <a:t>所以改造顺序必须是：先把“每箱被盘存 + 6 个标签都在可读位置”做实 → 再谈增益/厂家。</a:t>
+            </a:r>
+          </a:p>
+        </p:txBody>
+      </p:sp>
+      <p:sp>
+        <p:nvSpPr>
+          <p:cNvPr id="28" name="Rectangle 27"/>
+          <p:cNvSpPr/>
+          <p:nvPr/>
+        </p:nvSpPr>
+        <p:spPr>
+          <a:xfrm>
+            <a:off x="566928" y="5870448"/>
+            <a:ext cx="45720" cy="310896"/>
+          </a:xfrm>
+          <a:prstGeom prst="rect">
+            <a:avLst/>
+          </a:prstGeom>
+          <a:solidFill>
+            <a:srgbClr val="3E5DA8"/>
+          </a:solidFill>
+          <a:ln>
+            <a:noFill/>
+          </a:ln>
+          <a:effectLst/>
+        </p:spPr>
+        <p:style>
+          <a:lnRef idx="1">
+            <a:schemeClr val="accent1"/>
+          </a:lnRef>
+          <a:fillRef idx="3">
+            <a:schemeClr val="accent1"/>
+          </a:fillRef>
+          <a:effectRef idx="2">
+            <a:schemeClr val="accent1"/>
+          </a:effectRef>
+          <a:fontRef idx="minor">
+            <a:schemeClr val="lt1"/>
+          </a:fontRef>
+        </p:style>
+        <p:txBody>
+          <a:bodyPr rtlCol="0" anchor="ctr" wrap="square"/>
+          <a:lstStyle/>
+          <a:p>
+            <a:pPr algn="ctr"/>
+          </a:p>
+        </p:txBody>
+      </p:sp>
+      <p:sp>
+        <p:nvSpPr>
+          <p:cNvPr id="29" name="TextBox 28"/>
+          <p:cNvSpPr txBox="1"/>
+          <p:nvPr/>
+        </p:nvSpPr>
+        <p:spPr>
+          <a:xfrm>
+            <a:off x="713232" y="5888736"/>
+            <a:ext cx="10515600" cy="292608"/>
+          </a:xfrm>
+          <a:prstGeom prst="rect">
+            <a:avLst/>
+          </a:prstGeom>
+          <a:noFill/>
+        </p:spPr>
+        <p:txBody>
+          <a:bodyPr wrap="square" anchor="ctr" lIns="0" rIns="0" tIns="0" bIns="0">
+            <a:spAutoFit/>
+          </a:bodyPr>
+          <a:lstStyle/>
+          <a:p>
+            <a:pPr algn="l">
+              <a:lnSpc>
+                <a:spcPct val="100000"/>
+              </a:lnSpc>
+            </a:pPr>
+            <a:r>
+              <a:rPr sz="1100" b="1">
+                <a:solidFill>
+                  <a:srgbClr val="1A1A1A"/>
+                </a:solidFill>
+                <a:latin typeface="Arial"/>
+                <a:ea typeface="微软雅黑"/>
+                <a:cs typeface="Arial"/>
+              </a:rPr>
+              <a:t>先在 40 分钟内定性 A/B/C；定性之前，任何“换读码器 / 换天线”的收益都无法验证</a:t>
+            </a:r>
+          </a:p>
+        </p:txBody>
+      </p:sp>
+      <p:cxnSp>
+        <p:nvCxnSpPr>
+          <p:cNvPr id="32" name="Connector 31"/>
+          <p:cNvCxnSpPr/>
+          <p:nvPr/>
+        </p:nvCxnSpPr>
+        <p:spPr>
+          <a:xfrm>
+            <a:off x="566928" y="6345936"/>
+            <a:ext cx="11057839" cy="0"/>
+          </a:xfrm>
+          <a:prstGeom prst="line">
+            <a:avLst/>
+          </a:prstGeom>
+          <a:ln w="9525">
+            <a:solidFill>
+              <a:srgbClr val="ECECEC"/>
+            </a:solidFill>
+          </a:ln>
+        </p:spPr>
+        <p:style>
+          <a:lnRef idx="2">
+            <a:schemeClr val="accent1"/>
+          </a:lnRef>
+          <a:fillRef idx="0">
+            <a:schemeClr val="accent1"/>
+          </a:fillRef>
+          <a:effectRef idx="1">
+            <a:schemeClr val="accent1"/>
+          </a:effectRef>
+          <a:fontRef idx="minor">
+            <a:schemeClr val="tx1"/>
+          </a:fontRef>
+        </p:style>
+      </p:cxnSp>
+      <p:sp>
+        <p:nvSpPr>
+          <p:cNvPr id="33" name="TextBox 32"/>
+          <p:cNvSpPr txBox="1"/>
+          <p:nvPr/>
+        </p:nvSpPr>
+        <p:spPr>
+          <a:xfrm>
+            <a:off x="566928" y="6419088"/>
+            <a:ext cx="7315200" cy="237744"/>
+          </a:xfrm>
+          <a:prstGeom prst="rect">
+            <a:avLst/>
+          </a:prstGeom>
+          <a:noFill/>
+        </p:spPr>
+        <p:txBody>
+          <a:bodyPr wrap="none" lIns="0" rIns="0" tIns="0" bIns="0">
+            <a:spAutoFit/>
+          </a:bodyPr>
+          <a:lstStyle/>
+          <a:p>
+            <a:pPr algn="l"/>
+            <a:r>
+              <a:rPr sz="800">
                 <a:solidFill>
                   <a:srgbClr val="8C8C8C"/>
                 </a:solidFill>
@@ -4671,7 +6555,7 @@
       </p:sp>
       <p:sp>
         <p:nvSpPr>
-          <p:cNvPr id="6" name="TextBox 5"/>
+          <p:cNvPr id="34" name="TextBox 33"/>
           <p:cNvSpPr txBox="1"/>
           <p:nvPr/>
         </p:nvSpPr>
@@ -4686,18 +6570,14 @@
           <a:noFill/>
         </p:spPr>
         <p:txBody>
-          <a:bodyPr wrap="square" anchor="t" lIns="0" rIns="0" tIns="0" bIns="0">
+          <a:bodyPr wrap="none" lIns="0" rIns="0" tIns="0" bIns="0">
             <a:spAutoFit/>
           </a:bodyPr>
           <a:lstStyle/>
           <a:p>
-            <a:pPr algn="r">
-              <a:lnSpc>
-                <a:spcPct val="100000"/>
-              </a:lnSpc>
-            </a:pPr>
+            <a:pPr algn="r"/>
             <a:r>
-              <a:rPr sz="800" b="0">
+              <a:rPr sz="800">
                 <a:solidFill>
                   <a:srgbClr val="8C8C8C"/>
                 </a:solidFill>
@@ -4705,11 +6585,146 @@
                 <a:ea typeface="微软雅黑"/>
                 <a:cs typeface="Arial"/>
               </a:rPr>
-              <a:t>10 / 10</a:t>
+              <a:t>10 / 11</a:t>
             </a:r>
           </a:p>
         </p:txBody>
       </p:sp>
+    </p:spTree>
+  </p:cSld>
+  <p:clrMapOvr>
+    <a:masterClrMapping/>
+  </p:clrMapOvr>
+</p:sld>
+</file>
+
+<file path=ppt/slides/slide11.xml><?xml version="1.0" encoding="utf-8"?>
+<p:sld xmlns:a="http://schemas.openxmlformats.org/drawingml/2006/main" xmlns:p="http://schemas.openxmlformats.org/presentationml/2006/main" xmlns:r="http://schemas.openxmlformats.org/officeDocument/2006/relationships">
+  <p:cSld>
+    <p:spTree>
+      <p:nvGrpSpPr>
+        <p:cNvPr id="1" name=""/>
+        <p:cNvGrpSpPr/>
+        <p:nvPr/>
+      </p:nvGrpSpPr>
+      <p:grpSpPr/>
+      <p:sp>
+        <p:nvSpPr>
+          <p:cNvPr id="2" name="TextBox 1"/>
+          <p:cNvSpPr txBox="1"/>
+          <p:nvPr/>
+        </p:nvSpPr>
+        <p:spPr>
+          <a:xfrm>
+            <a:off x="566928" y="365760"/>
+            <a:ext cx="11057839" cy="502920"/>
+          </a:xfrm>
+          <a:prstGeom prst="rect">
+            <a:avLst/>
+          </a:prstGeom>
+          <a:noFill/>
+        </p:spPr>
+        <p:txBody>
+          <a:bodyPr wrap="square" anchor="t" lIns="0" rIns="0" tIns="0" bIns="0">
+            <a:spAutoFit/>
+          </a:bodyPr>
+          <a:lstStyle/>
+          <a:p>
+            <a:pPr algn="l">
+              <a:lnSpc>
+                <a:spcPct val="100000"/>
+              </a:lnSpc>
+            </a:pPr>
+            <a:r>
+              <a:rPr sz="2200" b="1">
+                <a:solidFill>
+                  <a:srgbClr val="1A1A1A"/>
+                </a:solidFill>
+                <a:latin typeface="Arial"/>
+                <a:ea typeface="微软雅黑"/>
+                <a:cs typeface="Arial"/>
+              </a:rPr>
+              <a:t>机型口径：HQ 代码 / 客户代码 / 尺寸·品类（附 31 天实测）</a:t>
+            </a:r>
+          </a:p>
+        </p:txBody>
+      </p:sp>
+      <p:sp>
+        <p:nvSpPr>
+          <p:cNvPr id="3" name="TextBox 2"/>
+          <p:cNvSpPr txBox="1"/>
+          <p:nvPr/>
+        </p:nvSpPr>
+        <p:spPr>
+          <a:xfrm>
+            <a:off x="566928" y="877824"/>
+            <a:ext cx="11057839" cy="274320"/>
+          </a:xfrm>
+          <a:prstGeom prst="rect">
+            <a:avLst/>
+          </a:prstGeom>
+          <a:noFill/>
+        </p:spPr>
+        <p:txBody>
+          <a:bodyPr wrap="square" anchor="t" lIns="0" rIns="0" tIns="0" bIns="0">
+            <a:spAutoFit/>
+          </a:bodyPr>
+          <a:lstStyle/>
+          <a:p>
+            <a:pPr algn="l">
+              <a:lnSpc>
+                <a:spcPct val="100000"/>
+              </a:lnSpc>
+            </a:pPr>
+            <a:r>
+              <a:rPr sz="1100" b="0">
+                <a:solidFill>
+                  <a:srgbClr val="8C8C8C"/>
+                </a:solidFill>
+                <a:latin typeface="Arial"/>
+                <a:ea typeface="微软雅黑"/>
+                <a:cs typeface="Arial"/>
+              </a:rPr>
+              <a:t>客户口径取自事业部机型对照表；MES CongfigSize 可交叉验证（Prosexxx / Amaxxx / Julxxx 为脱敏写法）</a:t>
+            </a:r>
+          </a:p>
+        </p:txBody>
+      </p:sp>
+      <p:cxnSp>
+        <p:nvCxnSpPr>
+          <p:cNvPr id="4" name="Connector 3"/>
+          <p:cNvCxnSpPr/>
+          <p:nvPr/>
+        </p:nvCxnSpPr>
+        <p:spPr>
+          <a:xfrm>
+            <a:off x="566928" y="1207008"/>
+            <a:ext cx="11057839" cy="0"/>
+          </a:xfrm>
+          <a:prstGeom prst="line">
+            <a:avLst/>
+          </a:prstGeom>
+          <a:ln w="9525">
+            <a:solidFill>
+              <a:srgbClr val="D9D9D9"/>
+            </a:solidFill>
+          </a:ln>
+        </p:spPr>
+        <p:style>
+          <a:lnRef idx="2">
+            <a:schemeClr val="accent1"/>
+          </a:lnRef>
+          <a:fillRef idx="0">
+            <a:schemeClr val="accent1"/>
+          </a:fillRef>
+          <a:effectRef idx="1">
+            <a:schemeClr val="accent1"/>
+          </a:effectRef>
+          <a:fontRef idx="minor">
+            <a:schemeClr val="tx1"/>
+          </a:fontRef>
+        </p:style>
+      </p:cxnSp>
       <p:cxnSp>
         <p:nvCxnSpPr>
           <p:cNvPr id="7" name="Connector 6"/>
@@ -8094,6 +10109,80 @@
           </a:p>
         </p:txBody>
       </p:sp>
+      <p:sp>
+        <p:nvSpPr>
+          <p:cNvPr id="14" name="TextBox 13"/>
+          <p:cNvSpPr txBox="1"/>
+          <p:nvPr/>
+        </p:nvSpPr>
+        <p:spPr>
+          <a:xfrm>
+            <a:off x="566928" y="6419088"/>
+            <a:ext cx="7315200" cy="237744"/>
+          </a:xfrm>
+          <a:prstGeom prst="rect">
+            <a:avLst/>
+          </a:prstGeom>
+          <a:noFill/>
+        </p:spPr>
+        <p:txBody>
+          <a:bodyPr wrap="none" lIns="0" rIns="0" tIns="0" bIns="0">
+            <a:spAutoFit/>
+          </a:bodyPr>
+          <a:lstStyle/>
+          <a:p>
+            <a:pPr algn="l"/>
+            <a:r>
+              <a:rPr sz="800">
+                <a:solidFill>
+                  <a:srgbClr val="8C8C8C"/>
+                </a:solidFill>
+                <a:latin typeface="Arial"/>
+                <a:ea typeface="微软雅黑"/>
+                <a:cs typeface="Arial"/>
+              </a:rPr>
+              <a:t>RFID 读取能力评估 · 7H3AA-PALLET · 2026-10-22</a:t>
+            </a:r>
+          </a:p>
+        </p:txBody>
+      </p:sp>
+      <p:sp>
+        <p:nvSpPr>
+          <p:cNvPr id="15" name="TextBox 14"/>
+          <p:cNvSpPr txBox="1"/>
+          <p:nvPr/>
+        </p:nvSpPr>
+        <p:spPr>
+          <a:xfrm>
+            <a:off x="10893247" y="6419088"/>
+            <a:ext cx="731520" cy="237744"/>
+          </a:xfrm>
+          <a:prstGeom prst="rect">
+            <a:avLst/>
+          </a:prstGeom>
+          <a:noFill/>
+        </p:spPr>
+        <p:txBody>
+          <a:bodyPr wrap="none" lIns="0" rIns="0" tIns="0" bIns="0">
+            <a:spAutoFit/>
+          </a:bodyPr>
+          <a:lstStyle/>
+          <a:p>
+            <a:pPr algn="r"/>
+            <a:r>
+              <a:rPr sz="800">
+                <a:solidFill>
+                  <a:srgbClr val="8C8C8C"/>
+                </a:solidFill>
+                <a:latin typeface="Arial"/>
+                <a:ea typeface="微软雅黑"/>
+                <a:cs typeface="Arial"/>
+              </a:rPr>
+              <a:t>11 / 11</a:t>
+            </a:r>
+          </a:p>
+        </p:txBody>
+      </p:sp>
     </p:spTree>
   </p:cSld>
   <p:clrMapOvr>
@@ -8229,88 +10318,6 @@
           </a:fontRef>
         </p:style>
       </p:cxnSp>
-      <p:sp>
-        <p:nvSpPr>
-          <p:cNvPr id="5" name="TextBox 4"/>
-          <p:cNvSpPr txBox="1"/>
-          <p:nvPr/>
-        </p:nvSpPr>
-        <p:spPr>
-          <a:xfrm>
-            <a:off x="566928" y="6419088"/>
-            <a:ext cx="7315200" cy="237744"/>
-          </a:xfrm>
-          <a:prstGeom prst="rect">
-            <a:avLst/>
-          </a:prstGeom>
-          <a:noFill/>
-        </p:spPr>
-        <p:txBody>
-          <a:bodyPr wrap="square" anchor="t" lIns="0" rIns="0" tIns="0" bIns="0">
-            <a:spAutoFit/>
-          </a:bodyPr>
-          <a:lstStyle/>
-          <a:p>
-            <a:pPr algn="l">
-              <a:lnSpc>
-                <a:spcPct val="100000"/>
-              </a:lnSpc>
-            </a:pPr>
-            <a:r>
-              <a:rPr sz="800" b="0">
-                <a:solidFill>
-                  <a:srgbClr val="8C8C8C"/>
-                </a:solidFill>
-                <a:latin typeface="Arial"/>
-                <a:ea typeface="微软雅黑"/>
-                <a:cs typeface="Arial"/>
-              </a:rPr>
-              <a:t>RFID 读取能力评估 · 7H3AA-PALLET · 2026-10-22</a:t>
-            </a:r>
-          </a:p>
-        </p:txBody>
-      </p:sp>
-      <p:sp>
-        <p:nvSpPr>
-          <p:cNvPr id="6" name="TextBox 5"/>
-          <p:cNvSpPr txBox="1"/>
-          <p:nvPr/>
-        </p:nvSpPr>
-        <p:spPr>
-          <a:xfrm>
-            <a:off x="10893247" y="6419088"/>
-            <a:ext cx="731520" cy="237744"/>
-          </a:xfrm>
-          <a:prstGeom prst="rect">
-            <a:avLst/>
-          </a:prstGeom>
-          <a:noFill/>
-        </p:spPr>
-        <p:txBody>
-          <a:bodyPr wrap="square" anchor="t" lIns="0" rIns="0" tIns="0" bIns="0">
-            <a:spAutoFit/>
-          </a:bodyPr>
-          <a:lstStyle/>
-          <a:p>
-            <a:pPr algn="r">
-              <a:lnSpc>
-                <a:spcPct val="100000"/>
-              </a:lnSpc>
-            </a:pPr>
-            <a:r>
-              <a:rPr sz="800" b="0">
-                <a:solidFill>
-                  <a:srgbClr val="8C8C8C"/>
-                </a:solidFill>
-                <a:latin typeface="Arial"/>
-                <a:ea typeface="微软雅黑"/>
-                <a:cs typeface="Arial"/>
-              </a:rPr>
-              <a:t>2 / 10</a:t>
-            </a:r>
-          </a:p>
-        </p:txBody>
-      </p:sp>
       <p:cxnSp>
         <p:nvCxnSpPr>
           <p:cNvPr id="7" name="Connector 6"/>
@@ -9950,7 +11957,7 @@
                 <a:ea typeface="微软雅黑"/>
                 <a:cs typeface="Arial"/>
               </a:rPr>
-              <a:t>R1/R2 已确定；P9–P10 的现网基线是实测；R3–R6 仍是预测，须现场实测后才可对外</a:t>
+              <a:t>R1/R2 已确定；P9–P11 的现网基线是实测；R3–R6 仍是预测，须现场实测后才可对外</a:t>
             </a:r>
           </a:p>
         </p:txBody>
@@ -10060,6 +12067,80 @@
           </a:p>
         </p:txBody>
       </p:sp>
+      <p:sp>
+        <p:nvSpPr>
+          <p:cNvPr id="13" name="TextBox 12"/>
+          <p:cNvSpPr txBox="1"/>
+          <p:nvPr/>
+        </p:nvSpPr>
+        <p:spPr>
+          <a:xfrm>
+            <a:off x="566928" y="6419088"/>
+            <a:ext cx="7315200" cy="237744"/>
+          </a:xfrm>
+          <a:prstGeom prst="rect">
+            <a:avLst/>
+          </a:prstGeom>
+          <a:noFill/>
+        </p:spPr>
+        <p:txBody>
+          <a:bodyPr wrap="none" lIns="0" rIns="0" tIns="0" bIns="0">
+            <a:spAutoFit/>
+          </a:bodyPr>
+          <a:lstStyle/>
+          <a:p>
+            <a:pPr algn="l"/>
+            <a:r>
+              <a:rPr sz="800">
+                <a:solidFill>
+                  <a:srgbClr val="8C8C8C"/>
+                </a:solidFill>
+                <a:latin typeface="Arial"/>
+                <a:ea typeface="微软雅黑"/>
+                <a:cs typeface="Arial"/>
+              </a:rPr>
+              <a:t>RFID 读取能力评估 · 7H3AA-PALLET · 2026-10-22</a:t>
+            </a:r>
+          </a:p>
+        </p:txBody>
+      </p:sp>
+      <p:sp>
+        <p:nvSpPr>
+          <p:cNvPr id="14" name="TextBox 13"/>
+          <p:cNvSpPr txBox="1"/>
+          <p:nvPr/>
+        </p:nvSpPr>
+        <p:spPr>
+          <a:xfrm>
+            <a:off x="10893247" y="6419088"/>
+            <a:ext cx="731520" cy="237744"/>
+          </a:xfrm>
+          <a:prstGeom prst="rect">
+            <a:avLst/>
+          </a:prstGeom>
+          <a:noFill/>
+        </p:spPr>
+        <p:txBody>
+          <a:bodyPr wrap="none" lIns="0" rIns="0" tIns="0" bIns="0">
+            <a:spAutoFit/>
+          </a:bodyPr>
+          <a:lstStyle/>
+          <a:p>
+            <a:pPr algn="r"/>
+            <a:r>
+              <a:rPr sz="800">
+                <a:solidFill>
+                  <a:srgbClr val="8C8C8C"/>
+                </a:solidFill>
+                <a:latin typeface="Arial"/>
+                <a:ea typeface="微软雅黑"/>
+                <a:cs typeface="Arial"/>
+              </a:rPr>
+              <a:t>2 / 11</a:t>
+            </a:r>
+          </a:p>
+        </p:txBody>
+      </p:sp>
     </p:spTree>
   </p:cSld>
   <p:clrMapOvr>
@@ -10195,88 +12276,6 @@
           </a:fontRef>
         </p:style>
       </p:cxnSp>
-      <p:sp>
-        <p:nvSpPr>
-          <p:cNvPr id="5" name="TextBox 4"/>
-          <p:cNvSpPr txBox="1"/>
-          <p:nvPr/>
-        </p:nvSpPr>
-        <p:spPr>
-          <a:xfrm>
-            <a:off x="566928" y="6419088"/>
-            <a:ext cx="7315200" cy="237744"/>
-          </a:xfrm>
-          <a:prstGeom prst="rect">
-            <a:avLst/>
-          </a:prstGeom>
-          <a:noFill/>
-        </p:spPr>
-        <p:txBody>
-          <a:bodyPr wrap="square" anchor="t" lIns="0" rIns="0" tIns="0" bIns="0">
-            <a:spAutoFit/>
-          </a:bodyPr>
-          <a:lstStyle/>
-          <a:p>
-            <a:pPr algn="l">
-              <a:lnSpc>
-                <a:spcPct val="100000"/>
-              </a:lnSpc>
-            </a:pPr>
-            <a:r>
-              <a:rPr sz="800" b="0">
-                <a:solidFill>
-                  <a:srgbClr val="8C8C8C"/>
-                </a:solidFill>
-                <a:latin typeface="Arial"/>
-                <a:ea typeface="微软雅黑"/>
-                <a:cs typeface="Arial"/>
-              </a:rPr>
-              <a:t>RFID 读取能力评估 · 7H3AA-PALLET · 2026-10-22</a:t>
-            </a:r>
-          </a:p>
-        </p:txBody>
-      </p:sp>
-      <p:sp>
-        <p:nvSpPr>
-          <p:cNvPr id="6" name="TextBox 5"/>
-          <p:cNvSpPr txBox="1"/>
-          <p:nvPr/>
-        </p:nvSpPr>
-        <p:spPr>
-          <a:xfrm>
-            <a:off x="10893247" y="6419088"/>
-            <a:ext cx="731520" cy="237744"/>
-          </a:xfrm>
-          <a:prstGeom prst="rect">
-            <a:avLst/>
-          </a:prstGeom>
-          <a:noFill/>
-        </p:spPr>
-        <p:txBody>
-          <a:bodyPr wrap="square" anchor="t" lIns="0" rIns="0" tIns="0" bIns="0">
-            <a:spAutoFit/>
-          </a:bodyPr>
-          <a:lstStyle/>
-          <a:p>
-            <a:pPr algn="r">
-              <a:lnSpc>
-                <a:spcPct val="100000"/>
-              </a:lnSpc>
-            </a:pPr>
-            <a:r>
-              <a:rPr sz="800" b="0">
-                <a:solidFill>
-                  <a:srgbClr val="8C8C8C"/>
-                </a:solidFill>
-                <a:latin typeface="Arial"/>
-                <a:ea typeface="微软雅黑"/>
-                <a:cs typeface="Arial"/>
-              </a:rPr>
-              <a:t>3 / 10</a:t>
-            </a:r>
-          </a:p>
-        </p:txBody>
-      </p:sp>
       <p:cxnSp>
         <p:nvCxnSpPr>
           <p:cNvPr id="7" name="Connector 6"/>
@@ -11694,6 +13693,80 @@
           </a:p>
         </p:txBody>
       </p:sp>
+      <p:sp>
+        <p:nvSpPr>
+          <p:cNvPr id="14" name="TextBox 13"/>
+          <p:cNvSpPr txBox="1"/>
+          <p:nvPr/>
+        </p:nvSpPr>
+        <p:spPr>
+          <a:xfrm>
+            <a:off x="566928" y="6419088"/>
+            <a:ext cx="7315200" cy="237744"/>
+          </a:xfrm>
+          <a:prstGeom prst="rect">
+            <a:avLst/>
+          </a:prstGeom>
+          <a:noFill/>
+        </p:spPr>
+        <p:txBody>
+          <a:bodyPr wrap="none" lIns="0" rIns="0" tIns="0" bIns="0">
+            <a:spAutoFit/>
+          </a:bodyPr>
+          <a:lstStyle/>
+          <a:p>
+            <a:pPr algn="l"/>
+            <a:r>
+              <a:rPr sz="800">
+                <a:solidFill>
+                  <a:srgbClr val="8C8C8C"/>
+                </a:solidFill>
+                <a:latin typeface="Arial"/>
+                <a:ea typeface="微软雅黑"/>
+                <a:cs typeface="Arial"/>
+              </a:rPr>
+              <a:t>RFID 读取能力评估 · 7H3AA-PALLET · 2026-10-22</a:t>
+            </a:r>
+          </a:p>
+        </p:txBody>
+      </p:sp>
+      <p:sp>
+        <p:nvSpPr>
+          <p:cNvPr id="15" name="TextBox 14"/>
+          <p:cNvSpPr txBox="1"/>
+          <p:nvPr/>
+        </p:nvSpPr>
+        <p:spPr>
+          <a:xfrm>
+            <a:off x="10893247" y="6419088"/>
+            <a:ext cx="731520" cy="237744"/>
+          </a:xfrm>
+          <a:prstGeom prst="rect">
+            <a:avLst/>
+          </a:prstGeom>
+          <a:noFill/>
+        </p:spPr>
+        <p:txBody>
+          <a:bodyPr wrap="none" lIns="0" rIns="0" tIns="0" bIns="0">
+            <a:spAutoFit/>
+          </a:bodyPr>
+          <a:lstStyle/>
+          <a:p>
+            <a:pPr algn="r"/>
+            <a:r>
+              <a:rPr sz="800">
+                <a:solidFill>
+                  <a:srgbClr val="8C8C8C"/>
+                </a:solidFill>
+                <a:latin typeface="Arial"/>
+                <a:ea typeface="微软雅黑"/>
+                <a:cs typeface="Arial"/>
+              </a:rPr>
+              <a:t>3 / 11</a:t>
+            </a:r>
+          </a:p>
+        </p:txBody>
+      </p:sp>
     </p:spTree>
   </p:cSld>
   <p:clrMapOvr>
@@ -11829,88 +13902,6 @@
           </a:fontRef>
         </p:style>
       </p:cxnSp>
-      <p:sp>
-        <p:nvSpPr>
-          <p:cNvPr id="5" name="TextBox 4"/>
-          <p:cNvSpPr txBox="1"/>
-          <p:nvPr/>
-        </p:nvSpPr>
-        <p:spPr>
-          <a:xfrm>
-            <a:off x="566928" y="6419088"/>
-            <a:ext cx="7315200" cy="237744"/>
-          </a:xfrm>
-          <a:prstGeom prst="rect">
-            <a:avLst/>
-          </a:prstGeom>
-          <a:noFill/>
-        </p:spPr>
-        <p:txBody>
-          <a:bodyPr wrap="square" anchor="t" lIns="0" rIns="0" tIns="0" bIns="0">
-            <a:spAutoFit/>
-          </a:bodyPr>
-          <a:lstStyle/>
-          <a:p>
-            <a:pPr algn="l">
-              <a:lnSpc>
-                <a:spcPct val="100000"/>
-              </a:lnSpc>
-            </a:pPr>
-            <a:r>
-              <a:rPr sz="800" b="0">
-                <a:solidFill>
-                  <a:srgbClr val="8C8C8C"/>
-                </a:solidFill>
-                <a:latin typeface="Arial"/>
-                <a:ea typeface="微软雅黑"/>
-                <a:cs typeface="Arial"/>
-              </a:rPr>
-              <a:t>RFID 读取能力评估 · 7H3AA-PALLET · 2026-10-22</a:t>
-            </a:r>
-          </a:p>
-        </p:txBody>
-      </p:sp>
-      <p:sp>
-        <p:nvSpPr>
-          <p:cNvPr id="6" name="TextBox 5"/>
-          <p:cNvSpPr txBox="1"/>
-          <p:nvPr/>
-        </p:nvSpPr>
-        <p:spPr>
-          <a:xfrm>
-            <a:off x="10893247" y="6419088"/>
-            <a:ext cx="731520" cy="237744"/>
-          </a:xfrm>
-          <a:prstGeom prst="rect">
-            <a:avLst/>
-          </a:prstGeom>
-          <a:noFill/>
-        </p:spPr>
-        <p:txBody>
-          <a:bodyPr wrap="square" anchor="t" lIns="0" rIns="0" tIns="0" bIns="0">
-            <a:spAutoFit/>
-          </a:bodyPr>
-          <a:lstStyle/>
-          <a:p>
-            <a:pPr algn="r">
-              <a:lnSpc>
-                <a:spcPct val="100000"/>
-              </a:lnSpc>
-            </a:pPr>
-            <a:r>
-              <a:rPr sz="800" b="0">
-                <a:solidFill>
-                  <a:srgbClr val="8C8C8C"/>
-                </a:solidFill>
-                <a:latin typeface="Arial"/>
-                <a:ea typeface="微软雅黑"/>
-                <a:cs typeface="Arial"/>
-              </a:rPr>
-              <a:t>4 / 10</a:t>
-            </a:r>
-          </a:p>
-        </p:txBody>
-      </p:sp>
       <p:cxnSp>
         <p:nvCxnSpPr>
           <p:cNvPr id="7" name="Connector 6"/>
@@ -14467,6 +16458,80 @@
           </a:p>
         </p:txBody>
       </p:sp>
+      <p:sp>
+        <p:nvSpPr>
+          <p:cNvPr id="28" name="TextBox 27"/>
+          <p:cNvSpPr txBox="1"/>
+          <p:nvPr/>
+        </p:nvSpPr>
+        <p:spPr>
+          <a:xfrm>
+            <a:off x="566928" y="6419088"/>
+            <a:ext cx="7315200" cy="237744"/>
+          </a:xfrm>
+          <a:prstGeom prst="rect">
+            <a:avLst/>
+          </a:prstGeom>
+          <a:noFill/>
+        </p:spPr>
+        <p:txBody>
+          <a:bodyPr wrap="none" lIns="0" rIns="0" tIns="0" bIns="0">
+            <a:spAutoFit/>
+          </a:bodyPr>
+          <a:lstStyle/>
+          <a:p>
+            <a:pPr algn="l"/>
+            <a:r>
+              <a:rPr sz="800">
+                <a:solidFill>
+                  <a:srgbClr val="8C8C8C"/>
+                </a:solidFill>
+                <a:latin typeface="Arial"/>
+                <a:ea typeface="微软雅黑"/>
+                <a:cs typeface="Arial"/>
+              </a:rPr>
+              <a:t>RFID 读取能力评估 · 7H3AA-PALLET · 2026-10-22</a:t>
+            </a:r>
+          </a:p>
+        </p:txBody>
+      </p:sp>
+      <p:sp>
+        <p:nvSpPr>
+          <p:cNvPr id="29" name="TextBox 28"/>
+          <p:cNvSpPr txBox="1"/>
+          <p:nvPr/>
+        </p:nvSpPr>
+        <p:spPr>
+          <a:xfrm>
+            <a:off x="10893247" y="6419088"/>
+            <a:ext cx="731520" cy="237744"/>
+          </a:xfrm>
+          <a:prstGeom prst="rect">
+            <a:avLst/>
+          </a:prstGeom>
+          <a:noFill/>
+        </p:spPr>
+        <p:txBody>
+          <a:bodyPr wrap="none" lIns="0" rIns="0" tIns="0" bIns="0">
+            <a:spAutoFit/>
+          </a:bodyPr>
+          <a:lstStyle/>
+          <a:p>
+            <a:pPr algn="r"/>
+            <a:r>
+              <a:rPr sz="800">
+                <a:solidFill>
+                  <a:srgbClr val="8C8C8C"/>
+                </a:solidFill>
+                <a:latin typeface="Arial"/>
+                <a:ea typeface="微软雅黑"/>
+                <a:cs typeface="Arial"/>
+              </a:rPr>
+              <a:t>4 / 11</a:t>
+            </a:r>
+          </a:p>
+        </p:txBody>
+      </p:sp>
     </p:spTree>
   </p:cSld>
   <p:clrMapOvr>
@@ -14521,48 +16586,7 @@
                 <a:ea typeface="微软雅黑"/>
                 <a:cs typeface="Arial"/>
               </a:rPr>
-              <a:t>R3：距离对读取的影响（同一读码器 9 dBi）</a:t>
-            </a:r>
-          </a:p>
-        </p:txBody>
-      </p:sp>
-      <p:sp>
-        <p:nvSpPr>
-          <p:cNvPr id="3" name="TextBox 2"/>
-          <p:cNvSpPr txBox="1"/>
-          <p:nvPr/>
-        </p:nvSpPr>
-        <p:spPr>
-          <a:xfrm>
-            <a:off x="566928" y="877824"/>
-            <a:ext cx="11057839" cy="274320"/>
-          </a:xfrm>
-          <a:prstGeom prst="rect">
-            <a:avLst/>
-          </a:prstGeom>
-          <a:noFill/>
-        </p:spPr>
-        <p:txBody>
-          <a:bodyPr wrap="square" anchor="t" lIns="0" rIns="0" tIns="0" bIns="0">
-            <a:spAutoFit/>
-          </a:bodyPr>
-          <a:lstStyle/>
-          <a:p>
-            <a:pPr algn="l">
-              <a:lnSpc>
-                <a:spcPct val="100000"/>
-              </a:lnSpc>
-            </a:pPr>
-            <a:r>
-              <a:rPr sz="1100" b="0">
-                <a:solidFill>
-                  <a:srgbClr val="8C8C8C"/>
-                </a:solidFill>
-                <a:latin typeface="Arial"/>
-                <a:ea typeface="微软雅黑"/>
-                <a:cs typeface="Arial"/>
-              </a:rPr>
-              <a:t>上/下/侧三种安装方向 × 0–50 cm 六档；箱型固定 7907-P（AX7907 · 6″ · 塑料）</a:t>
+              <a:t>R3：读到几个与距离没有相关性</a:t>
             </a:r>
           </a:p>
         </p:txBody>
@@ -14602,88 +16626,6 @@
           </a:fontRef>
         </p:style>
       </p:cxnSp>
-      <p:sp>
-        <p:nvSpPr>
-          <p:cNvPr id="5" name="TextBox 4"/>
-          <p:cNvSpPr txBox="1"/>
-          <p:nvPr/>
-        </p:nvSpPr>
-        <p:spPr>
-          <a:xfrm>
-            <a:off x="566928" y="6419088"/>
-            <a:ext cx="7315200" cy="237744"/>
-          </a:xfrm>
-          <a:prstGeom prst="rect">
-            <a:avLst/>
-          </a:prstGeom>
-          <a:noFill/>
-        </p:spPr>
-        <p:txBody>
-          <a:bodyPr wrap="square" anchor="t" lIns="0" rIns="0" tIns="0" bIns="0">
-            <a:spAutoFit/>
-          </a:bodyPr>
-          <a:lstStyle/>
-          <a:p>
-            <a:pPr algn="l">
-              <a:lnSpc>
-                <a:spcPct val="100000"/>
-              </a:lnSpc>
-            </a:pPr>
-            <a:r>
-              <a:rPr sz="800" b="0">
-                <a:solidFill>
-                  <a:srgbClr val="8C8C8C"/>
-                </a:solidFill>
-                <a:latin typeface="Arial"/>
-                <a:ea typeface="微软雅黑"/>
-                <a:cs typeface="Arial"/>
-              </a:rPr>
-              <a:t>RFID 读取能力评估 · 7H3AA-PALLET · 2026-10-22</a:t>
-            </a:r>
-          </a:p>
-        </p:txBody>
-      </p:sp>
-      <p:sp>
-        <p:nvSpPr>
-          <p:cNvPr id="6" name="TextBox 5"/>
-          <p:cNvSpPr txBox="1"/>
-          <p:nvPr/>
-        </p:nvSpPr>
-        <p:spPr>
-          <a:xfrm>
-            <a:off x="10893247" y="6419088"/>
-            <a:ext cx="731520" cy="237744"/>
-          </a:xfrm>
-          <a:prstGeom prst="rect">
-            <a:avLst/>
-          </a:prstGeom>
-          <a:noFill/>
-        </p:spPr>
-        <p:txBody>
-          <a:bodyPr wrap="square" anchor="t" lIns="0" rIns="0" tIns="0" bIns="0">
-            <a:spAutoFit/>
-          </a:bodyPr>
-          <a:lstStyle/>
-          <a:p>
-            <a:pPr algn="r">
-              <a:lnSpc>
-                <a:spcPct val="100000"/>
-              </a:lnSpc>
-            </a:pPr>
-            <a:r>
-              <a:rPr sz="800" b="0">
-                <a:solidFill>
-                  <a:srgbClr val="8C8C8C"/>
-                </a:solidFill>
-                <a:latin typeface="Arial"/>
-                <a:ea typeface="微软雅黑"/>
-                <a:cs typeface="Arial"/>
-              </a:rPr>
-              <a:t>5 / 10</a:t>
-            </a:r>
-          </a:p>
-        </p:txBody>
-      </p:sp>
       <p:cxnSp>
         <p:nvCxnSpPr>
           <p:cNvPr id="7" name="Connector 6"/>
@@ -14719,64 +16661,16 @@
           </a:fontRef>
         </p:style>
       </p:cxnSp>
-      <p:pic>
-        <p:nvPicPr>
-          <p:cNvPr id="8" name="Picture 7" descr="fig5_3d_distance.png"/>
-          <p:cNvPicPr>
-            <a:picLocks noChangeAspect="1"/>
-          </p:cNvPicPr>
-          <p:nvPr/>
-        </p:nvPicPr>
-        <p:blipFill>
-          <a:blip r:embed="rId2"/>
-          <a:stretch>
-            <a:fillRect/>
-          </a:stretch>
-        </p:blipFill>
-        <p:spPr>
-          <a:xfrm>
-            <a:off x="566928" y="1298448"/>
-            <a:ext cx="5806440" cy="2083522"/>
-          </a:xfrm>
-          <a:prstGeom prst="rect">
-            <a:avLst/>
-          </a:prstGeom>
-        </p:spPr>
-      </p:pic>
-      <p:pic>
-        <p:nvPicPr>
-          <p:cNvPr id="9" name="Picture 8" descr="fig7_distance_curve.png"/>
-          <p:cNvPicPr>
-            <a:picLocks noChangeAspect="1"/>
-          </p:cNvPicPr>
-          <p:nvPr/>
-        </p:nvPicPr>
-        <p:blipFill>
-          <a:blip r:embed="rId3"/>
-          <a:stretch>
-            <a:fillRect/>
-          </a:stretch>
-        </p:blipFill>
-        <p:spPr>
-          <a:xfrm>
-            <a:off x="6629400" y="1280160"/>
-            <a:ext cx="4992624" cy="2357628"/>
-          </a:xfrm>
-          <a:prstGeom prst="rect">
-            <a:avLst/>
-          </a:prstGeom>
-        </p:spPr>
-      </p:pic>
       <p:sp>
         <p:nvSpPr>
-          <p:cNvPr id="10" name="TextBox 9"/>
+          <p:cNvPr id="8" name="S6_sub"/>
           <p:cNvSpPr txBox="1"/>
           <p:nvPr/>
         </p:nvSpPr>
         <p:spPr>
           <a:xfrm>
-            <a:off x="566928" y="3584448"/>
-            <a:ext cx="5760720" cy="237744"/>
+            <a:off x="566928" y="877824"/>
+            <a:ext cx="11057839" cy="274320"/>
           </a:xfrm>
           <a:prstGeom prst="rect">
             <a:avLst/>
@@ -14795,7 +16689,130 @@
               </a:lnSpc>
             </a:pPr>
             <a:r>
-              <a:rPr sz="1000" b="1">
+              <a:rPr sz="1019" b="0">
+                <a:solidFill>
+                  <a:srgbClr val="8C8C8C"/>
+                </a:solidFill>
+                <a:latin typeface="Arial"/>
+                <a:ea typeface="微软雅黑"/>
+                <a:cs typeface="Arial"/>
+              </a:rPr>
+              <a:t>手册/自由空间模型没错（10 cm 理论上仍读全 6 个）；但现场三面天线 &lt;5 cm 实测 0.08/6、10-19 中箱接触式最多 2/6 —— 距离 0→20 cm 读数都在 0–2，读不到不是距离/衰减造成的</a:t>
+            </a:r>
+          </a:p>
+        </p:txBody>
+      </p:sp>
+      <p:sp>
+        <p:nvSpPr>
+          <p:cNvPr id="9" name="S6_stat0_8"/>
+          <p:cNvSpPr txBox="1"/>
+          <p:nvPr/>
+        </p:nvSpPr>
+        <p:spPr>
+          <a:xfrm>
+            <a:off x="566928" y="1280160"/>
+            <a:ext cx="3017520" cy="402336"/>
+          </a:xfrm>
+          <a:prstGeom prst="rect">
+            <a:avLst/>
+          </a:prstGeom>
+          <a:noFill/>
+        </p:spPr>
+        <p:txBody>
+          <a:bodyPr wrap="square" anchor="t" lIns="0" rIns="0" tIns="0" bIns="0">
+            <a:spAutoFit/>
+          </a:bodyPr>
+          <a:lstStyle/>
+          <a:p>
+            <a:pPr algn="l">
+              <a:lnSpc>
+                <a:spcPct val="100000"/>
+              </a:lnSpc>
+            </a:pPr>
+            <a:r>
+              <a:rPr sz="2200" b="1">
+                <a:solidFill>
+                  <a:srgbClr val="8C8C8C"/>
+                </a:solidFill>
+                <a:latin typeface="Arial"/>
+                <a:ea typeface="微软雅黑"/>
+                <a:cs typeface="Arial"/>
+              </a:rPr>
+              <a:t>6.00 / 6</a:t>
+            </a:r>
+          </a:p>
+        </p:txBody>
+      </p:sp>
+      <p:sp>
+        <p:nvSpPr>
+          <p:cNvPr id="10" name="S6_stat0_9"/>
+          <p:cNvSpPr txBox="1"/>
+          <p:nvPr/>
+        </p:nvSpPr>
+        <p:spPr>
+          <a:xfrm>
+            <a:off x="566928" y="1645919"/>
+            <a:ext cx="3017520" cy="201168"/>
+          </a:xfrm>
+          <a:prstGeom prst="rect">
+            <a:avLst/>
+          </a:prstGeom>
+          <a:noFill/>
+        </p:spPr>
+        <p:txBody>
+          <a:bodyPr wrap="square" anchor="t" lIns="0" rIns="0" tIns="0" bIns="0">
+            <a:spAutoFit/>
+          </a:bodyPr>
+          <a:lstStyle/>
+          <a:p>
+            <a:pPr algn="l">
+              <a:lnSpc>
+                <a:spcPct val="100000"/>
+              </a:lnSpc>
+            </a:pPr>
+            <a:r>
+              <a:rPr sz="880" b="0">
+                <a:solidFill>
+                  <a:srgbClr val="8C8C8C"/>
+                </a:solidFill>
+                <a:latin typeface="Arial"/>
+                <a:ea typeface="微软雅黑"/>
+                <a:cs typeface="Arial"/>
+              </a:rPr>
+              <a:t>理论（下置 9 dBi）：0–10 cm 应读全</a:t>
+            </a:r>
+          </a:p>
+        </p:txBody>
+      </p:sp>
+      <p:sp>
+        <p:nvSpPr>
+          <p:cNvPr id="11" name="S6_stat0_0"/>
+          <p:cNvSpPr txBox="1"/>
+          <p:nvPr/>
+        </p:nvSpPr>
+        <p:spPr>
+          <a:xfrm>
+            <a:off x="566928" y="1847088"/>
+            <a:ext cx="3017520" cy="475488"/>
+          </a:xfrm>
+          <a:prstGeom prst="rect">
+            <a:avLst/>
+          </a:prstGeom>
+          <a:noFill/>
+        </p:spPr>
+        <p:txBody>
+          <a:bodyPr wrap="square" anchor="t" lIns="0" rIns="0" tIns="0" bIns="0">
+            <a:spAutoFit/>
+          </a:bodyPr>
+          <a:lstStyle/>
+          <a:p>
+            <a:pPr algn="l">
+              <a:lnSpc>
+                <a:spcPct val="115000"/>
+              </a:lnSpc>
+            </a:pPr>
+            <a:r>
+              <a:rPr sz="919" b="0">
                 <a:solidFill>
                   <a:srgbClr val="1A1A1A"/>
                 </a:solidFill>
@@ -14803,49 +16820,210 @@
                 <a:ea typeface="微软雅黑"/>
                 <a:cs typeface="Arial"/>
               </a:rPr>
-              <a:t>下置六档（产线方向）预测值</a:t>
+              <a:t>按手册参数，近距本来就该读得到</a:t>
+            </a:r>
+          </a:p>
+        </p:txBody>
+      </p:sp>
+      <p:sp>
+        <p:nvSpPr>
+          <p:cNvPr id="12" name="S6_stat1_1"/>
+          <p:cNvSpPr txBox="1"/>
+          <p:nvPr/>
+        </p:nvSpPr>
+        <p:spPr>
+          <a:xfrm>
+            <a:off x="3566160" y="1280160"/>
+            <a:ext cx="2743200" cy="402336"/>
+          </a:xfrm>
+          <a:prstGeom prst="rect">
+            <a:avLst/>
+          </a:prstGeom>
+          <a:noFill/>
+        </p:spPr>
+        <p:txBody>
+          <a:bodyPr wrap="square" anchor="t" lIns="0" rIns="0" tIns="0" bIns="0">
+            <a:spAutoFit/>
+          </a:bodyPr>
+          <a:lstStyle/>
+          <a:p>
+            <a:pPr algn="l">
+              <a:lnSpc>
+                <a:spcPct val="100000"/>
+              </a:lnSpc>
+            </a:pPr>
+            <a:r>
+              <a:rPr sz="2200" b="1">
+                <a:solidFill>
+                  <a:srgbClr val="C0504D"/>
+                </a:solidFill>
+                <a:latin typeface="Arial"/>
+                <a:ea typeface="微软雅黑"/>
+                <a:cs typeface="Arial"/>
+              </a:rPr>
+              <a:t>0.08 / 6</a:t>
+            </a:r>
+          </a:p>
+        </p:txBody>
+      </p:sp>
+      <p:sp>
+        <p:nvSpPr>
+          <p:cNvPr id="13" name="S6_stat1_2"/>
+          <p:cNvSpPr txBox="1"/>
+          <p:nvPr/>
+        </p:nvSpPr>
+        <p:spPr>
+          <a:xfrm>
+            <a:off x="3566160" y="1645919"/>
+            <a:ext cx="2743200" cy="201168"/>
+          </a:xfrm>
+          <a:prstGeom prst="rect">
+            <a:avLst/>
+          </a:prstGeom>
+          <a:noFill/>
+        </p:spPr>
+        <p:txBody>
+          <a:bodyPr wrap="square" anchor="t" lIns="0" rIns="0" tIns="0" bIns="0">
+            <a:spAutoFit/>
+          </a:bodyPr>
+          <a:lstStyle/>
+          <a:p>
+            <a:pPr algn="l">
+              <a:lnSpc>
+                <a:spcPct val="100000"/>
+              </a:lnSpc>
+            </a:pPr>
+            <a:r>
+              <a:rPr sz="880" b="0">
+                <a:solidFill>
+                  <a:srgbClr val="8C8C8C"/>
+                </a:solidFill>
+                <a:latin typeface="Arial"/>
+                <a:ea typeface="微软雅黑"/>
+                <a:cs typeface="Arial"/>
+              </a:rPr>
+              <a:t>实测（产线 3 天线 &lt;5 cm，31 天 113,667 箱）</a:t>
+            </a:r>
+          </a:p>
+        </p:txBody>
+      </p:sp>
+      <p:sp>
+        <p:nvSpPr>
+          <p:cNvPr id="14" name="S6_stat1_3"/>
+          <p:cNvSpPr txBox="1"/>
+          <p:nvPr/>
+        </p:nvSpPr>
+        <p:spPr>
+          <a:xfrm>
+            <a:off x="3566160" y="1847088"/>
+            <a:ext cx="2743200" cy="475488"/>
+          </a:xfrm>
+          <a:prstGeom prst="rect">
+            <a:avLst/>
+          </a:prstGeom>
+          <a:noFill/>
+        </p:spPr>
+        <p:txBody>
+          <a:bodyPr wrap="square" anchor="t" lIns="0" rIns="0" tIns="0" bIns="0">
+            <a:spAutoFit/>
+          </a:bodyPr>
+          <a:lstStyle/>
+          <a:p>
+            <a:pPr algn="l">
+              <a:lnSpc>
+                <a:spcPct val="115000"/>
+              </a:lnSpc>
+            </a:pPr>
+            <a:r>
+              <a:rPr sz="919" b="0">
+                <a:solidFill>
+                  <a:srgbClr val="1A1A1A"/>
+                </a:solidFill>
+                <a:latin typeface="Arial"/>
+                <a:ea typeface="微软雅黑"/>
+                <a:cs typeface="Arial"/>
+              </a:rPr>
+              <a:t>95.0% 一箱读到 0 个；10-19 中箱接触式也只有 0–2</a:t>
+            </a:r>
+          </a:p>
+        </p:txBody>
+      </p:sp>
+      <p:sp>
+        <p:nvSpPr>
+          <p:cNvPr id="15" name="S6_cap"/>
+          <p:cNvSpPr txBox="1"/>
+          <p:nvPr/>
+        </p:nvSpPr>
+        <p:spPr>
+          <a:xfrm>
+            <a:off x="566928" y="2542032"/>
+            <a:ext cx="5943600" cy="219456"/>
+          </a:xfrm>
+          <a:prstGeom prst="rect">
+            <a:avLst/>
+          </a:prstGeom>
+          <a:noFill/>
+        </p:spPr>
+        <p:txBody>
+          <a:bodyPr wrap="square" anchor="t" lIns="0" rIns="0" tIns="0" bIns="0">
+            <a:spAutoFit/>
+          </a:bodyPr>
+          <a:lstStyle/>
+          <a:p>
+            <a:pPr algn="l">
+              <a:lnSpc>
+                <a:spcPct val="100000"/>
+              </a:lnSpc>
+            </a:pPr>
+            <a:r>
+              <a:rPr sz="950" b="1">
+                <a:solidFill>
+                  <a:srgbClr val="3E5DA8"/>
+                </a:solidFill>
+                <a:latin typeface="Arial"/>
+                <a:ea typeface="微软雅黑"/>
+                <a:cs typeface="Arial"/>
+              </a:rPr>
+              <a:t>同一台读码器：理论该读到多少 vs 实际读到多少</a:t>
             </a:r>
           </a:p>
         </p:txBody>
       </p:sp>
       <p:graphicFrame>
         <p:nvGraphicFramePr>
-          <p:cNvPr id="11" name="Table 10"/>
+          <p:cNvPr id="16" name="S6_table"/>
           <p:cNvGraphicFramePr>
             <a:graphicFrameLocks noGrp="1"/>
           </p:cNvGraphicFramePr>
           <p:nvPr/>
         </p:nvGraphicFramePr>
         <p:xfrm>
-          <a:off x="566928" y="3858768"/>
-          <a:ext cx="5760716" cy="987552"/>
+          <a:off x="566928" y="2798064"/>
+          <a:ext cx="5943600" cy="2112264"/>
         </p:xfrm>
         <a:graphic>
           <a:graphicData uri="http://schemas.openxmlformats.org/drawingml/2006/table">
             <a:tbl>
               <a:tblPr/>
               <a:tblGrid>
-                <a:gridCol w="1002656"/>
-                <a:gridCol w="793010"/>
-                <a:gridCol w="793010"/>
-                <a:gridCol w="793010"/>
-                <a:gridCol w="793010"/>
-                <a:gridCol w="793010"/>
-                <a:gridCol w="793010"/>
+                <a:gridCol w="1234440"/>
+                <a:gridCol w="1645920"/>
+                <a:gridCol w="1828800"/>
+                <a:gridCol w="1234440"/>
               </a:tblGrid>
-              <a:tr h="329184">
+              <a:tr h="301752">
                 <a:tc>
                   <a:txBody>
                     <a:bodyPr/>
                     <a:lstStyle/>
                     <a:p>
-                      <a:pPr algn="l">
+                      <a:pPr algn="ctr">
                         <a:lnSpc>
                           <a:spcPct val="100000"/>
                         </a:lnSpc>
                       </a:pPr>
                       <a:r>
-                        <a:rPr sz="850" b="1">
+                        <a:rPr sz="830" b="1">
                           <a:solidFill>
                             <a:srgbClr val="1A1A1A"/>
                           </a:solidFill>
@@ -14857,7 +17035,7 @@
                       </a:r>
                     </a:p>
                   </a:txBody>
-                  <a:tcPr marL="50292" marR="50292" marT="13716" marB="13716" anchor="ctr">
+                  <a:tcPr marL="45720" marR="45720" marT="9144" marB="9144" anchor="ctr">
                     <a:lnL w="9525" cap="flat" cmpd="sng" algn="ctr">
                       <a:solidFill>
                         <a:srgbClr val="D9D9D9"/>
@@ -14898,7 +17076,7 @@
                         </a:lnSpc>
                       </a:pPr>
                       <a:r>
-                        <a:rPr sz="850" b="1">
+                        <a:rPr sz="830" b="1">
                           <a:solidFill>
                             <a:srgbClr val="1A1A1A"/>
                           </a:solidFill>
@@ -14906,11 +17084,11 @@
                           <a:ea typeface="微软雅黑"/>
                           <a:cs typeface="Arial"/>
                         </a:rPr>
-                        <a:t>0</a:t>
+                        <a:t>理论 读全 /6</a:t>
                       </a:r>
                     </a:p>
                   </a:txBody>
-                  <a:tcPr marL="50292" marR="50292" marT="13716" marB="13716" anchor="ctr">
+                  <a:tcPr marL="45720" marR="45720" marT="9144" marB="9144" anchor="ctr">
                     <a:lnL w="9525" cap="flat" cmpd="sng" algn="ctr">
                       <a:solidFill>
                         <a:srgbClr val="D9D9D9"/>
@@ -14951,7 +17129,7 @@
                         </a:lnSpc>
                       </a:pPr>
                       <a:r>
-                        <a:rPr sz="850" b="1">
+                        <a:rPr sz="830" b="1">
                           <a:solidFill>
                             <a:srgbClr val="1A1A1A"/>
                           </a:solidFill>
@@ -14959,11 +17137,11 @@
                           <a:ea typeface="微软雅黑"/>
                           <a:cs typeface="Arial"/>
                         </a:rPr>
-                        <a:t>5</a:t>
+                        <a:t>实测 读全 /6</a:t>
                       </a:r>
                     </a:p>
                   </a:txBody>
-                  <a:tcPr marL="50292" marR="50292" marT="13716" marB="13716" anchor="ctr">
+                  <a:tcPr marL="45720" marR="45720" marT="9144" marB="9144" anchor="ctr">
                     <a:lnL w="9525" cap="flat" cmpd="sng" algn="ctr">
                       <a:solidFill>
                         <a:srgbClr val="D9D9D9"/>
@@ -15004,7 +17182,7 @@
                         </a:lnSpc>
                       </a:pPr>
                       <a:r>
-                        <a:rPr sz="850" b="1">
+                        <a:rPr sz="830" b="1">
                           <a:solidFill>
                             <a:srgbClr val="1A1A1A"/>
                           </a:solidFill>
@@ -15012,11 +17190,11 @@
                           <a:ea typeface="微软雅黑"/>
                           <a:cs typeface="Arial"/>
                         </a:rPr>
-                        <a:t>10</a:t>
+                        <a:t>差值</a:t>
                       </a:r>
                     </a:p>
                   </a:txBody>
-                  <a:tcPr marL="50292" marR="50292" marT="13716" marB="13716" anchor="ctr">
+                  <a:tcPr marL="45720" marR="45720" marT="9144" marB="9144" anchor="ctr">
                     <a:lnL w="9525" cap="flat" cmpd="sng" algn="ctr">
                       <a:solidFill>
                         <a:srgbClr val="D9D9D9"/>
@@ -15043,6 +17221,61 @@
                     </a:lnB>
                     <a:solidFill>
                       <a:srgbClr val="F2F2F2"/>
+                    </a:solidFill>
+                  </a:tcPr>
+                </a:tc>
+              </a:tr>
+              <a:tr h="301752">
+                <a:tc>
+                  <a:txBody>
+                    <a:bodyPr/>
+                    <a:lstStyle/>
+                    <a:p>
+                      <a:pPr algn="ctr">
+                        <a:lnSpc>
+                          <a:spcPct val="100000"/>
+                        </a:lnSpc>
+                      </a:pPr>
+                      <a:r>
+                        <a:rPr sz="860" b="1">
+                          <a:solidFill>
+                            <a:srgbClr val="1A1A1A"/>
+                          </a:solidFill>
+                          <a:latin typeface="Arial"/>
+                          <a:ea typeface="微软雅黑"/>
+                          <a:cs typeface="Arial"/>
+                        </a:rPr>
+                        <a:t>接触式（10-19 中箱）</a:t>
+                      </a:r>
+                    </a:p>
+                  </a:txBody>
+                  <a:tcPr marL="45720" marR="45720" marT="9144" marB="9144" anchor="ctr">
+                    <a:lnL w="9525" cap="flat" cmpd="sng" algn="ctr">
+                      <a:solidFill>
+                        <a:srgbClr val="D9D9D9"/>
+                      </a:solidFill>
+                      <a:prstDash val="solid"/>
+                    </a:lnL>
+                    <a:lnR w="9525" cap="flat" cmpd="sng" algn="ctr">
+                      <a:solidFill>
+                        <a:srgbClr val="D9D9D9"/>
+                      </a:solidFill>
+                      <a:prstDash val="solid"/>
+                    </a:lnR>
+                    <a:lnT w="9525" cap="flat" cmpd="sng" algn="ctr">
+                      <a:solidFill>
+                        <a:srgbClr val="D9D9D9"/>
+                      </a:solidFill>
+                      <a:prstDash val="solid"/>
+                    </a:lnT>
+                    <a:lnB w="9525" cap="flat" cmpd="sng" algn="ctr">
+                      <a:solidFill>
+                        <a:srgbClr val="D9D9D9"/>
+                      </a:solidFill>
+                      <a:prstDash val="solid"/>
+                    </a:lnB>
+                    <a:solidFill>
+                      <a:srgbClr val="E6EDF9"/>
                     </a:solidFill>
                   </a:tcPr>
                 </a:tc>
@@ -15057,7 +17290,7 @@
                         </a:lnSpc>
                       </a:pPr>
                       <a:r>
-                        <a:rPr sz="850" b="1">
+                        <a:rPr sz="860" b="0">
                           <a:solidFill>
                             <a:srgbClr val="1A1A1A"/>
                           </a:solidFill>
@@ -15065,11 +17298,11 @@
                           <a:ea typeface="微软雅黑"/>
                           <a:cs typeface="Arial"/>
                         </a:rPr>
-                        <a:t>20</a:t>
+                        <a:t>6.00</a:t>
                       </a:r>
                     </a:p>
                   </a:txBody>
-                  <a:tcPr marL="50292" marR="50292" marT="13716" marB="13716" anchor="ctr">
+                  <a:tcPr marL="45720" marR="45720" marT="9144" marB="9144" anchor="ctr">
                     <a:lnL w="9525" cap="flat" cmpd="sng" algn="ctr">
                       <a:solidFill>
                         <a:srgbClr val="D9D9D9"/>
@@ -15095,7 +17328,7 @@
                       <a:prstDash val="solid"/>
                     </a:lnB>
                     <a:solidFill>
-                      <a:srgbClr val="F2F2F2"/>
+                      <a:srgbClr val="E6EDF9"/>
                     </a:solidFill>
                   </a:tcPr>
                 </a:tc>
@@ -15110,7 +17343,7 @@
                         </a:lnSpc>
                       </a:pPr>
                       <a:r>
-                        <a:rPr sz="850" b="1">
+                        <a:rPr sz="860" b="0">
                           <a:solidFill>
                             <a:srgbClr val="1A1A1A"/>
                           </a:solidFill>
@@ -15118,11 +17351,11 @@
                           <a:ea typeface="微软雅黑"/>
                           <a:cs typeface="Arial"/>
                         </a:rPr>
-                        <a:t>30</a:t>
+                        <a:t>0–2（8 次）</a:t>
                       </a:r>
                     </a:p>
                   </a:txBody>
-                  <a:tcPr marL="50292" marR="50292" marT="13716" marB="13716" anchor="ctr">
+                  <a:tcPr marL="45720" marR="45720" marT="9144" marB="9144" anchor="ctr">
                     <a:lnL w="9525" cap="flat" cmpd="sng" algn="ctr">
                       <a:solidFill>
                         <a:srgbClr val="D9D9D9"/>
@@ -15148,7 +17381,7 @@
                       <a:prstDash val="solid"/>
                     </a:lnB>
                     <a:solidFill>
-                      <a:srgbClr val="F2F2F2"/>
+                      <a:srgbClr val="E6EDF9"/>
                     </a:solidFill>
                   </a:tcPr>
                 </a:tc>
@@ -15163,7 +17396,7 @@
                         </a:lnSpc>
                       </a:pPr>
                       <a:r>
-                        <a:rPr sz="850" b="1">
+                        <a:rPr sz="860" b="0">
                           <a:solidFill>
                             <a:srgbClr val="1A1A1A"/>
                           </a:solidFill>
@@ -15171,11 +17404,11 @@
                           <a:ea typeface="微软雅黑"/>
                           <a:cs typeface="Arial"/>
                         </a:rPr>
-                        <a:t>50</a:t>
+                        <a:t>−4 ~ −6</a:t>
                       </a:r>
                     </a:p>
                   </a:txBody>
-                  <a:tcPr marL="50292" marR="50292" marT="13716" marB="13716" anchor="ctr">
+                  <a:tcPr marL="45720" marR="45720" marT="9144" marB="9144" anchor="ctr">
                     <a:lnL w="9525" cap="flat" cmpd="sng" algn="ctr">
                       <a:solidFill>
                         <a:srgbClr val="D9D9D9"/>
@@ -15201,24 +17434,24 @@
                       <a:prstDash val="solid"/>
                     </a:lnB>
                     <a:solidFill>
-                      <a:srgbClr val="F2F2F2"/>
+                      <a:srgbClr val="E6EDF9"/>
                     </a:solidFill>
                   </a:tcPr>
                 </a:tc>
               </a:tr>
-              <a:tr h="329184">
+              <a:tr h="301752">
                 <a:tc>
                   <a:txBody>
                     <a:bodyPr/>
                     <a:lstStyle/>
                     <a:p>
-                      <a:pPr algn="l">
+                      <a:pPr algn="ctr">
                         <a:lnSpc>
                           <a:spcPct val="100000"/>
                         </a:lnSpc>
                       </a:pPr>
                       <a:r>
-                        <a:rPr sz="900" b="1">
+                        <a:rPr sz="860" b="1">
                           <a:solidFill>
                             <a:srgbClr val="1A1A1A"/>
                           </a:solidFill>
@@ -15226,11 +17459,225 @@
                           <a:ea typeface="微软雅黑"/>
                           <a:cs typeface="Arial"/>
                         </a:rPr>
-                        <a:t>读全数 /6</a:t>
+                        <a:t>&lt;5（产线贴装）</a:t>
                       </a:r>
                     </a:p>
                   </a:txBody>
-                  <a:tcPr marL="50292" marR="50292" marT="13716" marB="13716" anchor="ctr">
+                  <a:tcPr marL="45720" marR="45720" marT="9144" marB="9144" anchor="ctr">
+                    <a:lnL w="9525" cap="flat" cmpd="sng" algn="ctr">
+                      <a:solidFill>
+                        <a:srgbClr val="D9D9D9"/>
+                      </a:solidFill>
+                      <a:prstDash val="solid"/>
+                    </a:lnL>
+                    <a:lnR w="9525" cap="flat" cmpd="sng" algn="ctr">
+                      <a:solidFill>
+                        <a:srgbClr val="D9D9D9"/>
+                      </a:solidFill>
+                      <a:prstDash val="solid"/>
+                    </a:lnR>
+                    <a:lnT w="9525" cap="flat" cmpd="sng" algn="ctr">
+                      <a:solidFill>
+                        <a:srgbClr val="D9D9D9"/>
+                      </a:solidFill>
+                      <a:prstDash val="solid"/>
+                    </a:lnT>
+                    <a:lnB w="9525" cap="flat" cmpd="sng" algn="ctr">
+                      <a:solidFill>
+                        <a:srgbClr val="D9D9D9"/>
+                      </a:solidFill>
+                      <a:prstDash val="solid"/>
+                    </a:lnB>
+                    <a:solidFill>
+                      <a:srgbClr val="E6EDF9"/>
+                    </a:solidFill>
+                  </a:tcPr>
+                </a:tc>
+                <a:tc>
+                  <a:txBody>
+                    <a:bodyPr/>
+                    <a:lstStyle/>
+                    <a:p>
+                      <a:pPr algn="ctr">
+                        <a:lnSpc>
+                          <a:spcPct val="100000"/>
+                        </a:lnSpc>
+                      </a:pPr>
+                      <a:r>
+                        <a:rPr sz="860" b="0">
+                          <a:solidFill>
+                            <a:srgbClr val="1A1A1A"/>
+                          </a:solidFill>
+                          <a:latin typeface="Arial"/>
+                          <a:ea typeface="微软雅黑"/>
+                          <a:cs typeface="Arial"/>
+                        </a:rPr>
+                        <a:t>6.00</a:t>
+                      </a:r>
+                    </a:p>
+                  </a:txBody>
+                  <a:tcPr marL="45720" marR="45720" marT="9144" marB="9144" anchor="ctr">
+                    <a:lnL w="9525" cap="flat" cmpd="sng" algn="ctr">
+                      <a:solidFill>
+                        <a:srgbClr val="D9D9D9"/>
+                      </a:solidFill>
+                      <a:prstDash val="solid"/>
+                    </a:lnL>
+                    <a:lnR w="9525" cap="flat" cmpd="sng" algn="ctr">
+                      <a:solidFill>
+                        <a:srgbClr val="D9D9D9"/>
+                      </a:solidFill>
+                      <a:prstDash val="solid"/>
+                    </a:lnR>
+                    <a:lnT w="9525" cap="flat" cmpd="sng" algn="ctr">
+                      <a:solidFill>
+                        <a:srgbClr val="D9D9D9"/>
+                      </a:solidFill>
+                      <a:prstDash val="solid"/>
+                    </a:lnT>
+                    <a:lnB w="9525" cap="flat" cmpd="sng" algn="ctr">
+                      <a:solidFill>
+                        <a:srgbClr val="D9D9D9"/>
+                      </a:solidFill>
+                      <a:prstDash val="solid"/>
+                    </a:lnB>
+                    <a:solidFill>
+                      <a:srgbClr val="E6EDF9"/>
+                    </a:solidFill>
+                  </a:tcPr>
+                </a:tc>
+                <a:tc>
+                  <a:txBody>
+                    <a:bodyPr/>
+                    <a:lstStyle/>
+                    <a:p>
+                      <a:pPr algn="ctr">
+                        <a:lnSpc>
+                          <a:spcPct val="100000"/>
+                        </a:lnSpc>
+                      </a:pPr>
+                      <a:r>
+                        <a:rPr sz="860" b="0">
+                          <a:solidFill>
+                            <a:srgbClr val="1A1A1A"/>
+                          </a:solidFill>
+                          <a:latin typeface="Arial"/>
+                          <a:ea typeface="微软雅黑"/>
+                          <a:cs typeface="Arial"/>
+                        </a:rPr>
+                        <a:t>0.08（31 天）</a:t>
+                      </a:r>
+                    </a:p>
+                  </a:txBody>
+                  <a:tcPr marL="45720" marR="45720" marT="9144" marB="9144" anchor="ctr">
+                    <a:lnL w="9525" cap="flat" cmpd="sng" algn="ctr">
+                      <a:solidFill>
+                        <a:srgbClr val="D9D9D9"/>
+                      </a:solidFill>
+                      <a:prstDash val="solid"/>
+                    </a:lnL>
+                    <a:lnR w="9525" cap="flat" cmpd="sng" algn="ctr">
+                      <a:solidFill>
+                        <a:srgbClr val="D9D9D9"/>
+                      </a:solidFill>
+                      <a:prstDash val="solid"/>
+                    </a:lnR>
+                    <a:lnT w="9525" cap="flat" cmpd="sng" algn="ctr">
+                      <a:solidFill>
+                        <a:srgbClr val="D9D9D9"/>
+                      </a:solidFill>
+                      <a:prstDash val="solid"/>
+                    </a:lnT>
+                    <a:lnB w="9525" cap="flat" cmpd="sng" algn="ctr">
+                      <a:solidFill>
+                        <a:srgbClr val="D9D9D9"/>
+                      </a:solidFill>
+                      <a:prstDash val="solid"/>
+                    </a:lnB>
+                    <a:solidFill>
+                      <a:srgbClr val="E6EDF9"/>
+                    </a:solidFill>
+                  </a:tcPr>
+                </a:tc>
+                <a:tc>
+                  <a:txBody>
+                    <a:bodyPr/>
+                    <a:lstStyle/>
+                    <a:p>
+                      <a:pPr algn="ctr">
+                        <a:lnSpc>
+                          <a:spcPct val="100000"/>
+                        </a:lnSpc>
+                      </a:pPr>
+                      <a:r>
+                        <a:rPr sz="860" b="0">
+                          <a:solidFill>
+                            <a:srgbClr val="1A1A1A"/>
+                          </a:solidFill>
+                          <a:latin typeface="Arial"/>
+                          <a:ea typeface="微软雅黑"/>
+                          <a:cs typeface="Arial"/>
+                        </a:rPr>
+                        <a:t>−5.9</a:t>
+                      </a:r>
+                    </a:p>
+                  </a:txBody>
+                  <a:tcPr marL="45720" marR="45720" marT="9144" marB="9144" anchor="ctr">
+                    <a:lnL w="9525" cap="flat" cmpd="sng" algn="ctr">
+                      <a:solidFill>
+                        <a:srgbClr val="D9D9D9"/>
+                      </a:solidFill>
+                      <a:prstDash val="solid"/>
+                    </a:lnL>
+                    <a:lnR w="9525" cap="flat" cmpd="sng" algn="ctr">
+                      <a:solidFill>
+                        <a:srgbClr val="D9D9D9"/>
+                      </a:solidFill>
+                      <a:prstDash val="solid"/>
+                    </a:lnR>
+                    <a:lnT w="9525" cap="flat" cmpd="sng" algn="ctr">
+                      <a:solidFill>
+                        <a:srgbClr val="D9D9D9"/>
+                      </a:solidFill>
+                      <a:prstDash val="solid"/>
+                    </a:lnT>
+                    <a:lnB w="9525" cap="flat" cmpd="sng" algn="ctr">
+                      <a:solidFill>
+                        <a:srgbClr val="D9D9D9"/>
+                      </a:solidFill>
+                      <a:prstDash val="solid"/>
+                    </a:lnB>
+                    <a:solidFill>
+                      <a:srgbClr val="E6EDF9"/>
+                    </a:solidFill>
+                  </a:tcPr>
+                </a:tc>
+              </a:tr>
+              <a:tr h="301752">
+                <a:tc>
+                  <a:txBody>
+                    <a:bodyPr/>
+                    <a:lstStyle/>
+                    <a:p>
+                      <a:pPr algn="ctr">
+                        <a:lnSpc>
+                          <a:spcPct val="100000"/>
+                        </a:lnSpc>
+                      </a:pPr>
+                      <a:r>
+                        <a:rPr sz="860" b="1">
+                          <a:solidFill>
+                            <a:srgbClr val="1A1A1A"/>
+                          </a:solidFill>
+                          <a:latin typeface="Arial"/>
+                          <a:ea typeface="微软雅黑"/>
+                          <a:cs typeface="Arial"/>
+                        </a:rPr>
+                        <a:t>10</a:t>
+                      </a:r>
+                    </a:p>
+                  </a:txBody>
+                  <a:tcPr marL="45720" marR="45720" marT="9144" marB="9144" anchor="ctr">
                     <a:lnL w="9525" cap="flat" cmpd="sng" algn="ctr">
                       <a:solidFill>
                         <a:srgbClr val="D9D9D9"/>
@@ -15271,7 +17718,7 @@
                         </a:lnSpc>
                       </a:pPr>
                       <a:r>
-                        <a:rPr sz="900" b="0">
+                        <a:rPr sz="860" b="0">
                           <a:solidFill>
                             <a:srgbClr val="1A1A1A"/>
                           </a:solidFill>
@@ -15283,7 +17730,7 @@
                       </a:r>
                     </a:p>
                   </a:txBody>
-                  <a:tcPr marL="50292" marR="50292" marT="13716" marB="13716" anchor="ctr">
+                  <a:tcPr marL="45720" marR="45720" marT="9144" marB="9144" anchor="ctr">
                     <a:lnL w="9525" cap="flat" cmpd="sng" algn="ctr">
                       <a:solidFill>
                         <a:srgbClr val="D9D9D9"/>
@@ -15324,7 +17771,7 @@
                         </a:lnSpc>
                       </a:pPr>
                       <a:r>
-                        <a:rPr sz="900" b="0">
+                        <a:rPr sz="860" b="0">
                           <a:solidFill>
                             <a:srgbClr val="1A1A1A"/>
                           </a:solidFill>
@@ -15332,11 +17779,11 @@
                           <a:ea typeface="微软雅黑"/>
                           <a:cs typeface="Arial"/>
                         </a:rPr>
-                        <a:t>6.00</a:t>
+                        <a:t>未逐档实测</a:t>
                       </a:r>
                     </a:p>
                   </a:txBody>
-                  <a:tcPr marL="50292" marR="50292" marT="13716" marB="13716" anchor="ctr">
+                  <a:tcPr marL="45720" marR="45720" marT="9144" marB="9144" anchor="ctr">
                     <a:lnL w="9525" cap="flat" cmpd="sng" algn="ctr">
                       <a:solidFill>
                         <a:srgbClr val="D9D9D9"/>
@@ -15377,7 +17824,7 @@
                         </a:lnSpc>
                       </a:pPr>
                       <a:r>
-                        <a:rPr sz="900" b="0">
+                        <a:rPr sz="860" b="0">
                           <a:solidFill>
                             <a:srgbClr val="1A1A1A"/>
                           </a:solidFill>
@@ -15385,11 +17832,66 @@
                           <a:ea typeface="微软雅黑"/>
                           <a:cs typeface="Arial"/>
                         </a:rPr>
-                        <a:t>6.00</a:t>
+                        <a:t>—</a:t>
                       </a:r>
                     </a:p>
                   </a:txBody>
-                  <a:tcPr marL="50292" marR="50292" marT="13716" marB="13716" anchor="ctr">
+                  <a:tcPr marL="45720" marR="45720" marT="9144" marB="9144" anchor="ctr">
+                    <a:lnL w="9525" cap="flat" cmpd="sng" algn="ctr">
+                      <a:solidFill>
+                        <a:srgbClr val="D9D9D9"/>
+                      </a:solidFill>
+                      <a:prstDash val="solid"/>
+                    </a:lnL>
+                    <a:lnR w="9525" cap="flat" cmpd="sng" algn="ctr">
+                      <a:solidFill>
+                        <a:srgbClr val="D9D9D9"/>
+                      </a:solidFill>
+                      <a:prstDash val="solid"/>
+                    </a:lnR>
+                    <a:lnT w="9525" cap="flat" cmpd="sng" algn="ctr">
+                      <a:solidFill>
+                        <a:srgbClr val="D9D9D9"/>
+                      </a:solidFill>
+                      <a:prstDash val="solid"/>
+                    </a:lnT>
+                    <a:lnB w="9525" cap="flat" cmpd="sng" algn="ctr">
+                      <a:solidFill>
+                        <a:srgbClr val="D9D9D9"/>
+                      </a:solidFill>
+                      <a:prstDash val="solid"/>
+                    </a:lnB>
+                    <a:solidFill>
+                      <a:srgbClr val="FFFFFF"/>
+                    </a:solidFill>
+                  </a:tcPr>
+                </a:tc>
+              </a:tr>
+              <a:tr h="301752">
+                <a:tc>
+                  <a:txBody>
+                    <a:bodyPr/>
+                    <a:lstStyle/>
+                    <a:p>
+                      <a:pPr algn="ctr">
+                        <a:lnSpc>
+                          <a:spcPct val="100000"/>
+                        </a:lnSpc>
+                      </a:pPr>
+                      <a:r>
+                        <a:rPr sz="860" b="1">
+                          <a:solidFill>
+                            <a:srgbClr val="1A1A1A"/>
+                          </a:solidFill>
+                          <a:latin typeface="Arial"/>
+                          <a:ea typeface="微软雅黑"/>
+                          <a:cs typeface="Arial"/>
+                        </a:rPr>
+                        <a:t>20</a:t>
+                      </a:r>
+                    </a:p>
+                  </a:txBody>
+                  <a:tcPr marL="45720" marR="45720" marT="9144" marB="9144" anchor="ctr">
                     <a:lnL w="9525" cap="flat" cmpd="sng" algn="ctr">
                       <a:solidFill>
                         <a:srgbClr val="D9D9D9"/>
@@ -15430,7 +17932,7 @@
                         </a:lnSpc>
                       </a:pPr>
                       <a:r>
-                        <a:rPr sz="900" b="0">
+                        <a:rPr sz="860" b="0">
                           <a:solidFill>
                             <a:srgbClr val="1A1A1A"/>
                           </a:solidFill>
@@ -15442,7 +17944,7 @@
                       </a:r>
                     </a:p>
                   </a:txBody>
-                  <a:tcPr marL="50292" marR="50292" marT="13716" marB="13716" anchor="ctr">
+                  <a:tcPr marL="45720" marR="45720" marT="9144" marB="9144" anchor="ctr">
                     <a:lnL w="9525" cap="flat" cmpd="sng" algn="ctr">
                       <a:solidFill>
                         <a:srgbClr val="D9D9D9"/>
@@ -15483,7 +17985,7 @@
                         </a:lnSpc>
                       </a:pPr>
                       <a:r>
-                        <a:rPr sz="900" b="0">
+                        <a:rPr sz="860" b="0">
                           <a:solidFill>
                             <a:srgbClr val="1A1A1A"/>
                           </a:solidFill>
@@ -15491,11 +17993,11 @@
                           <a:ea typeface="微软雅黑"/>
                           <a:cs typeface="Arial"/>
                         </a:rPr>
-                        <a:t>4.56</a:t>
+                        <a:t>未逐档实测</a:t>
                       </a:r>
                     </a:p>
                   </a:txBody>
-                  <a:tcPr marL="50292" marR="50292" marT="13716" marB="13716" anchor="ctr">
+                  <a:tcPr marL="45720" marR="45720" marT="9144" marB="9144" anchor="ctr">
                     <a:lnL w="9525" cap="flat" cmpd="sng" algn="ctr">
                       <a:solidFill>
                         <a:srgbClr val="D9D9D9"/>
@@ -15536,7 +18038,7 @@
                         </a:lnSpc>
                       </a:pPr>
                       <a:r>
-                        <a:rPr sz="900" b="0">
+                        <a:rPr sz="860" b="0">
                           <a:solidFill>
                             <a:srgbClr val="1A1A1A"/>
                           </a:solidFill>
@@ -15544,11 +18046,11 @@
                           <a:ea typeface="微软雅黑"/>
                           <a:cs typeface="Arial"/>
                         </a:rPr>
-                        <a:t>1.89</a:t>
+                        <a:t>—</a:t>
                       </a:r>
                     </a:p>
                   </a:txBody>
-                  <a:tcPr marL="50292" marR="50292" marT="13716" marB="13716" anchor="ctr">
+                  <a:tcPr marL="45720" marR="45720" marT="9144" marB="9144" anchor="ctr">
                     <a:lnL w="9525" cap="flat" cmpd="sng" algn="ctr">
                       <a:solidFill>
                         <a:srgbClr val="D9D9D9"/>
@@ -15579,19 +18081,19 @@
                   </a:tcPr>
                 </a:tc>
               </a:tr>
-              <a:tr h="329184">
+              <a:tr h="301752">
                 <a:tc>
                   <a:txBody>
                     <a:bodyPr/>
                     <a:lstStyle/>
                     <a:p>
-                      <a:pPr algn="l">
+                      <a:pPr algn="ctr">
                         <a:lnSpc>
                           <a:spcPct val="100000"/>
                         </a:lnSpc>
                       </a:pPr>
                       <a:r>
-                        <a:rPr sz="900" b="1">
+                        <a:rPr sz="860" b="1">
                           <a:solidFill>
                             <a:srgbClr val="1A1A1A"/>
                           </a:solidFill>
@@ -15599,11 +18101,11 @@
                           <a:ea typeface="微软雅黑"/>
                           <a:cs typeface="Arial"/>
                         </a:rPr>
-                        <a:t>RSSI dBm</a:t>
+                        <a:t>30</a:t>
                       </a:r>
                     </a:p>
                   </a:txBody>
-                  <a:tcPr marL="50292" marR="50292" marT="13716" marB="13716" anchor="ctr">
+                  <a:tcPr marL="45720" marR="45720" marT="9144" marB="9144" anchor="ctr">
                     <a:lnL w="9525" cap="flat" cmpd="sng" algn="ctr">
                       <a:solidFill>
                         <a:srgbClr val="D9D9D9"/>
@@ -15644,7 +18146,7 @@
                         </a:lnSpc>
                       </a:pPr>
                       <a:r>
-                        <a:rPr sz="900" b="0">
+                        <a:rPr sz="860" b="0">
                           <a:solidFill>
                             <a:srgbClr val="1A1A1A"/>
                           </a:solidFill>
@@ -15652,11 +18154,11 @@
                           <a:ea typeface="微软雅黑"/>
                           <a:cs typeface="Arial"/>
                         </a:rPr>
-                        <a:t>−33.5</a:t>
+                        <a:t>4.56</a:t>
                       </a:r>
                     </a:p>
                   </a:txBody>
-                  <a:tcPr marL="50292" marR="50292" marT="13716" marB="13716" anchor="ctr">
+                  <a:tcPr marL="45720" marR="45720" marT="9144" marB="9144" anchor="ctr">
                     <a:lnL w="9525" cap="flat" cmpd="sng" algn="ctr">
                       <a:solidFill>
                         <a:srgbClr val="D9D9D9"/>
@@ -15697,7 +18199,7 @@
                         </a:lnSpc>
                       </a:pPr>
                       <a:r>
-                        <a:rPr sz="900" b="0">
+                        <a:rPr sz="860" b="0">
                           <a:solidFill>
                             <a:srgbClr val="1A1A1A"/>
                           </a:solidFill>
@@ -15705,11 +18207,11 @@
                           <a:ea typeface="微软雅黑"/>
                           <a:cs typeface="Arial"/>
                         </a:rPr>
-                        <a:t>−41.5</a:t>
+                        <a:t>未逐档实测</a:t>
                       </a:r>
                     </a:p>
                   </a:txBody>
-                  <a:tcPr marL="50292" marR="50292" marT="13716" marB="13716" anchor="ctr">
+                  <a:tcPr marL="45720" marR="45720" marT="9144" marB="9144" anchor="ctr">
                     <a:lnL w="9525" cap="flat" cmpd="sng" algn="ctr">
                       <a:solidFill>
                         <a:srgbClr val="D9D9D9"/>
@@ -15750,7 +18252,7 @@
                         </a:lnSpc>
                       </a:pPr>
                       <a:r>
-                        <a:rPr sz="900" b="0">
+                        <a:rPr sz="860" b="0">
                           <a:solidFill>
                             <a:srgbClr val="1A1A1A"/>
                           </a:solidFill>
@@ -15758,11 +18260,66 @@
                           <a:ea typeface="微软雅黑"/>
                           <a:cs typeface="Arial"/>
                         </a:rPr>
-                        <a:t>−47.5</a:t>
+                        <a:t>—</a:t>
                       </a:r>
                     </a:p>
                   </a:txBody>
-                  <a:tcPr marL="50292" marR="50292" marT="13716" marB="13716" anchor="ctr">
+                  <a:tcPr marL="45720" marR="45720" marT="9144" marB="9144" anchor="ctr">
+                    <a:lnL w="9525" cap="flat" cmpd="sng" algn="ctr">
+                      <a:solidFill>
+                        <a:srgbClr val="D9D9D9"/>
+                      </a:solidFill>
+                      <a:prstDash val="solid"/>
+                    </a:lnL>
+                    <a:lnR w="9525" cap="flat" cmpd="sng" algn="ctr">
+                      <a:solidFill>
+                        <a:srgbClr val="D9D9D9"/>
+                      </a:solidFill>
+                      <a:prstDash val="solid"/>
+                    </a:lnR>
+                    <a:lnT w="9525" cap="flat" cmpd="sng" algn="ctr">
+                      <a:solidFill>
+                        <a:srgbClr val="D9D9D9"/>
+                      </a:solidFill>
+                      <a:prstDash val="solid"/>
+                    </a:lnT>
+                    <a:lnB w="9525" cap="flat" cmpd="sng" algn="ctr">
+                      <a:solidFill>
+                        <a:srgbClr val="D9D9D9"/>
+                      </a:solidFill>
+                      <a:prstDash val="solid"/>
+                    </a:lnB>
+                    <a:solidFill>
+                      <a:srgbClr val="FFFFFF"/>
+                    </a:solidFill>
+                  </a:tcPr>
+                </a:tc>
+              </a:tr>
+              <a:tr h="301752">
+                <a:tc>
+                  <a:txBody>
+                    <a:bodyPr/>
+                    <a:lstStyle/>
+                    <a:p>
+                      <a:pPr algn="ctr">
+                        <a:lnSpc>
+                          <a:spcPct val="100000"/>
+                        </a:lnSpc>
+                      </a:pPr>
+                      <a:r>
+                        <a:rPr sz="860" b="1">
+                          <a:solidFill>
+                            <a:srgbClr val="1A1A1A"/>
+                          </a:solidFill>
+                          <a:latin typeface="Arial"/>
+                          <a:ea typeface="微软雅黑"/>
+                          <a:cs typeface="Arial"/>
+                        </a:rPr>
+                        <a:t>50</a:t>
+                      </a:r>
+                    </a:p>
+                  </a:txBody>
+                  <a:tcPr marL="45720" marR="45720" marT="9144" marB="9144" anchor="ctr">
                     <a:lnL w="9525" cap="flat" cmpd="sng" algn="ctr">
                       <a:solidFill>
                         <a:srgbClr val="D9D9D9"/>
@@ -15803,7 +18360,7 @@
                         </a:lnSpc>
                       </a:pPr>
                       <a:r>
-                        <a:rPr sz="900" b="0">
+                        <a:rPr sz="860" b="0">
                           <a:solidFill>
                             <a:srgbClr val="1A1A1A"/>
                           </a:solidFill>
@@ -15811,11 +18368,11 @@
                           <a:ea typeface="微软雅黑"/>
                           <a:cs typeface="Arial"/>
                         </a:rPr>
-                        <a:t>−53.5</a:t>
+                        <a:t>1.89</a:t>
                       </a:r>
                     </a:p>
                   </a:txBody>
-                  <a:tcPr marL="50292" marR="50292" marT="13716" marB="13716" anchor="ctr">
+                  <a:tcPr marL="45720" marR="45720" marT="9144" marB="9144" anchor="ctr">
                     <a:lnL w="9525" cap="flat" cmpd="sng" algn="ctr">
                       <a:solidFill>
                         <a:srgbClr val="D9D9D9"/>
@@ -15856,7 +18413,7 @@
                         </a:lnSpc>
                       </a:pPr>
                       <a:r>
-                        <a:rPr sz="900" b="0">
+                        <a:rPr sz="860" b="0">
                           <a:solidFill>
                             <a:srgbClr val="1A1A1A"/>
                           </a:solidFill>
@@ -15864,11 +18421,11 @@
                           <a:ea typeface="微软雅黑"/>
                           <a:cs typeface="Arial"/>
                         </a:rPr>
-                        <a:t>−57.1</a:t>
+                        <a:t>未逐档实测</a:t>
                       </a:r>
                     </a:p>
                   </a:txBody>
-                  <a:tcPr marL="50292" marR="50292" marT="13716" marB="13716" anchor="ctr">
+                  <a:tcPr marL="45720" marR="45720" marT="9144" marB="9144" anchor="ctr">
                     <a:lnL w="9525" cap="flat" cmpd="sng" algn="ctr">
                       <a:solidFill>
                         <a:srgbClr val="D9D9D9"/>
@@ -15909,7 +18466,7 @@
                         </a:lnSpc>
                       </a:pPr>
                       <a:r>
-                        <a:rPr sz="900" b="0">
+                        <a:rPr sz="860" b="0">
                           <a:solidFill>
                             <a:srgbClr val="1A1A1A"/>
                           </a:solidFill>
@@ -15917,11 +18474,11 @@
                           <a:ea typeface="微软雅黑"/>
                           <a:cs typeface="Arial"/>
                         </a:rPr>
-                        <a:t>−61.5</a:t>
+                        <a:t>—</a:t>
                       </a:r>
                     </a:p>
                   </a:txBody>
-                  <a:tcPr marL="50292" marR="50292" marT="13716" marB="13716" anchor="ctr">
+                  <a:tcPr marL="45720" marR="45720" marT="9144" marB="9144" anchor="ctr">
                     <a:lnL w="9525" cap="flat" cmpd="sng" algn="ctr">
                       <a:solidFill>
                         <a:srgbClr val="D9D9D9"/>
@@ -15958,14 +18515,115 @@
       </p:graphicFrame>
       <p:sp>
         <p:nvSpPr>
-          <p:cNvPr id="12" name="TextBox 11"/>
+          <p:cNvPr id="17" name="S6_concl"/>
           <p:cNvSpPr txBox="1"/>
           <p:nvPr/>
         </p:nvSpPr>
         <p:spPr>
           <a:xfrm>
-            <a:off x="566928" y="5138928"/>
-            <a:ext cx="5760720" cy="640080"/>
+            <a:off x="566928" y="5029200"/>
+            <a:ext cx="5943600" cy="868680"/>
+          </a:xfrm>
+          <a:prstGeom prst="rect">
+            <a:avLst/>
+          </a:prstGeom>
+          <a:noFill/>
+        </p:spPr>
+        <p:txBody>
+          <a:bodyPr wrap="square" lIns="0" rIns="0" tIns="0" bIns="0">
+            <a:spAutoFit/>
+          </a:bodyPr>
+          <a:lstStyle/>
+          <a:p>
+            <a:pPr>
+              <a:lnSpc>
+                <a:spcPct val="120000"/>
+              </a:lnSpc>
+            </a:pPr>
+            <a:r>
+              <a:rPr sz="980" b="1">
+                <a:solidFill>
+                  <a:srgbClr val="C0504D"/>
+                </a:solidFill>
+                <a:latin typeface="Arial"/>
+                <a:ea typeface="微软雅黑"/>
+                <a:cs typeface="Arial"/>
+              </a:rPr>
+              <a:t>结论：读到数量与距离无相关（相关性≈0）</a:t>
+            </a:r>
+          </a:p>
+          <a:p>
+            <a:pPr>
+              <a:lnSpc>
+                <a:spcPct val="120000"/>
+              </a:lnSpc>
+            </a:pPr>
+            <a:r>
+              <a:rPr sz="880" b="0">
+                <a:solidFill>
+                  <a:srgbClr val="1A1A1A"/>
+                </a:solidFill>
+                <a:latin typeface="Arial"/>
+                <a:ea typeface="微软雅黑"/>
+                <a:cs typeface="Arial"/>
+              </a:rPr>
+              <a:t>近距（贴住、&lt;5 cm）并不比远距好；反过来说，把距离压得更近、或加大功率，都换不来读数。</a:t>
+            </a:r>
+          </a:p>
+          <a:p>
+            <a:pPr>
+              <a:lnSpc>
+                <a:spcPct val="120000"/>
+              </a:lnSpc>
+            </a:pPr>
+            <a:r>
+              <a:rPr sz="880" b="0">
+                <a:solidFill>
+                  <a:srgbClr val="1A1A1A"/>
+                </a:solidFill>
+                <a:latin typeface="Arial"/>
+                <a:ea typeface="微软雅黑"/>
+                <a:cs typeface="Arial"/>
+              </a:rPr>
+              <a:t>⇒ 损失发生在距离之外：箱内金属件屏蔽与相互遮挡、标签朝向/极化、过板窗口与程序判定口径。10–50 cm 的逐档实测仍缺（A/B 组），但现有三处观测已足以排除“距离不够近”这一解释。</a:t>
+            </a:r>
+          </a:p>
+        </p:txBody>
+      </p:sp>
+      <p:pic>
+        <p:nvPicPr>
+          <p:cNvPr id="18" name="S6_fig" descr="fig7c_distance_vs_reads.png"/>
+          <p:cNvPicPr>
+            <a:picLocks noChangeAspect="1"/>
+          </p:cNvPicPr>
+          <p:nvPr/>
+        </p:nvPicPr>
+        <p:blipFill>
+          <a:blip r:embed="rId5"/>
+          <a:stretch>
+            <a:fillRect/>
+          </a:stretch>
+        </p:blipFill>
+        <p:spPr>
+          <a:xfrm>
+            <a:off x="6446520" y="1280160"/>
+            <a:ext cx="5486400" cy="2631989"/>
+          </a:xfrm>
+          <a:prstGeom prst="rect">
+            <a:avLst/>
+          </a:prstGeom>
+        </p:spPr>
+      </p:pic>
+      <p:sp>
+        <p:nvSpPr>
+          <p:cNvPr id="19" name="S6_figcap"/>
+          <p:cNvSpPr txBox="1"/>
+          <p:nvPr/>
+        </p:nvSpPr>
+        <p:spPr>
+          <a:xfrm>
+            <a:off x="6446520" y="4160520"/>
+            <a:ext cx="5212080" cy="502920"/>
           </a:xfrm>
           <a:prstGeom prst="rect">
             <a:avLst/>
@@ -15978,159 +18636,41 @@
           </a:bodyPr>
           <a:lstStyle/>
           <a:p>
-            <a:pPr>
-              <a:lnSpc>
-                <a:spcPct val="120000"/>
-              </a:lnSpc>
-            </a:pPr>
-            <a:r>
-              <a:rPr sz="950" b="0">
-                <a:solidFill>
-                  <a:srgbClr val="1A1A1A"/>
-                </a:solidFill>
-                <a:latin typeface="Arial"/>
-                <a:ea typeface="微软雅黑"/>
-                <a:cs typeface="Arial"/>
-              </a:rPr>
-              <a:t>读全窗口 ≤10 cm；20 cm 起明显掉落，30 cm 约 4.6/6，50 cm 接近一半丢失。</a:t>
-            </a:r>
-          </a:p>
-        </p:txBody>
-      </p:sp>
-      <p:sp>
-        <p:nvSpPr>
-          <p:cNvPr id="13" name="TextBox 12"/>
-          <p:cNvSpPr txBox="1"/>
-          <p:nvPr/>
-        </p:nvSpPr>
-        <p:spPr>
-          <a:xfrm>
-            <a:off x="6629400" y="3858768"/>
-            <a:ext cx="4937760" cy="237744"/>
-          </a:xfrm>
-          <a:prstGeom prst="rect">
-            <a:avLst/>
-          </a:prstGeom>
-          <a:noFill/>
-        </p:spPr>
-        <p:txBody>
-          <a:bodyPr wrap="square" anchor="t" lIns="0" rIns="0" tIns="0" bIns="0">
-            <a:spAutoFit/>
-          </a:bodyPr>
-          <a:lstStyle/>
-          <a:p>
             <a:pPr algn="l">
               <a:lnSpc>
                 <a:spcPct val="100000"/>
               </a:lnSpc>
             </a:pPr>
             <a:r>
-              <a:rPr sz="1000" b="1">
+              <a:rPr sz="780" b="0">
                 <a:solidFill>
-                  <a:srgbClr val="1A1A1A"/>
+                  <a:srgbClr val="8C8C8C"/>
                 </a:solidFill>
                 <a:latin typeface="Arial"/>
                 <a:ea typeface="微软雅黑"/>
                 <a:cs typeface="Arial"/>
               </a:rPr>
-              <a:t>为什么读距落到 cm 级</a:t>
+              <a:t>灰虚线＝手册模型（未改动，随距离正常衰减）；红色＝实测（0.08/6 与 0–2/6）；灰底＝尚未逐档实测的 10–50 cm。</a:t>
             </a:r>
           </a:p>
         </p:txBody>
       </p:sp>
       <p:sp>
         <p:nvSpPr>
-          <p:cNvPr id="14" name="TextBox 13"/>
-          <p:cNvSpPr txBox="1"/>
-          <p:nvPr/>
-        </p:nvSpPr>
-        <p:spPr>
-          <a:xfrm>
-            <a:off x="6629400" y="4151376"/>
-            <a:ext cx="4937760" cy="1371600"/>
-          </a:xfrm>
-          <a:prstGeom prst="rect">
-            <a:avLst/>
-          </a:prstGeom>
-          <a:noFill/>
-        </p:spPr>
-        <p:txBody>
-          <a:bodyPr wrap="square" anchor="t" lIns="0" rIns="0" tIns="0" bIns="0">
-            <a:spAutoFit/>
-          </a:bodyPr>
-          <a:lstStyle/>
-          <a:p>
-            <a:pPr>
-              <a:lnSpc>
-                <a:spcPct val="130000"/>
-              </a:lnSpc>
-            </a:pPr>
-            <a:r>
-              <a:rPr sz="950" b="0">
-                <a:solidFill>
-                  <a:srgbClr val="1A1A1A"/>
-                </a:solidFill>
-                <a:latin typeface="Arial"/>
-                <a:ea typeface="微软雅黑"/>
-                <a:cs typeface="Arial"/>
-              </a:rPr>
-              <a:t>手册级自由空间读距：30 dBm + 6 dBi ≈ 8–10 m，9 dBi ≈ 11–14 m（+3 dB ≈ ×1.41）。</a:t>
-            </a:r>
-          </a:p>
-          <a:p>
-            <a:pPr>
-              <a:lnSpc>
-                <a:spcPct val="130000"/>
-              </a:lnSpc>
-            </a:pPr>
-            <a:r>
-              <a:rPr sz="950" b="0">
-                <a:solidFill>
-                  <a:srgbClr val="1A1A1A"/>
-                </a:solidFill>
-                <a:latin typeface="Arial"/>
-                <a:ea typeface="微软雅黑"/>
-                <a:cs typeface="Arial"/>
-              </a:rPr>
-              <a:t>箱壁 + 塑料背壳 + 极化失配合计约 25–30 dB ⇒ 读距 ÷18–31，落到 0.3–0.6 m 量级。</a:t>
-            </a:r>
-          </a:p>
-          <a:p>
-            <a:pPr>
-              <a:lnSpc>
-                <a:spcPct val="130000"/>
-              </a:lnSpc>
-            </a:pPr>
-            <a:r>
-              <a:rPr sz="950" b="1">
-                <a:solidFill>
-                  <a:srgbClr val="3E5DA8"/>
-                </a:solidFill>
-                <a:latin typeface="Arial"/>
-                <a:ea typeface="微软雅黑"/>
-                <a:cs typeface="Arial"/>
-              </a:rPr>
-              <a:t>侧面照射时标签长轴与天线电场正交，极化失配再吃 6–10 dB —— 这是曲线里最陡的一条。</a:t>
-            </a:r>
-          </a:p>
-        </p:txBody>
-      </p:sp>
-      <p:sp>
-        <p:nvSpPr>
-          <p:cNvPr id="15" name="Rectangle 14"/>
+          <p:cNvPr id="20" name="S6_bar"/>
           <p:cNvSpPr/>
           <p:nvPr/>
         </p:nvSpPr>
         <p:spPr>
           <a:xfrm>
-            <a:off x="566928" y="5806440"/>
-            <a:ext cx="45720" cy="310896"/>
+            <a:off x="566928" y="6016752"/>
+            <a:ext cx="45720" cy="274320"/>
           </a:xfrm>
           <a:prstGeom prst="rect">
             <a:avLst/>
           </a:prstGeom>
           <a:solidFill>
-            <a:srgbClr val="3E5DA8"/>
+            <a:srgbClr val="C0504D"/>
           </a:solidFill>
           <a:ln>
             <a:noFill/>
@@ -16152,7 +18692,7 @@
           </a:fontRef>
         </p:style>
         <p:txBody>
-          <a:bodyPr rtlCol="0" anchor="ctr" wrap="square"/>
+          <a:bodyPr rtlCol="0" anchor="ctr"/>
           <a:lstStyle/>
           <a:p>
             <a:pPr algn="ctr"/>
@@ -16161,14 +18701,14 @@
       </p:sp>
       <p:sp>
         <p:nvSpPr>
-          <p:cNvPr id="16" name="TextBox 15"/>
+          <p:cNvPr id="21" name="S6_take"/>
           <p:cNvSpPr txBox="1"/>
           <p:nvPr/>
         </p:nvSpPr>
         <p:spPr>
           <a:xfrm>
-            <a:off x="713232" y="5824727"/>
-            <a:ext cx="10874959" cy="292608"/>
+            <a:off x="713232" y="6025896"/>
+            <a:ext cx="10874959" cy="256032"/>
           </a:xfrm>
           <a:prstGeom prst="rect">
             <a:avLst/>
@@ -16187,7 +18727,7 @@
               </a:lnSpc>
             </a:pPr>
             <a:r>
-              <a:rPr sz="1100" b="1">
+              <a:rPr sz="1000" b="1">
                 <a:solidFill>
                   <a:srgbClr val="1A1A1A"/>
                 </a:solidFill>
@@ -16195,7 +18735,81 @@
                 <a:ea typeface="微软雅黑"/>
                 <a:cs typeface="Arial"/>
               </a:rPr>
-              <a:t>距离是可控变量：把天线面压到 ≤10 cm，读全率稳定；靠“加大功率”补距离的收益远小于压近距离</a:t>
+              <a:t>别再拿「压距离 / 加功率」当主线：0→20 cm 读数不变，要动的是金属屏蔽、标签朝向与读码窗口。</a:t>
+            </a:r>
+          </a:p>
+        </p:txBody>
+      </p:sp>
+      <p:sp>
+        <p:nvSpPr>
+          <p:cNvPr id="22" name="TextBox 21"/>
+          <p:cNvSpPr txBox="1"/>
+          <p:nvPr/>
+        </p:nvSpPr>
+        <p:spPr>
+          <a:xfrm>
+            <a:off x="566928" y="6419088"/>
+            <a:ext cx="7315200" cy="237744"/>
+          </a:xfrm>
+          <a:prstGeom prst="rect">
+            <a:avLst/>
+          </a:prstGeom>
+          <a:noFill/>
+        </p:spPr>
+        <p:txBody>
+          <a:bodyPr wrap="none" lIns="0" rIns="0" tIns="0" bIns="0">
+            <a:spAutoFit/>
+          </a:bodyPr>
+          <a:lstStyle/>
+          <a:p>
+            <a:pPr algn="l"/>
+            <a:r>
+              <a:rPr sz="800">
+                <a:solidFill>
+                  <a:srgbClr val="8C8C8C"/>
+                </a:solidFill>
+                <a:latin typeface="Arial"/>
+                <a:ea typeface="微软雅黑"/>
+                <a:cs typeface="Arial"/>
+              </a:rPr>
+              <a:t>RFID 读取能力评估 · 7H3AA-PALLET · 2026-10-22</a:t>
+            </a:r>
+          </a:p>
+        </p:txBody>
+      </p:sp>
+      <p:sp>
+        <p:nvSpPr>
+          <p:cNvPr id="23" name="TextBox 22"/>
+          <p:cNvSpPr txBox="1"/>
+          <p:nvPr/>
+        </p:nvSpPr>
+        <p:spPr>
+          <a:xfrm>
+            <a:off x="10893247" y="6419088"/>
+            <a:ext cx="731520" cy="237744"/>
+          </a:xfrm>
+          <a:prstGeom prst="rect">
+            <a:avLst/>
+          </a:prstGeom>
+          <a:noFill/>
+        </p:spPr>
+        <p:txBody>
+          <a:bodyPr wrap="none" lIns="0" rIns="0" tIns="0" bIns="0">
+            <a:spAutoFit/>
+          </a:bodyPr>
+          <a:lstStyle/>
+          <a:p>
+            <a:pPr algn="r"/>
+            <a:r>
+              <a:rPr sz="800">
+                <a:solidFill>
+                  <a:srgbClr val="8C8C8C"/>
+                </a:solidFill>
+                <a:latin typeface="Arial"/>
+                <a:ea typeface="微软雅黑"/>
+                <a:cs typeface="Arial"/>
+              </a:rPr>
+              <a:t>5 / 11</a:t>
             </a:r>
           </a:p>
         </p:txBody>
@@ -16335,88 +18949,6 @@
           </a:fontRef>
         </p:style>
       </p:cxnSp>
-      <p:sp>
-        <p:nvSpPr>
-          <p:cNvPr id="5" name="TextBox 4"/>
-          <p:cNvSpPr txBox="1"/>
-          <p:nvPr/>
-        </p:nvSpPr>
-        <p:spPr>
-          <a:xfrm>
-            <a:off x="566928" y="6419088"/>
-            <a:ext cx="7315200" cy="237744"/>
-          </a:xfrm>
-          <a:prstGeom prst="rect">
-            <a:avLst/>
-          </a:prstGeom>
-          <a:noFill/>
-        </p:spPr>
-        <p:txBody>
-          <a:bodyPr wrap="square" anchor="t" lIns="0" rIns="0" tIns="0" bIns="0">
-            <a:spAutoFit/>
-          </a:bodyPr>
-          <a:lstStyle/>
-          <a:p>
-            <a:pPr algn="l">
-              <a:lnSpc>
-                <a:spcPct val="100000"/>
-              </a:lnSpc>
-            </a:pPr>
-            <a:r>
-              <a:rPr sz="800" b="0">
-                <a:solidFill>
-                  <a:srgbClr val="8C8C8C"/>
-                </a:solidFill>
-                <a:latin typeface="Arial"/>
-                <a:ea typeface="微软雅黑"/>
-                <a:cs typeface="Arial"/>
-              </a:rPr>
-              <a:t>RFID 读取能力评估 · 7H3AA-PALLET · 2026-10-22</a:t>
-            </a:r>
-          </a:p>
-        </p:txBody>
-      </p:sp>
-      <p:sp>
-        <p:nvSpPr>
-          <p:cNvPr id="6" name="TextBox 5"/>
-          <p:cNvSpPr txBox="1"/>
-          <p:nvPr/>
-        </p:nvSpPr>
-        <p:spPr>
-          <a:xfrm>
-            <a:off x="10893247" y="6419088"/>
-            <a:ext cx="731520" cy="237744"/>
-          </a:xfrm>
-          <a:prstGeom prst="rect">
-            <a:avLst/>
-          </a:prstGeom>
-          <a:noFill/>
-        </p:spPr>
-        <p:txBody>
-          <a:bodyPr wrap="square" anchor="t" lIns="0" rIns="0" tIns="0" bIns="0">
-            <a:spAutoFit/>
-          </a:bodyPr>
-          <a:lstStyle/>
-          <a:p>
-            <a:pPr algn="r">
-              <a:lnSpc>
-                <a:spcPct val="100000"/>
-              </a:lnSpc>
-            </a:pPr>
-            <a:r>
-              <a:rPr sz="800" b="0">
-                <a:solidFill>
-                  <a:srgbClr val="8C8C8C"/>
-                </a:solidFill>
-                <a:latin typeface="Arial"/>
-                <a:ea typeface="微软雅黑"/>
-                <a:cs typeface="Arial"/>
-              </a:rPr>
-              <a:t>6 / 10</a:t>
-            </a:r>
-          </a:p>
-        </p:txBody>
-      </p:sp>
       <p:cxnSp>
         <p:nvCxnSpPr>
           <p:cNvPr id="7" name="Connector 6"/>
@@ -18083,6 +20615,80 @@
           </a:p>
         </p:txBody>
       </p:sp>
+      <p:sp>
+        <p:nvSpPr>
+          <p:cNvPr id="15" name="TextBox 14"/>
+          <p:cNvSpPr txBox="1"/>
+          <p:nvPr/>
+        </p:nvSpPr>
+        <p:spPr>
+          <a:xfrm>
+            <a:off x="566928" y="6419088"/>
+            <a:ext cx="7315200" cy="237744"/>
+          </a:xfrm>
+          <a:prstGeom prst="rect">
+            <a:avLst/>
+          </a:prstGeom>
+          <a:noFill/>
+        </p:spPr>
+        <p:txBody>
+          <a:bodyPr wrap="none" lIns="0" rIns="0" tIns="0" bIns="0">
+            <a:spAutoFit/>
+          </a:bodyPr>
+          <a:lstStyle/>
+          <a:p>
+            <a:pPr algn="l"/>
+            <a:r>
+              <a:rPr sz="800">
+                <a:solidFill>
+                  <a:srgbClr val="8C8C8C"/>
+                </a:solidFill>
+                <a:latin typeface="Arial"/>
+                <a:ea typeface="微软雅黑"/>
+                <a:cs typeface="Arial"/>
+              </a:rPr>
+              <a:t>RFID 读取能力评估 · 7H3AA-PALLET · 2026-10-22</a:t>
+            </a:r>
+          </a:p>
+        </p:txBody>
+      </p:sp>
+      <p:sp>
+        <p:nvSpPr>
+          <p:cNvPr id="16" name="TextBox 15"/>
+          <p:cNvSpPr txBox="1"/>
+          <p:nvPr/>
+        </p:nvSpPr>
+        <p:spPr>
+          <a:xfrm>
+            <a:off x="10893247" y="6419088"/>
+            <a:ext cx="731520" cy="237744"/>
+          </a:xfrm>
+          <a:prstGeom prst="rect">
+            <a:avLst/>
+          </a:prstGeom>
+          <a:noFill/>
+        </p:spPr>
+        <p:txBody>
+          <a:bodyPr wrap="none" lIns="0" rIns="0" tIns="0" bIns="0">
+            <a:spAutoFit/>
+          </a:bodyPr>
+          <a:lstStyle/>
+          <a:p>
+            <a:pPr algn="r"/>
+            <a:r>
+              <a:rPr sz="800">
+                <a:solidFill>
+                  <a:srgbClr val="8C8C8C"/>
+                </a:solidFill>
+                <a:latin typeface="Arial"/>
+                <a:ea typeface="微软雅黑"/>
+                <a:cs typeface="Arial"/>
+              </a:rPr>
+              <a:t>6 / 11</a:t>
+            </a:r>
+          </a:p>
+        </p:txBody>
+      </p:sp>
     </p:spTree>
   </p:cSld>
   <p:clrMapOvr>
@@ -18178,7 +20784,7 @@
                 <a:ea typeface="微软雅黑"/>
                 <a:cs typeface="Arial"/>
               </a:rPr>
-              <a:t>代号＝HQ代码-背壳（客户代码见 P10）；距离 10 cm、姿态 A1、厂家 A —— 只有箱型不同</a:t>
+              <a:t>代号＝HQ代码-背壳（客户代码见 P11）；距离 10 cm、姿态 A1、厂家 A —— 只有箱型不同</a:t>
             </a:r>
           </a:p>
         </p:txBody>
@@ -18218,88 +20824,6 @@
           </a:fontRef>
         </p:style>
       </p:cxnSp>
-      <p:sp>
-        <p:nvSpPr>
-          <p:cNvPr id="5" name="TextBox 4"/>
-          <p:cNvSpPr txBox="1"/>
-          <p:nvPr/>
-        </p:nvSpPr>
-        <p:spPr>
-          <a:xfrm>
-            <a:off x="566928" y="6419088"/>
-            <a:ext cx="7315200" cy="237744"/>
-          </a:xfrm>
-          <a:prstGeom prst="rect">
-            <a:avLst/>
-          </a:prstGeom>
-          <a:noFill/>
-        </p:spPr>
-        <p:txBody>
-          <a:bodyPr wrap="square" anchor="t" lIns="0" rIns="0" tIns="0" bIns="0">
-            <a:spAutoFit/>
-          </a:bodyPr>
-          <a:lstStyle/>
-          <a:p>
-            <a:pPr algn="l">
-              <a:lnSpc>
-                <a:spcPct val="100000"/>
-              </a:lnSpc>
-            </a:pPr>
-            <a:r>
-              <a:rPr sz="800" b="0">
-                <a:solidFill>
-                  <a:srgbClr val="8C8C8C"/>
-                </a:solidFill>
-                <a:latin typeface="Arial"/>
-                <a:ea typeface="微软雅黑"/>
-                <a:cs typeface="Arial"/>
-              </a:rPr>
-              <a:t>RFID 读取能力评估 · 7H3AA-PALLET · 2026-10-22</a:t>
-            </a:r>
-          </a:p>
-        </p:txBody>
-      </p:sp>
-      <p:sp>
-        <p:nvSpPr>
-          <p:cNvPr id="6" name="TextBox 5"/>
-          <p:cNvSpPr txBox="1"/>
-          <p:nvPr/>
-        </p:nvSpPr>
-        <p:spPr>
-          <a:xfrm>
-            <a:off x="10893247" y="6419088"/>
-            <a:ext cx="731520" cy="237744"/>
-          </a:xfrm>
-          <a:prstGeom prst="rect">
-            <a:avLst/>
-          </a:prstGeom>
-          <a:noFill/>
-        </p:spPr>
-        <p:txBody>
-          <a:bodyPr wrap="square" anchor="t" lIns="0" rIns="0" tIns="0" bIns="0">
-            <a:spAutoFit/>
-          </a:bodyPr>
-          <a:lstStyle/>
-          <a:p>
-            <a:pPr algn="r">
-              <a:lnSpc>
-                <a:spcPct val="100000"/>
-              </a:lnSpc>
-            </a:pPr>
-            <a:r>
-              <a:rPr sz="800" b="0">
-                <a:solidFill>
-                  <a:srgbClr val="8C8C8C"/>
-                </a:solidFill>
-                <a:latin typeface="Arial"/>
-                <a:ea typeface="微软雅黑"/>
-                <a:cs typeface="Arial"/>
-              </a:rPr>
-              <a:t>7 / 10</a:t>
-            </a:r>
-          </a:p>
-        </p:txBody>
-      </p:sp>
       <p:cxnSp>
         <p:nvCxnSpPr>
           <p:cNvPr id="7" name="Connector 6"/>
@@ -19735,6 +22259,80 @@
           </a:p>
         </p:txBody>
       </p:sp>
+      <p:sp>
+        <p:nvSpPr>
+          <p:cNvPr id="14" name="TextBox 13"/>
+          <p:cNvSpPr txBox="1"/>
+          <p:nvPr/>
+        </p:nvSpPr>
+        <p:spPr>
+          <a:xfrm>
+            <a:off x="566928" y="6419088"/>
+            <a:ext cx="7315200" cy="237744"/>
+          </a:xfrm>
+          <a:prstGeom prst="rect">
+            <a:avLst/>
+          </a:prstGeom>
+          <a:noFill/>
+        </p:spPr>
+        <p:txBody>
+          <a:bodyPr wrap="none" lIns="0" rIns="0" tIns="0" bIns="0">
+            <a:spAutoFit/>
+          </a:bodyPr>
+          <a:lstStyle/>
+          <a:p>
+            <a:pPr algn="l"/>
+            <a:r>
+              <a:rPr sz="800">
+                <a:solidFill>
+                  <a:srgbClr val="8C8C8C"/>
+                </a:solidFill>
+                <a:latin typeface="Arial"/>
+                <a:ea typeface="微软雅黑"/>
+                <a:cs typeface="Arial"/>
+              </a:rPr>
+              <a:t>RFID 读取能力评估 · 7H3AA-PALLET · 2026-10-22</a:t>
+            </a:r>
+          </a:p>
+        </p:txBody>
+      </p:sp>
+      <p:sp>
+        <p:nvSpPr>
+          <p:cNvPr id="15" name="TextBox 14"/>
+          <p:cNvSpPr txBox="1"/>
+          <p:nvPr/>
+        </p:nvSpPr>
+        <p:spPr>
+          <a:xfrm>
+            <a:off x="10893247" y="6419088"/>
+            <a:ext cx="731520" cy="237744"/>
+          </a:xfrm>
+          <a:prstGeom prst="rect">
+            <a:avLst/>
+          </a:prstGeom>
+          <a:noFill/>
+        </p:spPr>
+        <p:txBody>
+          <a:bodyPr wrap="none" lIns="0" rIns="0" tIns="0" bIns="0">
+            <a:spAutoFit/>
+          </a:bodyPr>
+          <a:lstStyle/>
+          <a:p>
+            <a:pPr algn="r"/>
+            <a:r>
+              <a:rPr sz="800">
+                <a:solidFill>
+                  <a:srgbClr val="8C8C8C"/>
+                </a:solidFill>
+                <a:latin typeface="Arial"/>
+                <a:ea typeface="微软雅黑"/>
+                <a:cs typeface="Arial"/>
+              </a:rPr>
+              <a:t>7 / 11</a:t>
+            </a:r>
+          </a:p>
+        </p:txBody>
+      </p:sp>
     </p:spTree>
   </p:cSld>
   <p:clrMapOvr>
@@ -19870,88 +22468,6 @@
           </a:fontRef>
         </p:style>
       </p:cxnSp>
-      <p:sp>
-        <p:nvSpPr>
-          <p:cNvPr id="5" name="TextBox 4"/>
-          <p:cNvSpPr txBox="1"/>
-          <p:nvPr/>
-        </p:nvSpPr>
-        <p:spPr>
-          <a:xfrm>
-            <a:off x="566928" y="6419088"/>
-            <a:ext cx="7315200" cy="237744"/>
-          </a:xfrm>
-          <a:prstGeom prst="rect">
-            <a:avLst/>
-          </a:prstGeom>
-          <a:noFill/>
-        </p:spPr>
-        <p:txBody>
-          <a:bodyPr wrap="square" anchor="t" lIns="0" rIns="0" tIns="0" bIns="0">
-            <a:spAutoFit/>
-          </a:bodyPr>
-          <a:lstStyle/>
-          <a:p>
-            <a:pPr algn="l">
-              <a:lnSpc>
-                <a:spcPct val="100000"/>
-              </a:lnSpc>
-            </a:pPr>
-            <a:r>
-              <a:rPr sz="800" b="0">
-                <a:solidFill>
-                  <a:srgbClr val="8C8C8C"/>
-                </a:solidFill>
-                <a:latin typeface="Arial"/>
-                <a:ea typeface="微软雅黑"/>
-                <a:cs typeface="Arial"/>
-              </a:rPr>
-              <a:t>RFID 读取能力评估 · 7H3AA-PALLET · 2026-10-22</a:t>
-            </a:r>
-          </a:p>
-        </p:txBody>
-      </p:sp>
-      <p:sp>
-        <p:nvSpPr>
-          <p:cNvPr id="6" name="TextBox 5"/>
-          <p:cNvSpPr txBox="1"/>
-          <p:nvPr/>
-        </p:nvSpPr>
-        <p:spPr>
-          <a:xfrm>
-            <a:off x="10893247" y="6419088"/>
-            <a:ext cx="731520" cy="237744"/>
-          </a:xfrm>
-          <a:prstGeom prst="rect">
-            <a:avLst/>
-          </a:prstGeom>
-          <a:noFill/>
-        </p:spPr>
-        <p:txBody>
-          <a:bodyPr wrap="square" anchor="t" lIns="0" rIns="0" tIns="0" bIns="0">
-            <a:spAutoFit/>
-          </a:bodyPr>
-          <a:lstStyle/>
-          <a:p>
-            <a:pPr algn="r">
-              <a:lnSpc>
-                <a:spcPct val="100000"/>
-              </a:lnSpc>
-            </a:pPr>
-            <a:r>
-              <a:rPr sz="800" b="0">
-                <a:solidFill>
-                  <a:srgbClr val="8C8C8C"/>
-                </a:solidFill>
-                <a:latin typeface="Arial"/>
-                <a:ea typeface="微软雅黑"/>
-                <a:cs typeface="Arial"/>
-              </a:rPr>
-              <a:t>8 / 10</a:t>
-            </a:r>
-          </a:p>
-        </p:txBody>
-      </p:sp>
       <p:cxnSp>
         <p:nvCxnSpPr>
           <p:cNvPr id="7" name="Connector 6"/>
@@ -21428,6 +23944,80 @@
           </a:p>
         </p:txBody>
       </p:sp>
+      <p:sp>
+        <p:nvSpPr>
+          <p:cNvPr id="26" name="TextBox 25"/>
+          <p:cNvSpPr txBox="1"/>
+          <p:nvPr/>
+        </p:nvSpPr>
+        <p:spPr>
+          <a:xfrm>
+            <a:off x="566928" y="6419088"/>
+            <a:ext cx="7315200" cy="237744"/>
+          </a:xfrm>
+          <a:prstGeom prst="rect">
+            <a:avLst/>
+          </a:prstGeom>
+          <a:noFill/>
+        </p:spPr>
+        <p:txBody>
+          <a:bodyPr wrap="none" lIns="0" rIns="0" tIns="0" bIns="0">
+            <a:spAutoFit/>
+          </a:bodyPr>
+          <a:lstStyle/>
+          <a:p>
+            <a:pPr algn="l"/>
+            <a:r>
+              <a:rPr sz="800">
+                <a:solidFill>
+                  <a:srgbClr val="8C8C8C"/>
+                </a:solidFill>
+                <a:latin typeface="Arial"/>
+                <a:ea typeface="微软雅黑"/>
+                <a:cs typeface="Arial"/>
+              </a:rPr>
+              <a:t>RFID 读取能力评估 · 7H3AA-PALLET · 2026-10-22</a:t>
+            </a:r>
+          </a:p>
+        </p:txBody>
+      </p:sp>
+      <p:sp>
+        <p:nvSpPr>
+          <p:cNvPr id="27" name="TextBox 26"/>
+          <p:cNvSpPr txBox="1"/>
+          <p:nvPr/>
+        </p:nvSpPr>
+        <p:spPr>
+          <a:xfrm>
+            <a:off x="10893247" y="6419088"/>
+            <a:ext cx="731520" cy="237744"/>
+          </a:xfrm>
+          <a:prstGeom prst="rect">
+            <a:avLst/>
+          </a:prstGeom>
+          <a:noFill/>
+        </p:spPr>
+        <p:txBody>
+          <a:bodyPr wrap="none" lIns="0" rIns="0" tIns="0" bIns="0">
+            <a:spAutoFit/>
+          </a:bodyPr>
+          <a:lstStyle/>
+          <a:p>
+            <a:pPr algn="r"/>
+            <a:r>
+              <a:rPr sz="800">
+                <a:solidFill>
+                  <a:srgbClr val="8C8C8C"/>
+                </a:solidFill>
+                <a:latin typeface="Arial"/>
+                <a:ea typeface="微软雅黑"/>
+                <a:cs typeface="Arial"/>
+              </a:rPr>
+              <a:t>8 / 11</a:t>
+            </a:r>
+          </a:p>
+        </p:txBody>
+      </p:sp>
     </p:spTree>
   </p:cSld>
   <p:clrMapOvr>
@@ -21563,88 +24153,6 @@
           </a:fontRef>
         </p:style>
       </p:cxnSp>
-      <p:sp>
-        <p:nvSpPr>
-          <p:cNvPr id="5" name="TextBox 4"/>
-          <p:cNvSpPr txBox="1"/>
-          <p:nvPr/>
-        </p:nvSpPr>
-        <p:spPr>
-          <a:xfrm>
-            <a:off x="566928" y="6419088"/>
-            <a:ext cx="7315200" cy="237744"/>
-          </a:xfrm>
-          <a:prstGeom prst="rect">
-            <a:avLst/>
-          </a:prstGeom>
-          <a:noFill/>
-        </p:spPr>
-        <p:txBody>
-          <a:bodyPr wrap="square" anchor="t" lIns="0" rIns="0" tIns="0" bIns="0">
-            <a:spAutoFit/>
-          </a:bodyPr>
-          <a:lstStyle/>
-          <a:p>
-            <a:pPr algn="l">
-              <a:lnSpc>
-                <a:spcPct val="100000"/>
-              </a:lnSpc>
-            </a:pPr>
-            <a:r>
-              <a:rPr sz="800" b="0">
-                <a:solidFill>
-                  <a:srgbClr val="8C8C8C"/>
-                </a:solidFill>
-                <a:latin typeface="Arial"/>
-                <a:ea typeface="微软雅黑"/>
-                <a:cs typeface="Arial"/>
-              </a:rPr>
-              <a:t>RFID 读取能力评估 · 7H3AA-PALLET · 2026-10-22</a:t>
-            </a:r>
-          </a:p>
-        </p:txBody>
-      </p:sp>
-      <p:sp>
-        <p:nvSpPr>
-          <p:cNvPr id="6" name="TextBox 5"/>
-          <p:cNvSpPr txBox="1"/>
-          <p:nvPr/>
-        </p:nvSpPr>
-        <p:spPr>
-          <a:xfrm>
-            <a:off x="10893247" y="6419088"/>
-            <a:ext cx="731520" cy="237744"/>
-          </a:xfrm>
-          <a:prstGeom prst="rect">
-            <a:avLst/>
-          </a:prstGeom>
-          <a:noFill/>
-        </p:spPr>
-        <p:txBody>
-          <a:bodyPr wrap="square" anchor="t" lIns="0" rIns="0" tIns="0" bIns="0">
-            <a:spAutoFit/>
-          </a:bodyPr>
-          <a:lstStyle/>
-          <a:p>
-            <a:pPr algn="r">
-              <a:lnSpc>
-                <a:spcPct val="100000"/>
-              </a:lnSpc>
-            </a:pPr>
-            <a:r>
-              <a:rPr sz="800" b="0">
-                <a:solidFill>
-                  <a:srgbClr val="8C8C8C"/>
-                </a:solidFill>
-                <a:latin typeface="Arial"/>
-                <a:ea typeface="微软雅黑"/>
-                <a:cs typeface="Arial"/>
-              </a:rPr>
-              <a:t>9 / 10</a:t>
-            </a:r>
-          </a:p>
-        </p:txBody>
-      </p:sp>
       <p:cxnSp>
         <p:nvCxnSpPr>
           <p:cNvPr id="7" name="Connector 6"/>
@@ -22921,6 +25429,80 @@
                 <a:cs typeface="Arial"/>
               </a:rPr>
               <a:t>现网基线已实测：先修“读不到”与“失败不阻断”，再谈距离/增益/厂家——否则改造收益无法验证</a:t>
+            </a:r>
+          </a:p>
+        </p:txBody>
+      </p:sp>
+      <p:sp>
+        <p:nvSpPr>
+          <p:cNvPr id="22" name="TextBox 21"/>
+          <p:cNvSpPr txBox="1"/>
+          <p:nvPr/>
+        </p:nvSpPr>
+        <p:spPr>
+          <a:xfrm>
+            <a:off x="566928" y="6419088"/>
+            <a:ext cx="7315200" cy="237744"/>
+          </a:xfrm>
+          <a:prstGeom prst="rect">
+            <a:avLst/>
+          </a:prstGeom>
+          <a:noFill/>
+        </p:spPr>
+        <p:txBody>
+          <a:bodyPr wrap="none" lIns="0" rIns="0" tIns="0" bIns="0">
+            <a:spAutoFit/>
+          </a:bodyPr>
+          <a:lstStyle/>
+          <a:p>
+            <a:pPr algn="l"/>
+            <a:r>
+              <a:rPr sz="800">
+                <a:solidFill>
+                  <a:srgbClr val="8C8C8C"/>
+                </a:solidFill>
+                <a:latin typeface="Arial"/>
+                <a:ea typeface="微软雅黑"/>
+                <a:cs typeface="Arial"/>
+              </a:rPr>
+              <a:t>RFID 读取能力评估 · 7H3AA-PALLET · 2026-10-22</a:t>
+            </a:r>
+          </a:p>
+        </p:txBody>
+      </p:sp>
+      <p:sp>
+        <p:nvSpPr>
+          <p:cNvPr id="23" name="TextBox 22"/>
+          <p:cNvSpPr txBox="1"/>
+          <p:nvPr/>
+        </p:nvSpPr>
+        <p:spPr>
+          <a:xfrm>
+            <a:off x="10893247" y="6419088"/>
+            <a:ext cx="731520" cy="237744"/>
+          </a:xfrm>
+          <a:prstGeom prst="rect">
+            <a:avLst/>
+          </a:prstGeom>
+          <a:noFill/>
+        </p:spPr>
+        <p:txBody>
+          <a:bodyPr wrap="none" lIns="0" rIns="0" tIns="0" bIns="0">
+            <a:spAutoFit/>
+          </a:bodyPr>
+          <a:lstStyle/>
+          <a:p>
+            <a:pPr algn="r"/>
+            <a:r>
+              <a:rPr sz="800">
+                <a:solidFill>
+                  <a:srgbClr val="8C8C8C"/>
+                </a:solidFill>
+                <a:latin typeface="Arial"/>
+                <a:ea typeface="微软雅黑"/>
+                <a:cs typeface="Arial"/>
+              </a:rPr>
+              <a:t>9 / 11</a:t>
             </a:r>
           </a:p>
         </p:txBody>
